--- a/docs/TOP-Feedback-Introduction.pptx
+++ b/docs/TOP-Feedback-Introduction.pptx
@@ -518,7 +518,7 @@
           <a:lstStyle/>
           <a:p>
             <a:r>
-              <a:t>TOP-Feedback collects feedback from cadets and turns it into something an instructor can act on. The single most important thing about it: there is no vendor and no server. Every record lives in a Google Drive folder the detachment owns.</a:t>
+              <a:t>A primer, not a training session. Three things to land: there is no vendor and no server; the detachment owns the data; and it turns feedback into something an instructor can act on rather than a stack of paper.</a:t>
             </a:r>
           </a:p>
         </p:txBody>
@@ -588,7 +588,7 @@
           <a:lstStyle/>
           <a:p>
             <a:r>
-              <a:t>The form is deliberately narrow. That constraint is what makes results comparable across a detachment and across terms.</a:t>
+              <a:t>The form is deliberately narrow. That constraint is exactly what makes results comparable between events, cohorts and terms.</a:t>
             </a:r>
           </a:p>
         </p:txBody>
@@ -658,7 +658,7 @@
           <a:lstStyle/>
           <a:p>
             <a:r>
-              <a:t>Point at the distribution. This example is bimodal — the mean of 5.75 describes nobody in the room.</a:t>
+              <a:t>Point at the distribution in the screenshot. It is bimodal — the mean of 5.75 describes nobody who was actually in the room.</a:t>
             </a:r>
           </a:p>
         </p:txBody>
@@ -728,7 +728,7 @@
           <a:lstStyle/>
           <a:p>
             <a:r>
-              <a:t>This is the single best argument for the analysis over a spreadsheet. A spreadsheet gives you the mean and stops.</a:t>
+              <a:t>This is the strongest single argument for the analysis over a spreadsheet. A spreadsheet gives you the mean and stops there.</a:t>
             </a:r>
           </a:p>
         </p:txBody>
@@ -798,7 +798,7 @@
           <a:lstStyle/>
           <a:p>
             <a:r>
-              <a:t>Be honest in the room: sentiment reads words, not meaning. It is a triage aid for deciding what to read first, never a substitute for reading.</a:t>
+              <a:t>Be straight about the limits in the room: it reads words, not meaning. It decides what you read first; it does not read for you.</a:t>
             </a:r>
           </a:p>
         </p:txBody>
@@ -868,7 +868,7 @@
           <a:lstStyle/>
           <a:p>
             <a:r>
-              <a:t>State the limits out loud: it matches words, not meaning, and a clear screen is not proof that nothing was reported. Follow detachment reporting procedures.</a:t>
+              <a:t>Say the limits out loud: it matches words, not meaning, and a clear screen is not proof that nothing was reported. Follow detachment reporting procedures either way.</a:t>
             </a:r>
           </a:p>
         </p:txBody>
@@ -938,7 +938,7 @@
           <a:lstStyle/>
           <a:p>
             <a:r>
-              <a:t>Expect this question. The receipt/response separation is the whole design, and the three-response threshold is the honest acknowledgement of the maths.</a:t>
+              <a:t>Expect this question. The receipt-versus-response separation is the whole design, and the three-response threshold is the honest limit of the maths.</a:t>
             </a:r>
           </a:p>
         </p:txBody>
@@ -1008,7 +1008,7 @@
           <a:lstStyle/>
           <a:p>
             <a:r>
-              <a:t>Mention the credentials list can only be read once, because only hashes are stored. Download it, distribute it, delete it.</a:t>
+              <a:t>Mention that the credentials list can only be read once, because only hashes are stored. Download it, hand it out, delete the file.</a:t>
             </a:r>
           </a:p>
         </p:txBody>
@@ -1078,7 +1078,7 @@
           <a:lstStyle/>
           <a:p>
             <a:r>
-              <a:t>Close here. Point at the setup guide PDF for anyone who will actually do the install.</a:t>
+              <a:t>Close here. Anyone who will actually perform the install should be given the setup guide PDF rather than this deck.</a:t>
             </a:r>
           </a:p>
         </p:txBody>
@@ -1148,7 +1148,7 @@
           <a:lstStyle/>
           <a:p>
             <a:r>
-              <a:t>Frame the problem before the product. The last bullet matters most to a commander: safety disclosures buried in unread paper.</a:t>
+              <a:t>These three answer the questions always asked first: where does the data go, what do I need to run it, and what does it cost.</a:t>
             </a:r>
           </a:p>
         </p:txBody>
@@ -1218,7 +1218,7 @@
           <a:lstStyle/>
           <a:p>
             <a:r>
-              <a:t>Three facts that answer the questions people always ask first: where does the data go, what do I need, what does it cost.</a:t>
+              <a:t>Frame the problem before the product. The last bullet is the one a commander cares about most.</a:t>
             </a:r>
           </a:p>
         </p:txBody>
@@ -1288,7 +1288,7 @@
           <a:lstStyle/>
           <a:p>
             <a:r>
-              <a:t>This slide answers the procurement question. There is no lock-in and no data processor. Emphasise that folder sharing is the real access control.</a:t>
+              <a:t>This is the procurement answer: no lock-in, no data processor, no contract. Stress that folder sharing is the real access control.</a:t>
             </a:r>
           </a:p>
         </p:txBody>
@@ -1358,7 +1358,7 @@
           <a:lstStyle/>
           <a:p>
             <a:r>
-              <a:t>Everyone signs in, cadets included. That is what makes 'one submission per student' mean something rather than relying on an honour system.</a:t>
+              <a:t>Everyone signs in, cadets included. That is what makes one-submission-per-student a fact rather than an honour system.</a:t>
             </a:r>
           </a:p>
         </p:txBody>
@@ -1428,7 +1428,7 @@
           <a:lstStyle/>
           <a:p>
             <a:r>
-              <a:t>A cadet sees their own list, not everything the detachment has ever issued. Scheduled forms stay hidden until their open date; overdue ones close automatically.</a:t>
+              <a:t>A cadet sees their own list, not everything the detachment ever issued. Scheduled forms stay hidden until they open; overdue ones close on their own.</a:t>
             </a:r>
           </a:p>
         </p:txBody>
@@ -1498,7 +1498,7 @@
           <a:lstStyle/>
           <a:p>
             <a:r>
-              <a:t>Neutral sits at 5, the true centre of a 1-9 scale. Instructors see both the word and the number; cadets only ever see the word.</a:t>
+              <a:t>Neutral sits at 5, the true centre of a 1-9 scale. Instructors see the word and the number together; cadets only ever see the word.</a:t>
             </a:r>
           </a:p>
         </p:txBody>
@@ -1568,7 +1568,7 @@
           <a:lstStyle/>
           <a:p>
             <a:r>
-              <a:t>Classroom wifi is unreliable. The offline queue is why a cadet never loses what they typed. Reading existing feedback does need a connection.</a:t>
+              <a:t>Classroom wifi is unreliable — that is the whole reason for the offline queue. Reading existing feedback still needs a connection.</a:t>
             </a:r>
           </a:p>
         </p:txBody>
@@ -1638,7 +1638,7 @@
           <a:lstStyle/>
           <a:p>
             <a:r>
-              <a:t>Create Feedback and Feedback Response and Analysis are the two headline actions. The tabs below hold the detail.</a:t>
+              <a:t>Create Feedback and Feedback Response and Analysis are the headline actions. The tabs underneath hold forms, students and database tools.</a:t>
             </a:r>
           </a:p>
         </p:txBody>
@@ -4683,9 +4683,7 @@
         <p:txBody>
           <a:bodyPr rtlCol="0" anchor="ctr"/>
           <a:lstStyle/>
-          <a:p>
-            <a:pPr algn="ctr"/>
-          </a:p>
+          <a:p/>
         </p:txBody>
       </p:sp>
       <p:sp>
@@ -4696,12 +4694,12 @@
         </p:nvSpPr>
         <p:spPr>
           <a:xfrm>
-            <a:off x="777240" y="1371600"/>
-            <a:ext cx="868680" cy="868680"/>
+            <a:off x="822960" y="1234440"/>
+            <a:ext cx="822960" cy="822960"/>
           </a:xfrm>
           <a:prstGeom prst="roundRect">
             <a:avLst>
-              <a:gd name="adj" fmla="val 18000"/>
+              <a:gd name="adj" fmla="val 20000"/>
             </a:avLst>
           </a:prstGeom>
           <a:solidFill>
@@ -4729,9 +4727,7 @@
         <p:txBody>
           <a:bodyPr rtlCol="0" anchor="ctr"/>
           <a:lstStyle/>
-          <a:p>
-            <a:pPr algn="ctr"/>
-          </a:p>
+          <a:p/>
         </p:txBody>
       </p:sp>
       <p:sp>
@@ -4742,8 +4738,8 @@
         </p:nvSpPr>
         <p:spPr>
           <a:xfrm>
-            <a:off x="777240" y="1481328"/>
-            <a:ext cx="868680" cy="640080"/>
+            <a:off x="822960" y="1344168"/>
+            <a:ext cx="822960" cy="603504"/>
           </a:xfrm>
           <a:prstGeom prst="rect">
             <a:avLst/>
@@ -4751,17 +4747,25 @@
           <a:noFill/>
         </p:spPr>
         <p:txBody>
-          <a:bodyPr wrap="none">
-            <a:spAutoFit/>
+          <a:bodyPr wrap="square" anchor="t" lIns="0" rIns="0" tIns="0" bIns="0">
+            <a:noAutofit/>
           </a:bodyPr>
           <a:lstStyle/>
           <a:p>
-            <a:pPr algn="ctr"/>
-            <a:r>
-              <a:rPr sz="4000" b="1">
+            <a:pPr algn="ctr">
+              <a:lnSpc>
+                <a:spcPct val="122000"/>
+              </a:lnSpc>
+              <a:spcAft>
+                <a:spcPts val="0"/>
+              </a:spcAft>
+            </a:pPr>
+            <a:r>
+              <a:rPr sz="3800" b="1">
                 <a:solidFill>
                   <a:srgbClr val="1C4F8B"/>
                 </a:solidFill>
+                <a:latin typeface="Calibri"/>
               </a:rPr>
               <a:t>✓</a:t>
             </a:r>
@@ -4776,8 +4780,8 @@
         </p:nvSpPr>
         <p:spPr>
           <a:xfrm>
-            <a:off x="777240" y="2697480"/>
-            <a:ext cx="9144000" cy="1280160"/>
+            <a:off x="822960" y="2606040"/>
+            <a:ext cx="10058400" cy="1143000"/>
           </a:xfrm>
           <a:prstGeom prst="rect">
             <a:avLst/>
@@ -4786,24 +4790,24 @@
         </p:spPr>
         <p:txBody>
           <a:bodyPr wrap="square" anchor="t" lIns="0" rIns="0" tIns="0" bIns="0">
-            <a:spAutoFit/>
+            <a:noAutofit/>
           </a:bodyPr>
           <a:lstStyle/>
           <a:p>
             <a:pPr algn="l">
               <a:lnSpc>
-                <a:spcPct val="118000"/>
+                <a:spcPct val="122000"/>
               </a:lnSpc>
               <a:spcAft>
                 <a:spcPts val="0"/>
               </a:spcAft>
             </a:pPr>
             <a:r>
-              <a:rPr sz="6000" b="1">
+              <a:rPr sz="5800" b="1">
                 <a:solidFill>
                   <a:srgbClr val="FFFFFF"/>
                 </a:solidFill>
-                <a:latin typeface="Helvetica Neue"/>
+                <a:latin typeface="Calibri"/>
               </a:rPr>
               <a:t>TOP-Feedback</a:t>
             </a:r>
@@ -4818,8 +4822,8 @@
         </p:nvSpPr>
         <p:spPr>
           <a:xfrm>
-            <a:off x="777240" y="3886200"/>
-            <a:ext cx="8686800" cy="731520"/>
+            <a:off x="822960" y="3840480"/>
+            <a:ext cx="8961120" cy="1005840"/>
           </a:xfrm>
           <a:prstGeom prst="rect">
             <a:avLst/>
@@ -4828,16 +4832,16 @@
         </p:spPr>
         <p:txBody>
           <a:bodyPr wrap="square" anchor="t" lIns="0" rIns="0" tIns="0" bIns="0">
-            <a:spAutoFit/>
+            <a:noAutofit/>
           </a:bodyPr>
           <a:lstStyle/>
           <a:p>
             <a:pPr algn="l">
               <a:lnSpc>
-                <a:spcPct val="118000"/>
-              </a:lnSpc>
-              <a:spcAft>
-                <a:spcPts val="400"/>
+                <a:spcPct val="122000"/>
+              </a:lnSpc>
+              <a:spcAft>
+                <a:spcPts val="500"/>
               </a:spcAft>
             </a:pPr>
             <a:r>
@@ -4845,7 +4849,7 @@
                 <a:solidFill>
                   <a:srgbClr val="FFFFFF"/>
                 </a:solidFill>
-                <a:latin typeface="Helvetica Neue"/>
+                <a:latin typeface="Calibri"/>
               </a:rPr>
               <a:t>The student and instructor feedback cycle,</a:t>
             </a:r>
@@ -4853,7 +4857,7 @@
           <a:p>
             <a:pPr algn="l">
               <a:lnSpc>
-                <a:spcPct val="118000"/>
+                <a:spcPct val="122000"/>
               </a:lnSpc>
               <a:spcAft>
                 <a:spcPts val="0"/>
@@ -4864,7 +4868,7 @@
                 <a:solidFill>
                   <a:srgbClr val="FFFFFF"/>
                 </a:solidFill>
-                <a:latin typeface="Helvetica Neue"/>
+                <a:latin typeface="Calibri"/>
               </a:rPr>
               <a:t>owned entirely by your detachment.</a:t>
             </a:r>
@@ -4879,8 +4883,8 @@
         </p:nvSpPr>
         <p:spPr>
           <a:xfrm>
-            <a:off x="777240" y="5257800"/>
-            <a:ext cx="1097280" cy="28575"/>
+            <a:off x="822960" y="5230368"/>
+            <a:ext cx="1051560" cy="28575"/>
           </a:xfrm>
           <a:prstGeom prst="rect">
             <a:avLst/>
@@ -4910,9 +4914,7 @@
         <p:txBody>
           <a:bodyPr rtlCol="0" anchor="ctr"/>
           <a:lstStyle/>
-          <a:p>
-            <a:pPr algn="ctr"/>
-          </a:p>
+          <a:p/>
         </p:txBody>
       </p:sp>
       <p:sp>
@@ -4923,8 +4925,8 @@
         </p:nvSpPr>
         <p:spPr>
           <a:xfrm>
-            <a:off x="777240" y="5532120"/>
-            <a:ext cx="8229600" cy="457200"/>
+            <a:off x="822960" y="5486400"/>
+            <a:ext cx="9144000" cy="411480"/>
           </a:xfrm>
           <a:prstGeom prst="rect">
             <a:avLst/>
@@ -4933,26 +4935,26 @@
         </p:spPr>
         <p:txBody>
           <a:bodyPr wrap="square" anchor="t" lIns="0" rIns="0" tIns="0" bIns="0">
-            <a:spAutoFit/>
+            <a:noAutofit/>
           </a:bodyPr>
           <a:lstStyle/>
           <a:p>
             <a:pPr algn="l">
               <a:lnSpc>
-                <a:spcPct val="118000"/>
+                <a:spcPct val="122000"/>
               </a:lnSpc>
               <a:spcAft>
                 <a:spcPts val="0"/>
               </a:spcAft>
             </a:pPr>
             <a:r>
-              <a:rPr sz="1400" b="0">
+              <a:rPr sz="1500" b="0">
                 <a:solidFill>
                   <a:srgbClr val="FFFFFF"/>
                 </a:solidFill>
-                <a:latin typeface="Helvetica Neue"/>
-              </a:rPr>
-              <a:t>An introduction  ·  What it does and how to use it</a:t>
+                <a:latin typeface="Calibri"/>
+              </a:rPr>
+              <a:t>An introduction — what it is, what it does, and how it is used</a:t>
             </a:r>
           </a:p>
         </p:txBody>
@@ -4983,8 +4985,8 @@
         </p:nvSpPr>
         <p:spPr>
           <a:xfrm>
-            <a:off x="777240" y="566928"/>
-            <a:ext cx="8229600" cy="274320"/>
+            <a:off x="822960" y="502920"/>
+            <a:ext cx="8229600" cy="292608"/>
           </a:xfrm>
           <a:prstGeom prst="rect">
             <a:avLst/>
@@ -4993,26 +4995,26 @@
         </p:spPr>
         <p:txBody>
           <a:bodyPr wrap="square" anchor="t" lIns="0" rIns="0" tIns="0" bIns="0">
-            <a:spAutoFit/>
+            <a:noAutofit/>
           </a:bodyPr>
           <a:lstStyle/>
           <a:p>
             <a:pPr algn="l">
               <a:lnSpc>
-                <a:spcPct val="118000"/>
+                <a:spcPct val="122000"/>
               </a:lnSpc>
               <a:spcAft>
                 <a:spcPts val="0"/>
               </a:spcAft>
             </a:pPr>
             <a:r>
-              <a:rPr sz="1100" b="1">
+              <a:rPr sz="1200" b="1">
                 <a:solidFill>
                   <a:srgbClr val="1C4F8B"/>
                 </a:solidFill>
-                <a:latin typeface="Helvetica Neue"/>
-              </a:rPr>
-              <a:t>CREATE FEEDBACK</a:t>
+                <a:latin typeface="Calibri"/>
+              </a:rPr>
+              <a:t>CREATING FEEDBACK</a:t>
             </a:r>
           </a:p>
         </p:txBody>
@@ -5025,8 +5027,8 @@
         </p:nvSpPr>
         <p:spPr>
           <a:xfrm>
-            <a:off x="777240" y="914400"/>
-            <a:ext cx="10607040" cy="914400"/>
+            <a:off x="822960" y="896112"/>
+            <a:ext cx="10545775" cy="960120"/>
           </a:xfrm>
           <a:prstGeom prst="rect">
             <a:avLst/>
@@ -5035,13 +5037,13 @@
         </p:spPr>
         <p:txBody>
           <a:bodyPr wrap="square" anchor="t" lIns="0" rIns="0" tIns="0" bIns="0">
-            <a:spAutoFit/>
+            <a:noAutofit/>
           </a:bodyPr>
           <a:lstStyle/>
           <a:p>
             <a:pPr algn="l">
               <a:lnSpc>
-                <a:spcPct val="118000"/>
+                <a:spcPct val="122000"/>
               </a:lnSpc>
               <a:spcAft>
                 <a:spcPts val="0"/>
@@ -5052,7 +5054,7 @@
                 <a:solidFill>
                   <a:srgbClr val="14181F"/>
                 </a:solidFill>
-                <a:latin typeface="Helvetica Neue"/>
+                <a:latin typeface="Calibri"/>
               </a:rPr>
               <a:t>A standardized form, in about two minutes</a:t>
             </a:r>
@@ -5067,7 +5069,7 @@
         </p:nvSpPr>
         <p:spPr>
           <a:xfrm>
-            <a:off x="2836365" y="2139315"/>
+            <a:off x="2790645" y="2139315"/>
             <a:ext cx="2282550" cy="3950970"/>
           </a:xfrm>
           <a:prstGeom prst="rect">
@@ -5078,7 +5080,7 @@
           </a:solidFill>
           <a:ln w="12700">
             <a:solidFill>
-              <a:srgbClr val="D8DEE8"/>
+              <a:srgbClr val="D3DCE8"/>
             </a:solidFill>
           </a:ln>
           <a:effectLst/>
@@ -5100,9 +5102,7 @@
         <p:txBody>
           <a:bodyPr rtlCol="0" anchor="ctr"/>
           <a:lstStyle/>
-          <a:p>
-            <a:pPr algn="ctr"/>
-          </a:p>
+          <a:p/>
         </p:txBody>
       </p:sp>
       <p:pic>
@@ -5121,7 +5121,7 @@
         </p:blipFill>
         <p:spPr>
           <a:xfrm>
-            <a:off x="2845890" y="2148840"/>
+            <a:off x="2800170" y="2148840"/>
             <a:ext cx="2263500" cy="3931920"/>
           </a:xfrm>
           <a:prstGeom prst="rect">
@@ -5137,8 +5137,8 @@
         </p:nvSpPr>
         <p:spPr>
           <a:xfrm>
-            <a:off x="7589520" y="2377440"/>
-            <a:ext cx="3840480" cy="3657600"/>
+            <a:off x="7406640" y="2240280"/>
+            <a:ext cx="4023360" cy="3794760"/>
           </a:xfrm>
           <a:prstGeom prst="rect">
             <a:avLst/>
@@ -5146,14 +5146,14 @@
           <a:noFill/>
         </p:spPr>
         <p:txBody>
-          <a:bodyPr wrap="square" lIns="0" rIns="0" tIns="0" bIns="0">
-            <a:spAutoFit/>
+          <a:bodyPr wrap="square" anchor="t" lIns="0" rIns="0" tIns="0" bIns="0">
+            <a:noAutofit/>
           </a:bodyPr>
           <a:lstStyle/>
           <a:p>
-            <a:pPr>
-              <a:lnSpc>
-                <a:spcPct val="125000"/>
+            <a:pPr algn="l">
+              <a:lnSpc>
+                <a:spcPct val="122000"/>
               </a:lnSpc>
               <a:spcAft>
                 <a:spcPts val="1000"/>
@@ -5164,15 +5164,15 @@
                 <a:solidFill>
                   <a:srgbClr val="14181F"/>
                 </a:solidFill>
-                <a:latin typeface="Helvetica Neue"/>
+                <a:latin typeface="Calibri"/>
               </a:rPr>
               <a:t>Name the class or event</a:t>
             </a:r>
           </a:p>
           <a:p>
-            <a:pPr>
-              <a:lnSpc>
-                <a:spcPct val="125000"/>
+            <a:pPr algn="l">
+              <a:lnSpc>
+                <a:spcPct val="122000"/>
               </a:lnSpc>
               <a:spcAft>
                 <a:spcPts val="1000"/>
@@ -5183,34 +5183,34 @@
                 <a:solidFill>
                   <a:srgbClr val="14181F"/>
                 </a:solidFill>
-                <a:latin typeface="Helvetica Neue"/>
-              </a:rPr>
-              <a:t>Pick the AS level, term and dates</a:t>
-            </a:r>
-          </a:p>
-          <a:p>
-            <a:pPr lvl="1">
-              <a:lnSpc>
-                <a:spcPct val="125000"/>
-              </a:lnSpc>
-              <a:spcAft>
-                <a:spcPts val="600"/>
-              </a:spcAft>
-            </a:pPr>
-            <a:r>
-              <a:rPr sz="1200" b="0">
+                <a:latin typeface="Calibri"/>
+              </a:rPr>
+              <a:t>Set the AS level, term and dates</a:t>
+            </a:r>
+          </a:p>
+          <a:p>
+            <a:pPr algn="l">
+              <a:lnSpc>
+                <a:spcPct val="122000"/>
+              </a:lnSpc>
+              <a:spcAft>
+                <a:spcPts val="500"/>
+              </a:spcAft>
+            </a:pPr>
+            <a:r>
+              <a:rPr sz="1100" b="0">
                 <a:solidFill>
                   <a:srgbClr val="55606E"/>
                 </a:solidFill>
-                <a:latin typeface="Helvetica Neue"/>
-              </a:rPr>
-              <a:t>—  Scheduled forms stay hidden until they open.</a:t>
-            </a:r>
-          </a:p>
-          <a:p>
-            <a:pPr>
-              <a:lnSpc>
-                <a:spcPct val="125000"/>
+                <a:latin typeface="Calibri"/>
+              </a:rPr>
+              <a:t>   Scheduled forms stay hidden until they open.</a:t>
+            </a:r>
+          </a:p>
+          <a:p>
+            <a:pPr algn="l">
+              <a:lnSpc>
+                <a:spcPct val="122000"/>
               </a:lnSpc>
               <a:spcAft>
                 <a:spcPts val="1000"/>
@@ -5221,34 +5221,34 @@
                 <a:solidFill>
                   <a:srgbClr val="14181F"/>
                 </a:solidFill>
-                <a:latin typeface="Helvetica Neue"/>
-              </a:rPr>
-              <a:t>Choose who gets it</a:t>
-            </a:r>
-          </a:p>
-          <a:p>
-            <a:pPr lvl="1">
-              <a:lnSpc>
-                <a:spcPct val="125000"/>
-              </a:lnSpc>
-              <a:spcAft>
-                <a:spcPts val="600"/>
-              </a:spcAft>
-            </a:pPr>
-            <a:r>
-              <a:rPr sz="1200" b="0">
+                <a:latin typeface="Calibri"/>
+              </a:rPr>
+              <a:t>Choose who receives it</a:t>
+            </a:r>
+          </a:p>
+          <a:p>
+            <a:pPr algn="l">
+              <a:lnSpc>
+                <a:spcPct val="122000"/>
+              </a:lnSpc>
+              <a:spcAft>
+                <a:spcPts val="500"/>
+              </a:spcAft>
+            </a:pPr>
+            <a:r>
+              <a:rPr sz="1100" b="0">
                 <a:solidFill>
                   <a:srgbClr val="55606E"/>
                 </a:solidFill>
-                <a:latin typeface="Helvetica Neue"/>
-              </a:rPr>
-              <a:t>—  Everyone at that level, or named cadets.</a:t>
-            </a:r>
-          </a:p>
-          <a:p>
-            <a:pPr>
-              <a:lnSpc>
-                <a:spcPct val="125000"/>
+                <a:latin typeface="Calibri"/>
+              </a:rPr>
+              <a:t>   Everyone at that level, or named cadets.</a:t>
+            </a:r>
+          </a:p>
+          <a:p>
+            <a:pPr algn="l">
+              <a:lnSpc>
+                <a:spcPct val="122000"/>
               </a:lnSpc>
               <a:spcAft>
                 <a:spcPts val="1000"/>
@@ -5259,34 +5259,34 @@
                 <a:solidFill>
                   <a:srgbClr val="14181F"/>
                 </a:solidFill>
-                <a:latin typeface="Helvetica Neue"/>
-              </a:rPr>
-              <a:t>Add questions — minimum three</a:t>
-            </a:r>
-          </a:p>
-          <a:p>
-            <a:pPr lvl="1">
-              <a:lnSpc>
-                <a:spcPct val="125000"/>
-              </a:lnSpc>
-              <a:spcAft>
-                <a:spcPts val="600"/>
-              </a:spcAft>
-            </a:pPr>
-            <a:r>
-              <a:rPr sz="1200" b="0">
+                <a:latin typeface="Calibri"/>
+              </a:rPr>
+              <a:t>Add questions — three minimum</a:t>
+            </a:r>
+          </a:p>
+          <a:p>
+            <a:pPr algn="l">
+              <a:lnSpc>
+                <a:spcPct val="122000"/>
+              </a:lnSpc>
+              <a:spcAft>
+                <a:spcPts val="500"/>
+              </a:spcAft>
+            </a:pPr>
+            <a:r>
+              <a:rPr sz="1100" b="0">
                 <a:solidFill>
                   <a:srgbClr val="55606E"/>
                 </a:solidFill>
-                <a:latin typeface="Helvetica Neue"/>
-              </a:rPr>
-              <a:t>—  A rating, or a written answer. No maximum.</a:t>
-            </a:r>
-          </a:p>
-          <a:p>
-            <a:pPr>
-              <a:lnSpc>
-                <a:spcPct val="125000"/>
+                <a:latin typeface="Calibri"/>
+              </a:rPr>
+              <a:t>   A rating or a written answer. No maximum.</a:t>
+            </a:r>
+          </a:p>
+          <a:p>
+            <a:pPr algn="l">
+              <a:lnSpc>
+                <a:spcPct val="122000"/>
               </a:lnSpc>
               <a:spcAft>
                 <a:spcPts val="1000"/>
@@ -5297,28 +5297,28 @@
                 <a:solidFill>
                   <a:srgbClr val="14181F"/>
                 </a:solidFill>
-                <a:latin typeface="Helvetica Neue"/>
+                <a:latin typeface="Calibri"/>
               </a:rPr>
               <a:t>Every form gets an ID</a:t>
             </a:r>
           </a:p>
           <a:p>
-            <a:pPr lvl="1">
-              <a:lnSpc>
-                <a:spcPct val="125000"/>
-              </a:lnSpc>
-              <a:spcAft>
-                <a:spcPts val="600"/>
-              </a:spcAft>
-            </a:pPr>
-            <a:r>
-              <a:rPr sz="1200" b="0">
+            <a:pPr algn="l">
+              <a:lnSpc>
+                <a:spcPct val="122000"/>
+              </a:lnSpc>
+              <a:spcAft>
+                <a:spcPts val="500"/>
+              </a:spcAft>
+            </a:pPr>
+            <a:r>
+              <a:rPr sz="1100" b="0">
                 <a:solidFill>
                   <a:srgbClr val="55606E"/>
                 </a:solidFill>
-                <a:latin typeface="Helvetica Neue"/>
-              </a:rPr>
-              <a:t>—  FB-2026-0001, to quote in conversation.</a:t>
+                <a:latin typeface="Calibri"/>
+              </a:rPr>
+              <a:t>   Such as FB-2026-0001, to quote in conversation.</a:t>
             </a:r>
           </a:p>
         </p:txBody>
@@ -5331,8 +5331,8 @@
         </p:nvSpPr>
         <p:spPr>
           <a:xfrm>
-            <a:off x="10972800" y="6355080"/>
-            <a:ext cx="548640" cy="274320"/>
+            <a:off x="10881360" y="6327648"/>
+            <a:ext cx="502920" cy="274320"/>
           </a:xfrm>
           <a:prstGeom prst="rect">
             <a:avLst/>
@@ -5341,24 +5341,24 @@
         </p:spPr>
         <p:txBody>
           <a:bodyPr wrap="square" anchor="t" lIns="0" rIns="0" tIns="0" bIns="0">
-            <a:spAutoFit/>
+            <a:noAutofit/>
           </a:bodyPr>
           <a:lstStyle/>
           <a:p>
             <a:pPr algn="r">
               <a:lnSpc>
-                <a:spcPct val="118000"/>
+                <a:spcPct val="122000"/>
               </a:lnSpc>
               <a:spcAft>
                 <a:spcPts val="0"/>
               </a:spcAft>
             </a:pPr>
             <a:r>
-              <a:rPr sz="1000" b="0">
+              <a:rPr sz="1100" b="0">
                 <a:solidFill>
                   <a:srgbClr val="8A939F"/>
                 </a:solidFill>
-                <a:latin typeface="Helvetica Neue"/>
+                <a:latin typeface="Calibri"/>
               </a:rPr>
               <a:t>10</a:t>
             </a:r>
@@ -5391,8 +5391,8 @@
         </p:nvSpPr>
         <p:spPr>
           <a:xfrm>
-            <a:off x="777240" y="566928"/>
-            <a:ext cx="8229600" cy="274320"/>
+            <a:off x="822960" y="502920"/>
+            <a:ext cx="8229600" cy="292608"/>
           </a:xfrm>
           <a:prstGeom prst="rect">
             <a:avLst/>
@@ -5401,26 +5401,26 @@
         </p:spPr>
         <p:txBody>
           <a:bodyPr wrap="square" anchor="t" lIns="0" rIns="0" tIns="0" bIns="0">
-            <a:spAutoFit/>
+            <a:noAutofit/>
           </a:bodyPr>
           <a:lstStyle/>
           <a:p>
             <a:pPr algn="l">
               <a:lnSpc>
-                <a:spcPct val="118000"/>
+                <a:spcPct val="122000"/>
               </a:lnSpc>
               <a:spcAft>
                 <a:spcPts val="0"/>
               </a:spcAft>
             </a:pPr>
             <a:r>
-              <a:rPr sz="1100" b="1">
+              <a:rPr sz="1200" b="1">
                 <a:solidFill>
                   <a:srgbClr val="1C4F8B"/>
                 </a:solidFill>
-                <a:latin typeface="Helvetica Neue"/>
-              </a:rPr>
-              <a:t>ANALYSIS · RATINGS</a:t>
+                <a:latin typeface="Calibri"/>
+              </a:rPr>
+              <a:t>ANALYSIS — RATINGS</a:t>
             </a:r>
           </a:p>
         </p:txBody>
@@ -5433,8 +5433,8 @@
         </p:nvSpPr>
         <p:spPr>
           <a:xfrm>
-            <a:off x="777240" y="914400"/>
-            <a:ext cx="10607040" cy="914400"/>
+            <a:off x="822960" y="896112"/>
+            <a:ext cx="10545775" cy="960120"/>
           </a:xfrm>
           <a:prstGeom prst="rect">
             <a:avLst/>
@@ -5443,13 +5443,13 @@
         </p:spPr>
         <p:txBody>
           <a:bodyPr wrap="square" anchor="t" lIns="0" rIns="0" tIns="0" bIns="0">
-            <a:spAutoFit/>
+            <a:noAutofit/>
           </a:bodyPr>
           <a:lstStyle/>
           <a:p>
             <a:pPr algn="l">
               <a:lnSpc>
-                <a:spcPct val="118000"/>
+                <a:spcPct val="122000"/>
               </a:lnSpc>
               <a:spcAft>
                 <a:spcPts val="0"/>
@@ -5460,9 +5460,9 @@
                 <a:solidFill>
                   <a:srgbClr val="14181F"/>
                 </a:solidFill>
-                <a:latin typeface="Helvetica Neue"/>
-              </a:rPr>
-              <a:t>Everything a mean alone would hide</a:t>
+                <a:latin typeface="Calibri"/>
+              </a:rPr>
+              <a:t>Everything an average on its own would hide</a:t>
             </a:r>
           </a:p>
         </p:txBody>
@@ -5475,8 +5475,8 @@
         </p:nvSpPr>
         <p:spPr>
           <a:xfrm>
-            <a:off x="1363155" y="2093595"/>
-            <a:ext cx="5594730" cy="4042410"/>
+            <a:off x="1380795" y="2139315"/>
+            <a:ext cx="5468010" cy="3950970"/>
           </a:xfrm>
           <a:prstGeom prst="rect">
             <a:avLst/>
@@ -5486,7 +5486,7 @@
           </a:solidFill>
           <a:ln w="12700">
             <a:solidFill>
-              <a:srgbClr val="D8DEE8"/>
+              <a:srgbClr val="D3DCE8"/>
             </a:solidFill>
           </a:ln>
           <a:effectLst/>
@@ -5508,9 +5508,7 @@
         <p:txBody>
           <a:bodyPr rtlCol="0" anchor="ctr"/>
           <a:lstStyle/>
-          <a:p>
-            <a:pPr algn="ctr"/>
-          </a:p>
+          <a:p/>
         </p:txBody>
       </p:sp>
       <p:pic>
@@ -5529,8 +5527,8 @@
         </p:blipFill>
         <p:spPr>
           <a:xfrm>
-            <a:off x="1372680" y="2103120"/>
-            <a:ext cx="5575680" cy="4023360"/>
+            <a:off x="1390320" y="2148840"/>
+            <a:ext cx="5448960" cy="3931920"/>
           </a:xfrm>
           <a:prstGeom prst="rect">
             <a:avLst/>
@@ -5545,8 +5543,8 @@
         </p:nvSpPr>
         <p:spPr>
           <a:xfrm>
-            <a:off x="7955279" y="2286000"/>
-            <a:ext cx="3474720" cy="3657600"/>
+            <a:off x="7772400" y="2240280"/>
+            <a:ext cx="3657600" cy="3794760"/>
           </a:xfrm>
           <a:prstGeom prst="rect">
             <a:avLst/>
@@ -5554,14 +5552,14 @@
           <a:noFill/>
         </p:spPr>
         <p:txBody>
-          <a:bodyPr wrap="square" lIns="0" rIns="0" tIns="0" bIns="0">
-            <a:spAutoFit/>
+          <a:bodyPr wrap="square" anchor="t" lIns="0" rIns="0" tIns="0" bIns="0">
+            <a:noAutofit/>
           </a:bodyPr>
           <a:lstStyle/>
           <a:p>
-            <a:pPr>
-              <a:lnSpc>
-                <a:spcPct val="125000"/>
+            <a:pPr algn="l">
+              <a:lnSpc>
+                <a:spcPct val="122000"/>
               </a:lnSpc>
               <a:spcAft>
                 <a:spcPts val="1100"/>
@@ -5572,15 +5570,15 @@
                 <a:solidFill>
                   <a:srgbClr val="14181F"/>
                 </a:solidFill>
-                <a:latin typeface="Helvetica Neue"/>
-              </a:rPr>
-              <a:t>Mean, median, mode, range, spread</a:t>
-            </a:r>
-          </a:p>
-          <a:p>
-            <a:pPr>
-              <a:lnSpc>
-                <a:spcPct val="125000"/>
+                <a:latin typeface="Calibri"/>
+              </a:rPr>
+              <a:t>Mean, median, range and spread</a:t>
+            </a:r>
+          </a:p>
+          <a:p>
+            <a:pPr algn="l">
+              <a:lnSpc>
+                <a:spcPct val="122000"/>
               </a:lnSpc>
               <a:spcAft>
                 <a:spcPts val="1100"/>
@@ -5591,34 +5589,34 @@
                 <a:solidFill>
                   <a:srgbClr val="14181F"/>
                 </a:solidFill>
-                <a:latin typeface="Helvetica Neue"/>
-              </a:rPr>
-              <a:t>Distribution across every point</a:t>
-            </a:r>
-          </a:p>
-          <a:p>
-            <a:pPr lvl="1">
-              <a:lnSpc>
-                <a:spcPct val="125000"/>
-              </a:lnSpc>
-              <a:spcAft>
-                <a:spcPts val="700"/>
-              </a:spcAft>
-            </a:pPr>
-            <a:r>
-              <a:rPr sz="1200" b="0">
+                <a:latin typeface="Calibri"/>
+              </a:rPr>
+              <a:t>The distribution across every rating</a:t>
+            </a:r>
+          </a:p>
+          <a:p>
+            <a:pPr algn="l">
+              <a:lnSpc>
+                <a:spcPct val="122000"/>
+              </a:lnSpc>
+              <a:spcAft>
+                <a:spcPts val="600"/>
+              </a:spcAft>
+            </a:pPr>
+            <a:r>
+              <a:rPr sz="1100" b="0">
                 <a:solidFill>
                   <a:srgbClr val="55606E"/>
                 </a:solidFill>
-                <a:latin typeface="Helvetica Neue"/>
-              </a:rPr>
-              <a:t>—  Shape you can see, not infer.</a:t>
-            </a:r>
-          </a:p>
-          <a:p>
-            <a:pPr>
-              <a:lnSpc>
-                <a:spcPct val="125000"/>
+                <a:latin typeface="Calibri"/>
+              </a:rPr>
+              <a:t>   Shape you can see rather than infer.</a:t>
+            </a:r>
+          </a:p>
+          <a:p>
+            <a:pPr algn="l">
+              <a:lnSpc>
+                <a:spcPct val="122000"/>
               </a:lnSpc>
               <a:spcAft>
                 <a:spcPts val="1100"/>
@@ -5629,34 +5627,34 @@
                 <a:solidFill>
                   <a:srgbClr val="14181F"/>
                 </a:solidFill>
-                <a:latin typeface="Helvetica Neue"/>
-              </a:rPr>
-              <a:t>Agreement, scored 0 to 1</a:t>
-            </a:r>
-          </a:p>
-          <a:p>
-            <a:pPr lvl="1">
-              <a:lnSpc>
-                <a:spcPct val="125000"/>
-              </a:lnSpc>
-              <a:spcAft>
-                <a:spcPts val="700"/>
-              </a:spcAft>
-            </a:pPr>
-            <a:r>
-              <a:rPr sz="1200" b="0">
+                <a:latin typeface="Calibri"/>
+              </a:rPr>
+              <a:t>An agreement score from 0 to 1</a:t>
+            </a:r>
+          </a:p>
+          <a:p>
+            <a:pPr algn="l">
+              <a:lnSpc>
+                <a:spcPct val="122000"/>
+              </a:lnSpc>
+              <a:spcAft>
+                <a:spcPts val="600"/>
+              </a:spcAft>
+            </a:pPr>
+            <a:r>
+              <a:rPr sz="1100" b="0">
                 <a:solidFill>
                   <a:srgbClr val="55606E"/>
                 </a:solidFill>
-                <a:latin typeface="Helvetica Neue"/>
-              </a:rPr>
-              <a:t>—  Do they actually agree?</a:t>
-            </a:r>
-          </a:p>
-          <a:p>
-            <a:pPr>
-              <a:lnSpc>
-                <a:spcPct val="125000"/>
+                <a:latin typeface="Calibri"/>
+              </a:rPr>
+              <a:t>   Did they actually agree, or just average out?</a:t>
+            </a:r>
+          </a:p>
+          <a:p>
+            <a:pPr algn="l">
+              <a:lnSpc>
+                <a:spcPct val="122000"/>
               </a:lnSpc>
               <a:spcAft>
                 <a:spcPts val="1100"/>
@@ -5667,28 +5665,28 @@
                 <a:solidFill>
                   <a:srgbClr val="14181F"/>
                 </a:solidFill>
-                <a:latin typeface="Helvetica Neue"/>
+                <a:latin typeface="Calibri"/>
               </a:rPr>
               <a:t>Outliers, found robustly</a:t>
             </a:r>
           </a:p>
           <a:p>
-            <a:pPr lvl="1">
-              <a:lnSpc>
-                <a:spcPct val="125000"/>
-              </a:lnSpc>
-              <a:spcAft>
-                <a:spcPts val="700"/>
-              </a:spcAft>
-            </a:pPr>
-            <a:r>
-              <a:rPr sz="1200" b="0">
+            <a:pPr algn="l">
+              <a:lnSpc>
+                <a:spcPct val="122000"/>
+              </a:lnSpc>
+              <a:spcAft>
+                <a:spcPts val="600"/>
+              </a:spcAft>
+            </a:pPr>
+            <a:r>
+              <a:rPr sz="1100" b="0">
                 <a:solidFill>
                   <a:srgbClr val="55606E"/>
                 </a:solidFill>
-                <a:latin typeface="Helvetica Neue"/>
-              </a:rPr>
-              <a:t>—  Against the median, so one extreme rating cannot hide itself.</a:t>
+                <a:latin typeface="Calibri"/>
+              </a:rPr>
+              <a:t>   Measured against the median, so one extreme rating cannot hide itself.</a:t>
             </a:r>
           </a:p>
         </p:txBody>
@@ -5701,8 +5699,8 @@
         </p:nvSpPr>
         <p:spPr>
           <a:xfrm>
-            <a:off x="10972800" y="6355080"/>
-            <a:ext cx="548640" cy="274320"/>
+            <a:off x="10881360" y="6327648"/>
+            <a:ext cx="502920" cy="274320"/>
           </a:xfrm>
           <a:prstGeom prst="rect">
             <a:avLst/>
@@ -5711,24 +5709,24 @@
         </p:spPr>
         <p:txBody>
           <a:bodyPr wrap="square" anchor="t" lIns="0" rIns="0" tIns="0" bIns="0">
-            <a:spAutoFit/>
+            <a:noAutofit/>
           </a:bodyPr>
           <a:lstStyle/>
           <a:p>
             <a:pPr algn="r">
               <a:lnSpc>
-                <a:spcPct val="118000"/>
+                <a:spcPct val="122000"/>
               </a:lnSpc>
               <a:spcAft>
                 <a:spcPts val="0"/>
               </a:spcAft>
             </a:pPr>
             <a:r>
-              <a:rPr sz="1000" b="0">
+              <a:rPr sz="1100" b="0">
                 <a:solidFill>
                   <a:srgbClr val="8A939F"/>
                 </a:solidFill>
-                <a:latin typeface="Helvetica Neue"/>
+                <a:latin typeface="Calibri"/>
               </a:rPr>
               <a:t>11</a:t>
             </a:r>
@@ -5792,9 +5790,7 @@
         <p:txBody>
           <a:bodyPr rtlCol="0" anchor="ctr"/>
           <a:lstStyle/>
-          <a:p>
-            <a:pPr algn="ctr"/>
-          </a:p>
+          <a:p/>
         </p:txBody>
       </p:sp>
       <p:sp>
@@ -5805,8 +5801,8 @@
         </p:nvSpPr>
         <p:spPr>
           <a:xfrm>
-            <a:off x="777240" y="1371600"/>
-            <a:ext cx="10058400" cy="2011680"/>
+            <a:off x="822960" y="1325880"/>
+            <a:ext cx="10424160" cy="2286000"/>
           </a:xfrm>
           <a:prstGeom prst="rect">
             <a:avLst/>
@@ -5815,64 +5811,64 @@
         </p:spPr>
         <p:txBody>
           <a:bodyPr wrap="square" anchor="t" lIns="0" rIns="0" tIns="0" bIns="0">
-            <a:spAutoFit/>
+            <a:noAutofit/>
           </a:bodyPr>
           <a:lstStyle/>
           <a:p>
             <a:pPr algn="l">
               <a:lnSpc>
-                <a:spcPct val="118000"/>
-              </a:lnSpc>
-              <a:spcAft>
-                <a:spcPts val="800"/>
-              </a:spcAft>
-            </a:pPr>
-            <a:r>
-              <a:rPr sz="3400" b="1">
+                <a:spcPct val="122000"/>
+              </a:lnSpc>
+              <a:spcAft>
+                <a:spcPts val="1000"/>
+              </a:spcAft>
+            </a:pPr>
+            <a:r>
+              <a:rPr sz="3300" b="1">
                 <a:solidFill>
                   <a:srgbClr val="FFFFFF"/>
                 </a:solidFill>
-                <a:latin typeface="Helvetica Neue"/>
-              </a:rPr>
-              <a:t>A mean of 5 can mean everyone shrugged,</a:t>
+                <a:latin typeface="Calibri"/>
+              </a:rPr>
+              <a:t>An average of 5 can mean everyone shrugged —</a:t>
             </a:r>
           </a:p>
           <a:p>
             <a:pPr algn="l">
               <a:lnSpc>
-                <a:spcPct val="118000"/>
-              </a:lnSpc>
-              <a:spcAft>
-                <a:spcPts val="800"/>
-              </a:spcAft>
-            </a:pPr>
-            <a:r>
-              <a:rPr sz="3400" b="1">
+                <a:spcPct val="122000"/>
+              </a:lnSpc>
+              <a:spcAft>
+                <a:spcPts val="1000"/>
+              </a:spcAft>
+            </a:pPr>
+            <a:r>
+              <a:rPr sz="3300" b="1">
                 <a:solidFill>
                   <a:srgbClr val="FFFFFF"/>
                 </a:solidFill>
-                <a:latin typeface="Helvetica Neue"/>
-              </a:rPr>
-              <a:t>or that half the flight thought it was outstanding</a:t>
+                <a:latin typeface="Calibri"/>
+              </a:rPr>
+              <a:t>or that half the flight thought it outstanding</a:t>
             </a:r>
           </a:p>
           <a:p>
             <a:pPr algn="l">
               <a:lnSpc>
-                <a:spcPct val="118000"/>
+                <a:spcPct val="122000"/>
               </a:lnSpc>
               <a:spcAft>
                 <a:spcPts val="0"/>
               </a:spcAft>
             </a:pPr>
             <a:r>
-              <a:rPr sz="3400" b="1">
+              <a:rPr sz="3300" b="1">
                 <a:solidFill>
                   <a:srgbClr val="FFFFFF"/>
                 </a:solidFill>
-                <a:latin typeface="Helvetica Neue"/>
-              </a:rPr>
-              <a:t>and half thought it was harmful.</a:t>
+                <a:latin typeface="Calibri"/>
+              </a:rPr>
+              <a:t>and half thought it harmful.</a:t>
             </a:r>
           </a:p>
         </p:txBody>
@@ -5885,8 +5881,8 @@
         </p:nvSpPr>
         <p:spPr>
           <a:xfrm>
-            <a:off x="777240" y="3931920"/>
-            <a:ext cx="1280160" cy="28575"/>
+            <a:off x="822960" y="3977639"/>
+            <a:ext cx="1188720" cy="28575"/>
           </a:xfrm>
           <a:prstGeom prst="rect">
             <a:avLst/>
@@ -5916,9 +5912,7 @@
         <p:txBody>
           <a:bodyPr rtlCol="0" anchor="ctr"/>
           <a:lstStyle/>
-          <a:p>
-            <a:pPr algn="ctr"/>
-          </a:p>
+          <a:p/>
         </p:txBody>
       </p:sp>
       <p:sp>
@@ -5929,8 +5923,8 @@
         </p:nvSpPr>
         <p:spPr>
           <a:xfrm>
-            <a:off x="777240" y="4297680"/>
-            <a:ext cx="9601200" cy="1463040"/>
+            <a:off x="822960" y="4343400"/>
+            <a:ext cx="9875520" cy="1737360"/>
           </a:xfrm>
           <a:prstGeom prst="rect">
             <a:avLst/>
@@ -5939,13 +5933,13 @@
         </p:spPr>
         <p:txBody>
           <a:bodyPr wrap="square" anchor="t" lIns="0" rIns="0" tIns="0" bIns="0">
-            <a:spAutoFit/>
+            <a:noAutofit/>
           </a:bodyPr>
           <a:lstStyle/>
           <a:p>
             <a:pPr algn="l">
               <a:lnSpc>
-                <a:spcPct val="118000"/>
+                <a:spcPct val="122000"/>
               </a:lnSpc>
               <a:spcAft>
                 <a:spcPts val="1400"/>
@@ -5956,7 +5950,7 @@
                 <a:solidFill>
                   <a:srgbClr val="FFFFFF"/>
                 </a:solidFill>
-                <a:latin typeface="Helvetica Neue"/>
+                <a:latin typeface="Calibri"/>
               </a:rPr>
               <a:t>Same number. Opposite situations. Only one of them needs acting on.</a:t>
             </a:r>
@@ -5964,7 +5958,7 @@
           <a:p>
             <a:pPr algn="l">
               <a:lnSpc>
-                <a:spcPct val="118000"/>
+                <a:spcPct val="122000"/>
               </a:lnSpc>
               <a:spcAft>
                 <a:spcPts val="0"/>
@@ -5975,51 +5969,9 @@
                 <a:solidFill>
                   <a:srgbClr val="FFFFFF"/>
                 </a:solidFill>
-                <a:latin typeface="Helvetica Neue"/>
-              </a:rPr>
-              <a:t>TOP-Feedback detects the split, says so plainly, and tells you the average describes nobody — so you read both groups instead of the mean.</a:t>
-            </a:r>
-          </a:p>
-        </p:txBody>
-      </p:sp>
-      <p:sp>
-        <p:nvSpPr>
-          <p:cNvPr id="6" name="TextBox 5"/>
-          <p:cNvSpPr txBox="1"/>
-          <p:nvPr/>
-        </p:nvSpPr>
-        <p:spPr>
-          <a:xfrm>
-            <a:off x="10972800" y="6355080"/>
-            <a:ext cx="548640" cy="274320"/>
-          </a:xfrm>
-          <a:prstGeom prst="rect">
-            <a:avLst/>
-          </a:prstGeom>
-          <a:noFill/>
-        </p:spPr>
-        <p:txBody>
-          <a:bodyPr wrap="square" anchor="t" lIns="0" rIns="0" tIns="0" bIns="0">
-            <a:spAutoFit/>
-          </a:bodyPr>
-          <a:lstStyle/>
-          <a:p>
-            <a:pPr algn="r">
-              <a:lnSpc>
-                <a:spcPct val="118000"/>
-              </a:lnSpc>
-              <a:spcAft>
-                <a:spcPts val="0"/>
-              </a:spcAft>
-            </a:pPr>
-            <a:r>
-              <a:rPr sz="1000" b="0">
-                <a:solidFill>
-                  <a:srgbClr val="8A939F"/>
-                </a:solidFill>
-                <a:latin typeface="Helvetica Neue"/>
-              </a:rPr>
-              <a:t>12</a:t>
+                <a:latin typeface="Calibri"/>
+              </a:rPr>
+              <a:t>TOP-Feedback finds the split, says so plainly, and tells you the average describes nobody — so you read both groups instead of the middle.</a:t>
             </a:r>
           </a:p>
         </p:txBody>
@@ -6050,8 +6002,8 @@
         </p:nvSpPr>
         <p:spPr>
           <a:xfrm>
-            <a:off x="777240" y="566928"/>
-            <a:ext cx="8229600" cy="274320"/>
+            <a:off x="822960" y="502920"/>
+            <a:ext cx="8229600" cy="292608"/>
           </a:xfrm>
           <a:prstGeom prst="rect">
             <a:avLst/>
@@ -6060,26 +6012,26 @@
         </p:spPr>
         <p:txBody>
           <a:bodyPr wrap="square" anchor="t" lIns="0" rIns="0" tIns="0" bIns="0">
-            <a:spAutoFit/>
+            <a:noAutofit/>
           </a:bodyPr>
           <a:lstStyle/>
           <a:p>
             <a:pPr algn="l">
               <a:lnSpc>
-                <a:spcPct val="118000"/>
+                <a:spcPct val="122000"/>
               </a:lnSpc>
               <a:spcAft>
                 <a:spcPts val="0"/>
               </a:spcAft>
             </a:pPr>
             <a:r>
-              <a:rPr sz="1100" b="1">
+              <a:rPr sz="1200" b="1">
                 <a:solidFill>
                   <a:srgbClr val="1C4F8B"/>
                 </a:solidFill>
-                <a:latin typeface="Helvetica Neue"/>
-              </a:rPr>
-              <a:t>ANALYSIS · WRITTEN ANSWERS</a:t>
+                <a:latin typeface="Calibri"/>
+              </a:rPr>
+              <a:t>ANALYSIS — WRITTEN ANSWERS</a:t>
             </a:r>
           </a:p>
         </p:txBody>
@@ -6092,8 +6044,8 @@
         </p:nvSpPr>
         <p:spPr>
           <a:xfrm>
-            <a:off x="777240" y="914400"/>
-            <a:ext cx="10607040" cy="914400"/>
+            <a:off x="822960" y="896112"/>
+            <a:ext cx="10545775" cy="960120"/>
           </a:xfrm>
           <a:prstGeom prst="rect">
             <a:avLst/>
@@ -6102,13 +6054,13 @@
         </p:spPr>
         <p:txBody>
           <a:bodyPr wrap="square" anchor="t" lIns="0" rIns="0" tIns="0" bIns="0">
-            <a:spAutoFit/>
+            <a:noAutofit/>
           </a:bodyPr>
           <a:lstStyle/>
           <a:p>
             <a:pPr algn="l">
               <a:lnSpc>
-                <a:spcPct val="118000"/>
+                <a:spcPct val="122000"/>
               </a:lnSpc>
               <a:spcAft>
                 <a:spcPts val="0"/>
@@ -6119,9 +6071,9 @@
                 <a:solidFill>
                   <a:srgbClr val="14181F"/>
                 </a:solidFill>
-                <a:latin typeface="Helvetica Neue"/>
-              </a:rPr>
-              <a:t>Read the important ones first</a:t>
+                <a:latin typeface="Calibri"/>
+              </a:rPr>
+              <a:t>Read the ones that matter first</a:t>
             </a:r>
           </a:p>
         </p:txBody>
@@ -6134,8 +6086,8 @@
         </p:nvSpPr>
         <p:spPr>
           <a:xfrm>
-            <a:off x="777240" y="2194560"/>
-            <a:ext cx="5120640" cy="3657600"/>
+            <a:off x="822960" y="2148840"/>
+            <a:ext cx="5394960" cy="3840480"/>
           </a:xfrm>
           <a:prstGeom prst="rect">
             <a:avLst/>
@@ -6143,14 +6095,14 @@
           <a:noFill/>
         </p:spPr>
         <p:txBody>
-          <a:bodyPr wrap="square" lIns="0" rIns="0" tIns="0" bIns="0">
-            <a:spAutoFit/>
+          <a:bodyPr wrap="square" anchor="t" lIns="0" rIns="0" tIns="0" bIns="0">
+            <a:noAutofit/>
           </a:bodyPr>
           <a:lstStyle/>
           <a:p>
-            <a:pPr>
-              <a:lnSpc>
-                <a:spcPct val="125000"/>
+            <a:pPr algn="l">
+              <a:lnSpc>
+                <a:spcPct val="122000"/>
               </a:lnSpc>
               <a:spcAft>
                 <a:spcPts val="1300"/>
@@ -6161,34 +6113,34 @@
                 <a:solidFill>
                   <a:srgbClr val="14181F"/>
                 </a:solidFill>
-                <a:latin typeface="Helvetica Neue"/>
+                <a:latin typeface="Calibri"/>
               </a:rPr>
               <a:t>Sentiment, ranked most negative first</a:t>
             </a:r>
           </a:p>
           <a:p>
-            <a:pPr lvl="1">
-              <a:lnSpc>
-                <a:spcPct val="125000"/>
-              </a:lnSpc>
-              <a:spcAft>
-                <a:spcPts val="900"/>
-              </a:spcAft>
-            </a:pPr>
-            <a:r>
-              <a:rPr sz="1400" b="0">
+            <a:pPr algn="l">
+              <a:lnSpc>
+                <a:spcPct val="122000"/>
+              </a:lnSpc>
+              <a:spcAft>
+                <a:spcPts val="800"/>
+              </a:spcAft>
+            </a:pPr>
+            <a:r>
+              <a:rPr sz="1300" b="0">
                 <a:solidFill>
                   <a:srgbClr val="55606E"/>
                 </a:solidFill>
-                <a:latin typeface="Helvetica Neue"/>
-              </a:rPr>
-              <a:t>—  Handles negation and emphasis — 'not helpful' and 'extremely helpful' both score correctly.</a:t>
-            </a:r>
-          </a:p>
-          <a:p>
-            <a:pPr>
-              <a:lnSpc>
-                <a:spcPct val="125000"/>
+                <a:latin typeface="Calibri"/>
+              </a:rPr>
+              <a:t>   Handles negation and emphasis, so 'not helpful' and 'extremely helpful' both score correctly.</a:t>
+            </a:r>
+          </a:p>
+          <a:p>
+            <a:pPr algn="l">
+              <a:lnSpc>
+                <a:spcPct val="122000"/>
               </a:lnSpc>
               <a:spcAft>
                 <a:spcPts val="1300"/>
@@ -6199,34 +6151,34 @@
                 <a:solidFill>
                   <a:srgbClr val="14181F"/>
                 </a:solidFill>
-                <a:latin typeface="Helvetica Neue"/>
+                <a:latin typeface="Calibri"/>
               </a:rPr>
               <a:t>Every answer is shown</a:t>
             </a:r>
           </a:p>
           <a:p>
-            <a:pPr lvl="1">
-              <a:lnSpc>
-                <a:spcPct val="125000"/>
-              </a:lnSpc>
-              <a:spcAft>
-                <a:spcPts val="900"/>
-              </a:spcAft>
-            </a:pPr>
-            <a:r>
-              <a:rPr sz="1400" b="0">
+            <a:pPr algn="l">
+              <a:lnSpc>
+                <a:spcPct val="122000"/>
+              </a:lnSpc>
+              <a:spcAft>
+                <a:spcPts val="800"/>
+              </a:spcAft>
+            </a:pPr>
+            <a:r>
+              <a:rPr sz="1300" b="0">
                 <a:solidFill>
                   <a:srgbClr val="55606E"/>
                 </a:solidFill>
-                <a:latin typeface="Helvetica Neue"/>
-              </a:rPr>
-              <a:t>—  Answers the lexicon cannot read are labelled, never hidden.</a:t>
-            </a:r>
-          </a:p>
-          <a:p>
-            <a:pPr>
-              <a:lnSpc>
-                <a:spcPct val="125000"/>
+                <a:latin typeface="Calibri"/>
+              </a:rPr>
+              <a:t>   Answers the word list cannot read are labelled, never hidden.</a:t>
+            </a:r>
+          </a:p>
+          <a:p>
+            <a:pPr algn="l">
+              <a:lnSpc>
+                <a:spcPct val="122000"/>
               </a:lnSpc>
               <a:spcAft>
                 <a:spcPts val="1300"/>
@@ -6237,28 +6189,28 @@
                 <a:solidFill>
                   <a:srgbClr val="14181F"/>
                 </a:solidFill>
-                <a:latin typeface="Helvetica Neue"/>
-              </a:rPr>
-              <a:t>Runs on the device</a:t>
-            </a:r>
-          </a:p>
-          <a:p>
-            <a:pPr lvl="1">
-              <a:lnSpc>
-                <a:spcPct val="125000"/>
-              </a:lnSpc>
-              <a:spcAft>
-                <a:spcPts val="900"/>
-              </a:spcAft>
-            </a:pPr>
-            <a:r>
-              <a:rPr sz="1400" b="0">
+                <a:latin typeface="Calibri"/>
+              </a:rPr>
+              <a:t>It runs on the device</a:t>
+            </a:r>
+          </a:p>
+          <a:p>
+            <a:pPr algn="l">
+              <a:lnSpc>
+                <a:spcPct val="122000"/>
+              </a:lnSpc>
+              <a:spcAft>
+                <a:spcPts val="800"/>
+              </a:spcAft>
+            </a:pPr>
+            <a:r>
+              <a:rPr sz="1300" b="0">
                 <a:solidFill>
                   <a:srgbClr val="55606E"/>
                 </a:solidFill>
-                <a:latin typeface="Helvetica Neue"/>
-              </a:rPr>
-              <a:t>—  No cloud service sees your cadets' words. That constraint is the reason it is a word list rather than a model — and the accuracy limits are stated on screen.</a:t>
+                <a:latin typeface="Calibri"/>
+              </a:rPr>
+              <a:t>   No cloud service sees your cadets' words. That is why it is a word list and not a model, and the accuracy limits are stated on screen.</a:t>
             </a:r>
           </a:p>
         </p:txBody>
@@ -6271,8 +6223,8 @@
         </p:nvSpPr>
         <p:spPr>
           <a:xfrm>
-            <a:off x="6299835" y="2648470"/>
-            <a:ext cx="5139690" cy="2841220"/>
+            <a:off x="6436995" y="2515985"/>
+            <a:ext cx="4956810" cy="2740429"/>
           </a:xfrm>
           <a:prstGeom prst="rect">
             <a:avLst/>
@@ -6282,7 +6234,7 @@
           </a:solidFill>
           <a:ln w="12700">
             <a:solidFill>
-              <a:srgbClr val="D8DEE8"/>
+              <a:srgbClr val="D3DCE8"/>
             </a:solidFill>
           </a:ln>
           <a:effectLst/>
@@ -6304,9 +6256,7 @@
         <p:txBody>
           <a:bodyPr rtlCol="0" anchor="ctr"/>
           <a:lstStyle/>
-          <a:p>
-            <a:pPr algn="ctr"/>
-          </a:p>
+          <a:p/>
         </p:txBody>
       </p:sp>
       <p:pic>
@@ -6325,8 +6275,8 @@
         </p:blipFill>
         <p:spPr>
           <a:xfrm>
-            <a:off x="6309360" y="2657995"/>
-            <a:ext cx="5120640" cy="2822170"/>
+            <a:off x="6446520" y="2525510"/>
+            <a:ext cx="4937760" cy="2721379"/>
           </a:xfrm>
           <a:prstGeom prst="rect">
             <a:avLst/>
@@ -6341,8 +6291,8 @@
         </p:nvSpPr>
         <p:spPr>
           <a:xfrm>
-            <a:off x="6309360" y="6080760"/>
-            <a:ext cx="5120640" cy="365760"/>
+            <a:off x="6446520" y="5760720"/>
+            <a:ext cx="4937760" cy="457200"/>
           </a:xfrm>
           <a:prstGeom prst="rect">
             <a:avLst/>
@@ -6351,13 +6301,13 @@
         </p:spPr>
         <p:txBody>
           <a:bodyPr wrap="square" anchor="t" lIns="0" rIns="0" tIns="0" bIns="0">
-            <a:spAutoFit/>
+            <a:noAutofit/>
           </a:bodyPr>
           <a:lstStyle/>
           <a:p>
             <a:pPr algn="l">
               <a:lnSpc>
-                <a:spcPct val="118000"/>
+                <a:spcPct val="122000"/>
               </a:lnSpc>
               <a:spcAft>
                 <a:spcPts val="0"/>
@@ -6368,9 +6318,9 @@
                 <a:solidFill>
                   <a:srgbClr val="8A939F"/>
                 </a:solidFill>
-                <a:latin typeface="Helvetica Neue"/>
-              </a:rPr>
-              <a:t>Word cloud sized by how many people used a word — not how often it appears.</a:t>
+                <a:latin typeface="Calibri"/>
+              </a:rPr>
+              <a:t>Word cloud sized by how many people used a word, not how often it appears.</a:t>
             </a:r>
           </a:p>
         </p:txBody>
@@ -6383,8 +6333,8 @@
         </p:nvSpPr>
         <p:spPr>
           <a:xfrm>
-            <a:off x="10972800" y="6355080"/>
-            <a:ext cx="548640" cy="274320"/>
+            <a:off x="10881360" y="6327648"/>
+            <a:ext cx="502920" cy="274320"/>
           </a:xfrm>
           <a:prstGeom prst="rect">
             <a:avLst/>
@@ -6393,24 +6343,24 @@
         </p:spPr>
         <p:txBody>
           <a:bodyPr wrap="square" anchor="t" lIns="0" rIns="0" tIns="0" bIns="0">
-            <a:spAutoFit/>
+            <a:noAutofit/>
           </a:bodyPr>
           <a:lstStyle/>
           <a:p>
             <a:pPr algn="r">
               <a:lnSpc>
-                <a:spcPct val="118000"/>
+                <a:spcPct val="122000"/>
               </a:lnSpc>
               <a:spcAft>
                 <a:spcPts val="0"/>
               </a:spcAft>
             </a:pPr>
             <a:r>
-              <a:rPr sz="1000" b="0">
+              <a:rPr sz="1100" b="0">
                 <a:solidFill>
                   <a:srgbClr val="8A939F"/>
                 </a:solidFill>
-                <a:latin typeface="Helvetica Neue"/>
+                <a:latin typeface="Calibri"/>
               </a:rPr>
               <a:t>13</a:t>
             </a:r>
@@ -6443,8 +6393,8 @@
         </p:nvSpPr>
         <p:spPr>
           <a:xfrm>
-            <a:off x="777240" y="566928"/>
-            <a:ext cx="8229600" cy="274320"/>
+            <a:off x="822960" y="502920"/>
+            <a:ext cx="8229600" cy="292608"/>
           </a:xfrm>
           <a:prstGeom prst="rect">
             <a:avLst/>
@@ -6453,24 +6403,24 @@
         </p:spPr>
         <p:txBody>
           <a:bodyPr wrap="square" anchor="t" lIns="0" rIns="0" tIns="0" bIns="0">
-            <a:spAutoFit/>
+            <a:noAutofit/>
           </a:bodyPr>
           <a:lstStyle/>
           <a:p>
             <a:pPr algn="l">
               <a:lnSpc>
-                <a:spcPct val="118000"/>
+                <a:spcPct val="122000"/>
               </a:lnSpc>
               <a:spcAft>
                 <a:spcPts val="0"/>
               </a:spcAft>
             </a:pPr>
             <a:r>
-              <a:rPr sz="1100" b="1">
-                <a:solidFill>
-                  <a:srgbClr val="1C4F8B"/>
-                </a:solidFill>
-                <a:latin typeface="Helvetica Neue"/>
+              <a:rPr sz="1200" b="1">
+                <a:solidFill>
+                  <a:srgbClr val="A02724"/>
+                </a:solidFill>
+                <a:latin typeface="Calibri"/>
               </a:rPr>
               <a:t>SAFETY SCREEN</a:t>
             </a:r>
@@ -6485,8 +6435,8 @@
         </p:nvSpPr>
         <p:spPr>
           <a:xfrm>
-            <a:off x="777240" y="914400"/>
-            <a:ext cx="10607040" cy="914400"/>
+            <a:off x="822960" y="896112"/>
+            <a:ext cx="10545775" cy="960120"/>
           </a:xfrm>
           <a:prstGeom prst="rect">
             <a:avLst/>
@@ -6495,13 +6445,13 @@
         </p:spPr>
         <p:txBody>
           <a:bodyPr wrap="square" anchor="t" lIns="0" rIns="0" tIns="0" bIns="0">
-            <a:spAutoFit/>
+            <a:noAutofit/>
           </a:bodyPr>
           <a:lstStyle/>
           <a:p>
             <a:pPr algn="l">
               <a:lnSpc>
-                <a:spcPct val="118000"/>
+                <a:spcPct val="122000"/>
               </a:lnSpc>
               <a:spcAft>
                 <a:spcPts val="0"/>
@@ -6512,7 +6462,7 @@
                 <a:solidFill>
                   <a:srgbClr val="14181F"/>
                 </a:solidFill>
-                <a:latin typeface="Helvetica Neue"/>
+                <a:latin typeface="Calibri"/>
               </a:rPr>
               <a:t>Nothing important sits unread</a:t>
             </a:r>
@@ -6527,8 +6477,8 @@
         </p:nvSpPr>
         <p:spPr>
           <a:xfrm>
-            <a:off x="767715" y="2782512"/>
-            <a:ext cx="6968490" cy="2664575"/>
+            <a:off x="813435" y="2817322"/>
+            <a:ext cx="6785610" cy="2594956"/>
           </a:xfrm>
           <a:prstGeom prst="rect">
             <a:avLst/>
@@ -6538,7 +6488,7 @@
           </a:solidFill>
           <a:ln w="12700">
             <a:solidFill>
-              <a:srgbClr val="D8DEE8"/>
+              <a:srgbClr val="D3DCE8"/>
             </a:solidFill>
           </a:ln>
           <a:effectLst/>
@@ -6560,9 +6510,7 @@
         <p:txBody>
           <a:bodyPr rtlCol="0" anchor="ctr"/>
           <a:lstStyle/>
-          <a:p>
-            <a:pPr algn="ctr"/>
-          </a:p>
+          <a:p/>
         </p:txBody>
       </p:sp>
       <p:pic>
@@ -6581,8 +6529,8 @@
         </p:blipFill>
         <p:spPr>
           <a:xfrm>
-            <a:off x="777240" y="2792037"/>
-            <a:ext cx="6949440" cy="2645525"/>
+            <a:off x="822960" y="2826847"/>
+            <a:ext cx="6766560" cy="2575906"/>
           </a:xfrm>
           <a:prstGeom prst="rect">
             <a:avLst/>
@@ -6597,8 +6545,8 @@
         </p:nvSpPr>
         <p:spPr>
           <a:xfrm>
-            <a:off x="8138160" y="2286000"/>
-            <a:ext cx="3291840" cy="3657600"/>
+            <a:off x="7955279" y="2240280"/>
+            <a:ext cx="3474720" cy="3794760"/>
           </a:xfrm>
           <a:prstGeom prst="rect">
             <a:avLst/>
@@ -6606,14 +6554,14 @@
           <a:noFill/>
         </p:spPr>
         <p:txBody>
-          <a:bodyPr wrap="square" lIns="0" rIns="0" tIns="0" bIns="0">
-            <a:spAutoFit/>
+          <a:bodyPr wrap="square" anchor="t" lIns="0" rIns="0" tIns="0" bIns="0">
+            <a:noAutofit/>
           </a:bodyPr>
           <a:lstStyle/>
           <a:p>
-            <a:pPr>
-              <a:lnSpc>
-                <a:spcPct val="125000"/>
+            <a:pPr algn="l">
+              <a:lnSpc>
+                <a:spcPct val="122000"/>
               </a:lnSpc>
               <a:spcAft>
                 <a:spcPts val="1100"/>
@@ -6624,34 +6572,34 @@
                 <a:solidFill>
                   <a:srgbClr val="14181F"/>
                 </a:solidFill>
-                <a:latin typeface="Helvetica Neue"/>
+                <a:latin typeface="Calibri"/>
               </a:rPr>
               <a:t>Every written answer is screened</a:t>
             </a:r>
           </a:p>
           <a:p>
-            <a:pPr lvl="1">
-              <a:lnSpc>
-                <a:spcPct val="125000"/>
-              </a:lnSpc>
-              <a:spcAft>
-                <a:spcPts val="700"/>
-              </a:spcAft>
-            </a:pPr>
-            <a:r>
-              <a:rPr sz="1200" b="0">
+            <a:pPr algn="l">
+              <a:lnSpc>
+                <a:spcPct val="122000"/>
+              </a:lnSpc>
+              <a:spcAft>
+                <a:spcPts val="600"/>
+              </a:spcAft>
+            </a:pPr>
+            <a:r>
+              <a:rPr sz="1100" b="0">
                 <a:solidFill>
                   <a:srgbClr val="55606E"/>
                 </a:solidFill>
-                <a:latin typeface="Helvetica Neue"/>
-              </a:rPr>
-              <a:t>—  Hazing, sexual harassment, discrimination, violence, self-harm, substances, integrity.</a:t>
-            </a:r>
-          </a:p>
-          <a:p>
-            <a:pPr>
-              <a:lnSpc>
-                <a:spcPct val="125000"/>
+                <a:latin typeface="Calibri"/>
+              </a:rPr>
+              <a:t>   Hazing, sexual harassment, discrimination, violence, self-harm, substances, integrity.</a:t>
+            </a:r>
+          </a:p>
+          <a:p>
+            <a:pPr algn="l">
+              <a:lnSpc>
+                <a:spcPct val="122000"/>
               </a:lnSpc>
               <a:spcAft>
                 <a:spcPts val="1100"/>
@@ -6662,15 +6610,15 @@
                 <a:solidFill>
                   <a:srgbClr val="14181F"/>
                 </a:solidFill>
-                <a:latin typeface="Helvetica Neue"/>
+                <a:latin typeface="Calibri"/>
               </a:rPr>
               <a:t>Matches are highlighted in context</a:t>
             </a:r>
           </a:p>
           <a:p>
-            <a:pPr>
-              <a:lnSpc>
-                <a:spcPct val="125000"/>
+            <a:pPr algn="l">
+              <a:lnSpc>
+                <a:spcPct val="122000"/>
               </a:lnSpc>
               <a:spcAft>
                 <a:spcPts val="1100"/>
@@ -6681,28 +6629,28 @@
                 <a:solidFill>
                   <a:srgbClr val="14181F"/>
                 </a:solidFill>
-                <a:latin typeface="Helvetica Neue"/>
+                <a:latin typeface="Calibri"/>
               </a:rPr>
               <a:t>A prompt, never a finding</a:t>
             </a:r>
           </a:p>
           <a:p>
-            <a:pPr lvl="1">
-              <a:lnSpc>
-                <a:spcPct val="125000"/>
-              </a:lnSpc>
-              <a:spcAft>
-                <a:spcPts val="700"/>
-              </a:spcAft>
-            </a:pPr>
-            <a:r>
-              <a:rPr sz="1200" b="0">
+            <a:pPr algn="l">
+              <a:lnSpc>
+                <a:spcPct val="122000"/>
+              </a:lnSpc>
+              <a:spcAft>
+                <a:spcPts val="600"/>
+              </a:spcAft>
+            </a:pPr>
+            <a:r>
+              <a:rPr sz="1100" b="0">
                 <a:solidFill>
                   <a:srgbClr val="55606E"/>
                 </a:solidFill>
-                <a:latin typeface="Helvetica Neue"/>
-              </a:rPr>
-              <a:t>—  It cannot tell 'we discussed hazing prevention' from 'I was hazed'. A person reads it and decides.</a:t>
+                <a:latin typeface="Calibri"/>
+              </a:rPr>
+              <a:t>   It cannot tell 'we discussed hazing prevention' from 'I was hazed'. A person reads it and decides.</a:t>
             </a:r>
           </a:p>
         </p:txBody>
@@ -6715,8 +6663,8 @@
         </p:nvSpPr>
         <p:spPr>
           <a:xfrm>
-            <a:off x="10972800" y="6355080"/>
-            <a:ext cx="548640" cy="274320"/>
+            <a:off x="10881360" y="6327648"/>
+            <a:ext cx="502920" cy="274320"/>
           </a:xfrm>
           <a:prstGeom prst="rect">
             <a:avLst/>
@@ -6725,24 +6673,24 @@
         </p:spPr>
         <p:txBody>
           <a:bodyPr wrap="square" anchor="t" lIns="0" rIns="0" tIns="0" bIns="0">
-            <a:spAutoFit/>
+            <a:noAutofit/>
           </a:bodyPr>
           <a:lstStyle/>
           <a:p>
             <a:pPr algn="r">
               <a:lnSpc>
-                <a:spcPct val="118000"/>
+                <a:spcPct val="122000"/>
               </a:lnSpc>
               <a:spcAft>
                 <a:spcPts val="0"/>
               </a:spcAft>
             </a:pPr>
             <a:r>
-              <a:rPr sz="1000" b="0">
+              <a:rPr sz="1100" b="0">
                 <a:solidFill>
                   <a:srgbClr val="8A939F"/>
                 </a:solidFill>
-                <a:latin typeface="Helvetica Neue"/>
+                <a:latin typeface="Calibri"/>
               </a:rPr>
               <a:t>14</a:t>
             </a:r>
@@ -6775,8 +6723,8 @@
         </p:nvSpPr>
         <p:spPr>
           <a:xfrm>
-            <a:off x="777240" y="566928"/>
-            <a:ext cx="8229600" cy="274320"/>
+            <a:off x="822960" y="502920"/>
+            <a:ext cx="8229600" cy="292608"/>
           </a:xfrm>
           <a:prstGeom prst="rect">
             <a:avLst/>
@@ -6785,24 +6733,24 @@
         </p:spPr>
         <p:txBody>
           <a:bodyPr wrap="square" anchor="t" lIns="0" rIns="0" tIns="0" bIns="0">
-            <a:spAutoFit/>
+            <a:noAutofit/>
           </a:bodyPr>
           <a:lstStyle/>
           <a:p>
             <a:pPr algn="l">
               <a:lnSpc>
-                <a:spcPct val="118000"/>
+                <a:spcPct val="122000"/>
               </a:lnSpc>
               <a:spcAft>
                 <a:spcPts val="0"/>
               </a:spcAft>
             </a:pPr>
             <a:r>
-              <a:rPr sz="1100" b="1">
+              <a:rPr sz="1200" b="1">
                 <a:solidFill>
                   <a:srgbClr val="1C4F8B"/>
                 </a:solidFill>
-                <a:latin typeface="Helvetica Neue"/>
+                <a:latin typeface="Calibri"/>
               </a:rPr>
               <a:t>ANONYMITY</a:t>
             </a:r>
@@ -6817,8 +6765,8 @@
         </p:nvSpPr>
         <p:spPr>
           <a:xfrm>
-            <a:off x="777240" y="914400"/>
-            <a:ext cx="10607040" cy="914400"/>
+            <a:off x="822960" y="896112"/>
+            <a:ext cx="10545775" cy="960120"/>
           </a:xfrm>
           <a:prstGeom prst="rect">
             <a:avLst/>
@@ -6827,13 +6775,13 @@
         </p:spPr>
         <p:txBody>
           <a:bodyPr wrap="square" anchor="t" lIns="0" rIns="0" tIns="0" bIns="0">
-            <a:spAutoFit/>
+            <a:noAutofit/>
           </a:bodyPr>
           <a:lstStyle/>
           <a:p>
             <a:pPr algn="l">
               <a:lnSpc>
-                <a:spcPct val="118000"/>
+                <a:spcPct val="122000"/>
               </a:lnSpc>
               <a:spcAft>
                 <a:spcPts val="0"/>
@@ -6844,7 +6792,7 @@
                 <a:solidFill>
                   <a:srgbClr val="14181F"/>
                 </a:solidFill>
-                <a:latin typeface="Helvetica Neue"/>
+                <a:latin typeface="Calibri"/>
               </a:rPr>
               <a:t>Anonymous, and still able to chase people</a:t>
             </a:r>
@@ -6859,12 +6807,12 @@
         </p:nvSpPr>
         <p:spPr>
           <a:xfrm>
-            <a:off x="777240" y="2240280"/>
-            <a:ext cx="3337560" cy="2926080"/>
+            <a:off x="822960" y="2194560"/>
+            <a:ext cx="3246120" cy="2788920"/>
           </a:xfrm>
           <a:prstGeom prst="roundRect">
             <a:avLst>
-              <a:gd name="adj" fmla="val 5000"/>
+              <a:gd name="adj" fmla="val 4000"/>
             </a:avLst>
           </a:prstGeom>
           <a:solidFill>
@@ -6872,7 +6820,7 @@
           </a:solidFill>
           <a:ln w="12700">
             <a:solidFill>
-              <a:srgbClr val="D8DEE8"/>
+              <a:srgbClr val="D3DCE8"/>
             </a:solidFill>
           </a:ln>
           <a:effectLst/>
@@ -6894,9 +6842,7 @@
         <p:txBody>
           <a:bodyPr rtlCol="0" anchor="ctr"/>
           <a:lstStyle/>
-          <a:p>
-            <a:pPr algn="ctr"/>
-          </a:p>
+          <a:p/>
         </p:txBody>
       </p:sp>
       <p:sp>
@@ -6907,8 +6853,8 @@
         </p:nvSpPr>
         <p:spPr>
           <a:xfrm>
-            <a:off x="777240" y="2240280"/>
-            <a:ext cx="47625" cy="2926080"/>
+            <a:off x="822960" y="2194560"/>
+            <a:ext cx="3246120" cy="50292"/>
           </a:xfrm>
           <a:prstGeom prst="rect">
             <a:avLst/>
@@ -6938,9 +6884,7 @@
         <p:txBody>
           <a:bodyPr rtlCol="0" anchor="ctr"/>
           <a:lstStyle/>
-          <a:p>
-            <a:pPr algn="ctr"/>
-          </a:p>
+          <a:p/>
         </p:txBody>
       </p:sp>
       <p:sp>
@@ -6951,8 +6895,8 @@
         </p:nvSpPr>
         <p:spPr>
           <a:xfrm>
-            <a:off x="1161288" y="2606040"/>
-            <a:ext cx="2560320" cy="2286000"/>
+            <a:off x="1133856" y="2578608"/>
+            <a:ext cx="2624328" cy="2130552"/>
           </a:xfrm>
           <a:prstGeom prst="rect">
             <a:avLst/>
@@ -6961,24 +6905,24 @@
         </p:spPr>
         <p:txBody>
           <a:bodyPr wrap="square" anchor="t" lIns="0" rIns="0" tIns="0" bIns="0">
-            <a:spAutoFit/>
+            <a:noAutofit/>
           </a:bodyPr>
           <a:lstStyle/>
           <a:p>
             <a:pPr algn="l">
               <a:lnSpc>
-                <a:spcPct val="118000"/>
-              </a:lnSpc>
-              <a:spcAft>
-                <a:spcPts val="1200"/>
-              </a:spcAft>
-            </a:pPr>
-            <a:r>
-              <a:rPr sz="1800" b="1">
+                <a:spcPct val="122000"/>
+              </a:lnSpc>
+              <a:spcAft>
+                <a:spcPts val="1000"/>
+              </a:spcAft>
+            </a:pPr>
+            <a:r>
+              <a:rPr sz="1900" b="1">
                 <a:solidFill>
                   <a:srgbClr val="14181F"/>
                 </a:solidFill>
-                <a:latin typeface="Helvetica Neue"/>
+                <a:latin typeface="Calibri"/>
               </a:rPr>
               <a:t>How it works</a:t>
             </a:r>
@@ -6986,7 +6930,7 @@
           <a:p>
             <a:pPr algn="l">
               <a:lnSpc>
-                <a:spcPct val="118000"/>
+                <a:spcPct val="122000"/>
               </a:lnSpc>
               <a:spcAft>
                 <a:spcPts val="0"/>
@@ -6997,9 +6941,9 @@
                 <a:solidFill>
                   <a:srgbClr val="55606E"/>
                 </a:solidFill>
-                <a:latin typeface="Helvetica Neue"/>
-              </a:rPr>
-              <a:t>The cadet signs in, so the app knows who they are. It writes a receipt in a separate folder, then discards the name. The response itself carries no identity.</a:t>
+                <a:latin typeface="Calibri"/>
+              </a:rPr>
+              <a:t>The cadet signs in, so the app knows who they are. It writes a receipt in a separate folder, then drops the name. The response itself carries no identity.</a:t>
             </a:r>
           </a:p>
         </p:txBody>
@@ -7012,12 +6956,12 @@
         </p:nvSpPr>
         <p:spPr>
           <a:xfrm>
-            <a:off x="4498848" y="2240280"/>
-            <a:ext cx="3337560" cy="2926080"/>
+            <a:off x="4453128" y="2194560"/>
+            <a:ext cx="3246120" cy="2788920"/>
           </a:xfrm>
           <a:prstGeom prst="roundRect">
             <a:avLst>
-              <a:gd name="adj" fmla="val 5000"/>
+              <a:gd name="adj" fmla="val 4000"/>
             </a:avLst>
           </a:prstGeom>
           <a:solidFill>
@@ -7025,7 +6969,7 @@
           </a:solidFill>
           <a:ln w="12700">
             <a:solidFill>
-              <a:srgbClr val="D8DEE8"/>
+              <a:srgbClr val="D3DCE8"/>
             </a:solidFill>
           </a:ln>
           <a:effectLst/>
@@ -7047,9 +6991,7 @@
         <p:txBody>
           <a:bodyPr rtlCol="0" anchor="ctr"/>
           <a:lstStyle/>
-          <a:p>
-            <a:pPr algn="ctr"/>
-          </a:p>
+          <a:p/>
         </p:txBody>
       </p:sp>
       <p:sp>
@@ -7060,8 +7002,8 @@
         </p:nvSpPr>
         <p:spPr>
           <a:xfrm>
-            <a:off x="4498848" y="2240280"/>
-            <a:ext cx="47625" cy="2926080"/>
+            <a:off x="4453128" y="2194560"/>
+            <a:ext cx="3246120" cy="50292"/>
           </a:xfrm>
           <a:prstGeom prst="rect">
             <a:avLst/>
@@ -7091,9 +7033,7 @@
         <p:txBody>
           <a:bodyPr rtlCol="0" anchor="ctr"/>
           <a:lstStyle/>
-          <a:p>
-            <a:pPr algn="ctr"/>
-          </a:p>
+          <a:p/>
         </p:txBody>
       </p:sp>
       <p:sp>
@@ -7104,8 +7044,8 @@
         </p:nvSpPr>
         <p:spPr>
           <a:xfrm>
-            <a:off x="4882896" y="2606040"/>
-            <a:ext cx="2560320" cy="2286000"/>
+            <a:off x="4764024" y="2578608"/>
+            <a:ext cx="2624328" cy="2130552"/>
           </a:xfrm>
           <a:prstGeom prst="rect">
             <a:avLst/>
@@ -7114,24 +7054,24 @@
         </p:spPr>
         <p:txBody>
           <a:bodyPr wrap="square" anchor="t" lIns="0" rIns="0" tIns="0" bIns="0">
-            <a:spAutoFit/>
+            <a:noAutofit/>
           </a:bodyPr>
           <a:lstStyle/>
           <a:p>
             <a:pPr algn="l">
               <a:lnSpc>
-                <a:spcPct val="118000"/>
-              </a:lnSpc>
-              <a:spcAft>
-                <a:spcPts val="1200"/>
-              </a:spcAft>
-            </a:pPr>
-            <a:r>
-              <a:rPr sz="1800" b="1">
+                <a:spcPct val="122000"/>
+              </a:lnSpc>
+              <a:spcAft>
+                <a:spcPts val="1000"/>
+              </a:spcAft>
+            </a:pPr>
+            <a:r>
+              <a:rPr sz="1900" b="1">
                 <a:solidFill>
                   <a:srgbClr val="14181F"/>
                 </a:solidFill>
-                <a:latin typeface="Helvetica Neue"/>
+                <a:latin typeface="Calibri"/>
               </a:rPr>
               <a:t>What that buys</a:t>
             </a:r>
@@ -7139,7 +7079,7 @@
           <a:p>
             <a:pPr algn="l">
               <a:lnSpc>
-                <a:spcPct val="118000"/>
+                <a:spcPct val="122000"/>
               </a:lnSpc>
               <a:spcAft>
                 <a:spcPts val="0"/>
@@ -7150,9 +7090,9 @@
                 <a:solidFill>
                   <a:srgbClr val="55606E"/>
                 </a:solidFill>
-                <a:latin typeface="Helvetica Neue"/>
-              </a:rPr>
-              <a:t>You can say “two cadets still owe feedback” about responses nobody can attribute — and nobody can submit twice.</a:t>
+                <a:latin typeface="Calibri"/>
+              </a:rPr>
+              <a:t>You can say 'two cadets still owe feedback' about responses nobody can attribute — and nobody can submit twice.</a:t>
             </a:r>
           </a:p>
         </p:txBody>
@@ -7165,12 +7105,12 @@
         </p:nvSpPr>
         <p:spPr>
           <a:xfrm>
-            <a:off x="8220456" y="2240280"/>
-            <a:ext cx="3337560" cy="2926080"/>
+            <a:off x="8083296" y="2194560"/>
+            <a:ext cx="3246120" cy="2788920"/>
           </a:xfrm>
           <a:prstGeom prst="roundRect">
             <a:avLst>
-              <a:gd name="adj" fmla="val 5000"/>
+              <a:gd name="adj" fmla="val 4000"/>
             </a:avLst>
           </a:prstGeom>
           <a:solidFill>
@@ -7178,7 +7118,7 @@
           </a:solidFill>
           <a:ln w="12700">
             <a:solidFill>
-              <a:srgbClr val="D8DEE8"/>
+              <a:srgbClr val="D3DCE8"/>
             </a:solidFill>
           </a:ln>
           <a:effectLst/>
@@ -7200,9 +7140,7 @@
         <p:txBody>
           <a:bodyPr rtlCol="0" anchor="ctr"/>
           <a:lstStyle/>
-          <a:p>
-            <a:pPr algn="ctr"/>
-          </a:p>
+          <a:p/>
         </p:txBody>
       </p:sp>
       <p:sp>
@@ -7213,8 +7151,8 @@
         </p:nvSpPr>
         <p:spPr>
           <a:xfrm>
-            <a:off x="8220456" y="2240280"/>
-            <a:ext cx="47625" cy="2926080"/>
+            <a:off x="8083296" y="2194560"/>
+            <a:ext cx="3246120" cy="50292"/>
           </a:xfrm>
           <a:prstGeom prst="rect">
             <a:avLst/>
@@ -7244,9 +7182,7 @@
         <p:txBody>
           <a:bodyPr rtlCol="0" anchor="ctr"/>
           <a:lstStyle/>
-          <a:p>
-            <a:pPr algn="ctr"/>
-          </a:p>
+          <a:p/>
         </p:txBody>
       </p:sp>
       <p:sp>
@@ -7257,8 +7193,8 @@
         </p:nvSpPr>
         <p:spPr>
           <a:xfrm>
-            <a:off x="8604504" y="2606040"/>
-            <a:ext cx="2560320" cy="2286000"/>
+            <a:off x="8394192" y="2578608"/>
+            <a:ext cx="2624328" cy="2130552"/>
           </a:xfrm>
           <a:prstGeom prst="rect">
             <a:avLst/>
@@ -7267,24 +7203,24 @@
         </p:spPr>
         <p:txBody>
           <a:bodyPr wrap="square" anchor="t" lIns="0" rIns="0" tIns="0" bIns="0">
-            <a:spAutoFit/>
+            <a:noAutofit/>
           </a:bodyPr>
           <a:lstStyle/>
           <a:p>
             <a:pPr algn="l">
               <a:lnSpc>
-                <a:spcPct val="118000"/>
-              </a:lnSpc>
-              <a:spcAft>
-                <a:spcPts val="1200"/>
-              </a:spcAft>
-            </a:pPr>
-            <a:r>
-              <a:rPr sz="1800" b="1">
+                <a:spcPct val="122000"/>
+              </a:lnSpc>
+              <a:spcAft>
+                <a:spcPts val="1000"/>
+              </a:spcAft>
+            </a:pPr>
+            <a:r>
+              <a:rPr sz="1900" b="1">
                 <a:solidFill>
                   <a:srgbClr val="14181F"/>
                 </a:solidFill>
-                <a:latin typeface="Helvetica Neue"/>
+                <a:latin typeface="Calibri"/>
               </a:rPr>
               <a:t>The honest limit</a:t>
             </a:r>
@@ -7292,7 +7228,7 @@
           <a:p>
             <a:pPr algn="l">
               <a:lnSpc>
-                <a:spcPct val="118000"/>
+                <a:spcPct val="122000"/>
               </a:lnSpc>
               <a:spcAft>
                 <a:spcPts val="0"/>
@@ -7303,7 +7239,7 @@
                 <a:solidFill>
                   <a:srgbClr val="55606E"/>
                 </a:solidFill>
-                <a:latin typeface="Helvetica Neue"/>
+                <a:latin typeface="Calibri"/>
               </a:rPr>
               <a:t>With very few responses a single answer can be identified by elimination. So anonymous results stay hidden until three people have responded.</a:t>
             </a:r>
@@ -7318,8 +7254,8 @@
         </p:nvSpPr>
         <p:spPr>
           <a:xfrm>
-            <a:off x="777240" y="5532120"/>
-            <a:ext cx="10607040" cy="731520"/>
+            <a:off x="822960" y="5349240"/>
+            <a:ext cx="10424160" cy="777240"/>
           </a:xfrm>
           <a:prstGeom prst="rect">
             <a:avLst/>
@@ -7328,26 +7264,26 @@
         </p:spPr>
         <p:txBody>
           <a:bodyPr wrap="square" anchor="t" lIns="0" rIns="0" tIns="0" bIns="0">
-            <a:spAutoFit/>
+            <a:noAutofit/>
           </a:bodyPr>
           <a:lstStyle/>
           <a:p>
             <a:pPr algn="l">
               <a:lnSpc>
-                <a:spcPct val="118000"/>
+                <a:spcPct val="122000"/>
               </a:lnSpc>
               <a:spcAft>
                 <a:spcPts val="0"/>
               </a:spcAft>
             </a:pPr>
             <a:r>
-              <a:rPr sz="1400" b="0">
+              <a:rPr sz="1500" b="0">
                 <a:solidFill>
                   <a:srgbClr val="14181F"/>
                 </a:solidFill>
-                <a:latin typeface="Helvetica Neue"/>
-              </a:rPr>
-              <a:t>Safety flags are the deliberate exception — a disclosure cannot wait for a third response, so the app says one exists and warns you that opening it may identify the author.</a:t>
+                <a:latin typeface="Calibri"/>
+              </a:rPr>
+              <a:t>Safety flags are the deliberate exception: a disclosure cannot wait for a third response, so the app tells you one exists and warns that opening it may identify the author.</a:t>
             </a:r>
           </a:p>
         </p:txBody>
@@ -7360,8 +7296,8 @@
         </p:nvSpPr>
         <p:spPr>
           <a:xfrm>
-            <a:off x="10972800" y="6355080"/>
-            <a:ext cx="548640" cy="274320"/>
+            <a:off x="10881360" y="6327648"/>
+            <a:ext cx="502920" cy="274320"/>
           </a:xfrm>
           <a:prstGeom prst="rect">
             <a:avLst/>
@@ -7370,24 +7306,24 @@
         </p:spPr>
         <p:txBody>
           <a:bodyPr wrap="square" anchor="t" lIns="0" rIns="0" tIns="0" bIns="0">
-            <a:spAutoFit/>
+            <a:noAutofit/>
           </a:bodyPr>
           <a:lstStyle/>
           <a:p>
             <a:pPr algn="r">
               <a:lnSpc>
-                <a:spcPct val="118000"/>
+                <a:spcPct val="122000"/>
               </a:lnSpc>
               <a:spcAft>
                 <a:spcPts val="0"/>
               </a:spcAft>
             </a:pPr>
             <a:r>
-              <a:rPr sz="1000" b="0">
+              <a:rPr sz="1100" b="0">
                 <a:solidFill>
                   <a:srgbClr val="8A939F"/>
                 </a:solidFill>
-                <a:latin typeface="Helvetica Neue"/>
+                <a:latin typeface="Calibri"/>
               </a:rPr>
               <a:t>15</a:t>
             </a:r>
@@ -7420,8 +7356,8 @@
         </p:nvSpPr>
         <p:spPr>
           <a:xfrm>
-            <a:off x="777240" y="566928"/>
-            <a:ext cx="8229600" cy="274320"/>
+            <a:off x="822960" y="502920"/>
+            <a:ext cx="8229600" cy="292608"/>
           </a:xfrm>
           <a:prstGeom prst="rect">
             <a:avLst/>
@@ -7430,26 +7366,26 @@
         </p:spPr>
         <p:txBody>
           <a:bodyPr wrap="square" anchor="t" lIns="0" rIns="0" tIns="0" bIns="0">
-            <a:spAutoFit/>
+            <a:noAutofit/>
           </a:bodyPr>
           <a:lstStyle/>
           <a:p>
             <a:pPr algn="l">
               <a:lnSpc>
-                <a:spcPct val="118000"/>
+                <a:spcPct val="122000"/>
               </a:lnSpc>
               <a:spcAft>
                 <a:spcPts val="0"/>
               </a:spcAft>
             </a:pPr>
             <a:r>
-              <a:rPr sz="1100" b="1">
+              <a:rPr sz="1200" b="1">
                 <a:solidFill>
                   <a:srgbClr val="1C4F8B"/>
                 </a:solidFill>
-                <a:latin typeface="Helvetica Neue"/>
-              </a:rPr>
-              <a:t>DATABASE ADMINISTRATION</a:t>
+                <a:latin typeface="Calibri"/>
+              </a:rPr>
+              <a:t>RUNNING IT</a:t>
             </a:r>
           </a:p>
         </p:txBody>
@@ -7462,8 +7398,8 @@
         </p:nvSpPr>
         <p:spPr>
           <a:xfrm>
-            <a:off x="777240" y="914400"/>
-            <a:ext cx="10607040" cy="914400"/>
+            <a:off x="822960" y="896112"/>
+            <a:ext cx="10545775" cy="960120"/>
           </a:xfrm>
           <a:prstGeom prst="rect">
             <a:avLst/>
@@ -7472,13 +7408,13 @@
         </p:spPr>
         <p:txBody>
           <a:bodyPr wrap="square" anchor="t" lIns="0" rIns="0" tIns="0" bIns="0">
-            <a:spAutoFit/>
+            <a:noAutofit/>
           </a:bodyPr>
           <a:lstStyle/>
           <a:p>
             <a:pPr algn="l">
               <a:lnSpc>
-                <a:spcPct val="118000"/>
+                <a:spcPct val="122000"/>
               </a:lnSpc>
               <a:spcAft>
                 <a:spcPts val="0"/>
@@ -7489,7 +7425,7 @@
                 <a:solidFill>
                   <a:srgbClr val="14181F"/>
                 </a:solidFill>
-                <a:latin typeface="Helvetica Neue"/>
+                <a:latin typeface="Calibri"/>
               </a:rPr>
               <a:t>Accounts your detachment controls</a:t>
             </a:r>
@@ -7504,8 +7440,8 @@
         </p:nvSpPr>
         <p:spPr>
           <a:xfrm>
-            <a:off x="777240" y="1691640"/>
-            <a:ext cx="9692640" cy="548640"/>
+            <a:off x="822960" y="1783080"/>
+            <a:ext cx="9966960" cy="566928"/>
           </a:xfrm>
           <a:prstGeom prst="rect">
             <a:avLst/>
@@ -7514,13 +7450,13 @@
         </p:spPr>
         <p:txBody>
           <a:bodyPr wrap="square" anchor="t" lIns="0" rIns="0" tIns="0" bIns="0">
-            <a:spAutoFit/>
+            <a:noAutofit/>
           </a:bodyPr>
           <a:lstStyle/>
           <a:p>
             <a:pPr algn="l">
               <a:lnSpc>
-                <a:spcPct val="118000"/>
+                <a:spcPct val="122000"/>
               </a:lnSpc>
               <a:spcAft>
                 <a:spcPts val="0"/>
@@ -7531,9 +7467,9 @@
                 <a:solidFill>
                   <a:srgbClr val="55606E"/>
                 </a:solidFill>
-                <a:latin typeface="Helvetica Neue"/>
-              </a:rPr>
-              <a:t>Create cadets one at a time or import a class by CSV — passwords are generated and handed to you once.</a:t>
+                <a:latin typeface="Calibri"/>
+              </a:rPr>
+              <a:t>Add cadets one at a time or import a whole class by CSV. Passwords are generated and handed to you once.</a:t>
             </a:r>
           </a:p>
         </p:txBody>
@@ -7546,8 +7482,8 @@
         </p:nvSpPr>
         <p:spPr>
           <a:xfrm>
-            <a:off x="4664734" y="2413635"/>
-            <a:ext cx="2832051" cy="3585209"/>
+            <a:off x="4718830" y="2550795"/>
+            <a:ext cx="2723859" cy="3448050"/>
           </a:xfrm>
           <a:prstGeom prst="rect">
             <a:avLst/>
@@ -7557,7 +7493,7 @@
           </a:solidFill>
           <a:ln w="12700">
             <a:solidFill>
-              <a:srgbClr val="D8DEE8"/>
+              <a:srgbClr val="D3DCE8"/>
             </a:solidFill>
           </a:ln>
           <a:effectLst/>
@@ -7579,9 +7515,7 @@
         <p:txBody>
           <a:bodyPr rtlCol="0" anchor="ctr"/>
           <a:lstStyle/>
-          <a:p>
-            <a:pPr algn="ctr"/>
-          </a:p>
+          <a:p/>
         </p:txBody>
       </p:sp>
       <p:pic>
@@ -7600,8 +7534,8 @@
         </p:blipFill>
         <p:spPr>
           <a:xfrm>
-            <a:off x="4674259" y="2423160"/>
-            <a:ext cx="2813001" cy="3566159"/>
+            <a:off x="4728355" y="2560320"/>
+            <a:ext cx="2704809" cy="3429000"/>
           </a:xfrm>
           <a:prstGeom prst="rect">
             <a:avLst/>
@@ -7616,8 +7550,8 @@
         </p:nvSpPr>
         <p:spPr>
           <a:xfrm>
-            <a:off x="10972800" y="6355080"/>
-            <a:ext cx="548640" cy="274320"/>
+            <a:off x="10881360" y="6327648"/>
+            <a:ext cx="502920" cy="274320"/>
           </a:xfrm>
           <a:prstGeom prst="rect">
             <a:avLst/>
@@ -7626,24 +7560,24 @@
         </p:spPr>
         <p:txBody>
           <a:bodyPr wrap="square" anchor="t" lIns="0" rIns="0" tIns="0" bIns="0">
-            <a:spAutoFit/>
+            <a:noAutofit/>
           </a:bodyPr>
           <a:lstStyle/>
           <a:p>
             <a:pPr algn="r">
               <a:lnSpc>
-                <a:spcPct val="118000"/>
+                <a:spcPct val="122000"/>
               </a:lnSpc>
               <a:spcAft>
                 <a:spcPts val="0"/>
               </a:spcAft>
             </a:pPr>
             <a:r>
-              <a:rPr sz="1000" b="0">
+              <a:rPr sz="1100" b="0">
                 <a:solidFill>
                   <a:srgbClr val="8A939F"/>
                 </a:solidFill>
-                <a:latin typeface="Helvetica Neue"/>
+                <a:latin typeface="Calibri"/>
               </a:rPr>
               <a:t>16</a:t>
             </a:r>
@@ -7707,9 +7641,7 @@
         <p:txBody>
           <a:bodyPr rtlCol="0" anchor="ctr"/>
           <a:lstStyle/>
-          <a:p>
-            <a:pPr algn="ctr"/>
-          </a:p>
+          <a:p/>
         </p:txBody>
       </p:sp>
       <p:sp>
@@ -7720,8 +7652,8 @@
         </p:nvSpPr>
         <p:spPr>
           <a:xfrm>
-            <a:off x="777240" y="1051560"/>
-            <a:ext cx="9144000" cy="914400"/>
+            <a:off x="822960" y="1005840"/>
+            <a:ext cx="9144000" cy="868680"/>
           </a:xfrm>
           <a:prstGeom prst="rect">
             <a:avLst/>
@@ -7730,24 +7662,24 @@
         </p:spPr>
         <p:txBody>
           <a:bodyPr wrap="square" anchor="t" lIns="0" rIns="0" tIns="0" bIns="0">
-            <a:spAutoFit/>
+            <a:noAutofit/>
           </a:bodyPr>
           <a:lstStyle/>
           <a:p>
             <a:pPr algn="l">
               <a:lnSpc>
-                <a:spcPct val="118000"/>
+                <a:spcPct val="122000"/>
               </a:lnSpc>
               <a:spcAft>
                 <a:spcPts val="0"/>
               </a:spcAft>
             </a:pPr>
             <a:r>
-              <a:rPr sz="4400" b="1">
+              <a:rPr sz="4200" b="1">
                 <a:solidFill>
                   <a:srgbClr val="FFFFFF"/>
                 </a:solidFill>
-                <a:latin typeface="Helvetica Neue"/>
+                <a:latin typeface="Calibri"/>
               </a:rPr>
               <a:t>Getting started</a:t>
             </a:r>
@@ -7762,8 +7694,8 @@
         </p:nvSpPr>
         <p:spPr>
           <a:xfrm>
-            <a:off x="777240" y="2286000"/>
-            <a:ext cx="566928" cy="566928"/>
+            <a:off x="822960" y="2240280"/>
+            <a:ext cx="548640" cy="548640"/>
           </a:xfrm>
           <a:prstGeom prst="ellipse">
             <a:avLst/>
@@ -7793,17 +7725,7 @@
         <p:txBody>
           <a:bodyPr rtlCol="0" anchor="ctr"/>
           <a:lstStyle/>
-          <a:p>
-            <a:pPr algn="ctr"/>
-            <a:r>
-              <a:rPr sz="2000" b="1">
-                <a:solidFill>
-                  <a:srgbClr val="1C4F8B"/>
-                </a:solidFill>
-              </a:rPr>
-              <a:t>1</a:t>
-            </a:r>
-          </a:p>
+          <a:p/>
         </p:txBody>
       </p:sp>
       <p:sp>
@@ -7814,8 +7736,8 @@
         </p:nvSpPr>
         <p:spPr>
           <a:xfrm>
-            <a:off x="1691640" y="2304288"/>
-            <a:ext cx="8686800" cy="914400"/>
+            <a:off x="822960" y="2322576"/>
+            <a:ext cx="548640" cy="384048"/>
           </a:xfrm>
           <a:prstGeom prst="rect">
             <a:avLst/>
@@ -7824,24 +7746,66 @@
         </p:spPr>
         <p:txBody>
           <a:bodyPr wrap="square" anchor="t" lIns="0" rIns="0" tIns="0" bIns="0">
-            <a:spAutoFit/>
+            <a:noAutofit/>
           </a:bodyPr>
           <a:lstStyle/>
           <a:p>
+            <a:pPr algn="ctr">
+              <a:lnSpc>
+                <a:spcPct val="122000"/>
+              </a:lnSpc>
+              <a:spcAft>
+                <a:spcPts val="0"/>
+              </a:spcAft>
+            </a:pPr>
+            <a:r>
+              <a:rPr sz="1900" b="1">
+                <a:solidFill>
+                  <a:srgbClr val="1C4F8B"/>
+                </a:solidFill>
+                <a:latin typeface="Calibri"/>
+              </a:rPr>
+              <a:t>1</a:t>
+            </a:r>
+          </a:p>
+        </p:txBody>
+      </p:sp>
+      <p:sp>
+        <p:nvSpPr>
+          <p:cNvPr id="6" name="TextBox 5"/>
+          <p:cNvSpPr txBox="1"/>
+          <p:nvPr/>
+        </p:nvSpPr>
+        <p:spPr>
+          <a:xfrm>
+            <a:off x="1691640" y="2221992"/>
+            <a:ext cx="8778240" cy="960120"/>
+          </a:xfrm>
+          <a:prstGeom prst="rect">
+            <a:avLst/>
+          </a:prstGeom>
+          <a:noFill/>
+        </p:spPr>
+        <p:txBody>
+          <a:bodyPr wrap="square" anchor="t" lIns="0" rIns="0" tIns="0" bIns="0">
+            <a:noAutofit/>
+          </a:bodyPr>
+          <a:lstStyle/>
+          <a:p>
             <a:pPr algn="l">
               <a:lnSpc>
-                <a:spcPct val="118000"/>
-              </a:lnSpc>
-              <a:spcAft>
-                <a:spcPts val="500"/>
-              </a:spcAft>
-            </a:pPr>
-            <a:r>
-              <a:rPr sz="2200" b="1">
+                <a:spcPct val="122000"/>
+              </a:lnSpc>
+              <a:spcAft>
+                <a:spcPts val="400"/>
+              </a:spcAft>
+            </a:pPr>
+            <a:r>
+              <a:rPr sz="2100" b="1">
                 <a:solidFill>
                   <a:srgbClr val="FFFFFF"/>
                 </a:solidFill>
-                <a:latin typeface="Helvetica Neue"/>
+                <a:latin typeface="Calibri"/>
               </a:rPr>
               <a:t>Create the folder</a:t>
             </a:r>
@@ -7849,7 +7813,7 @@
           <a:p>
             <a:pPr algn="l">
               <a:lnSpc>
-                <a:spcPct val="118000"/>
+                <a:spcPct val="122000"/>
               </a:lnSpc>
               <a:spcAft>
                 <a:spcPts val="0"/>
@@ -7860,7 +7824,7 @@
                 <a:solidFill>
                   <a:srgbClr val="FFFFFF"/>
                 </a:solidFill>
-                <a:latin typeface="Helvetica Neue"/>
+                <a:latin typeface="Calibri"/>
               </a:rPr>
               <a:t>A Google account the detachment owns, and a folder named TOP-Feedback.</a:t>
             </a:r>
@@ -7869,14 +7833,14 @@
       </p:sp>
       <p:sp>
         <p:nvSpPr>
-          <p:cNvPr id="6" name="Oval 5"/>
+          <p:cNvPr id="7" name="Oval 6"/>
           <p:cNvSpPr/>
           <p:nvPr/>
         </p:nvSpPr>
         <p:spPr>
           <a:xfrm>
-            <a:off x="777240" y="3429000"/>
-            <a:ext cx="566928" cy="566928"/>
+            <a:off x="822960" y="3383280"/>
+            <a:ext cx="548640" cy="548640"/>
           </a:xfrm>
           <a:prstGeom prst="ellipse">
             <a:avLst/>
@@ -7906,13 +7870,45 @@
         <p:txBody>
           <a:bodyPr rtlCol="0" anchor="ctr"/>
           <a:lstStyle/>
-          <a:p>
-            <a:pPr algn="ctr"/>
-            <a:r>
-              <a:rPr sz="2000" b="1">
+          <a:p/>
+        </p:txBody>
+      </p:sp>
+      <p:sp>
+        <p:nvSpPr>
+          <p:cNvPr id="8" name="TextBox 7"/>
+          <p:cNvSpPr txBox="1"/>
+          <p:nvPr/>
+        </p:nvSpPr>
+        <p:spPr>
+          <a:xfrm>
+            <a:off x="822960" y="3465576"/>
+            <a:ext cx="548640" cy="384048"/>
+          </a:xfrm>
+          <a:prstGeom prst="rect">
+            <a:avLst/>
+          </a:prstGeom>
+          <a:noFill/>
+        </p:spPr>
+        <p:txBody>
+          <a:bodyPr wrap="square" anchor="t" lIns="0" rIns="0" tIns="0" bIns="0">
+            <a:noAutofit/>
+          </a:bodyPr>
+          <a:lstStyle/>
+          <a:p>
+            <a:pPr algn="ctr">
+              <a:lnSpc>
+                <a:spcPct val="122000"/>
+              </a:lnSpc>
+              <a:spcAft>
+                <a:spcPts val="0"/>
+              </a:spcAft>
+            </a:pPr>
+            <a:r>
+              <a:rPr sz="1900" b="1">
                 <a:solidFill>
                   <a:srgbClr val="1C4F8B"/>
                 </a:solidFill>
+                <a:latin typeface="Calibri"/>
               </a:rPr>
               <a:t>2</a:t>
             </a:r>
@@ -7921,14 +7917,14 @@
       </p:sp>
       <p:sp>
         <p:nvSpPr>
-          <p:cNvPr id="7" name="TextBox 6"/>
+          <p:cNvPr id="9" name="TextBox 8"/>
           <p:cNvSpPr txBox="1"/>
           <p:nvPr/>
         </p:nvSpPr>
         <p:spPr>
           <a:xfrm>
-            <a:off x="1691640" y="3447288"/>
-            <a:ext cx="8686800" cy="914400"/>
+            <a:off x="1691640" y="3364992"/>
+            <a:ext cx="8778240" cy="960120"/>
           </a:xfrm>
           <a:prstGeom prst="rect">
             <a:avLst/>
@@ -7937,24 +7933,24 @@
         </p:spPr>
         <p:txBody>
           <a:bodyPr wrap="square" anchor="t" lIns="0" rIns="0" tIns="0" bIns="0">
-            <a:spAutoFit/>
+            <a:noAutofit/>
           </a:bodyPr>
           <a:lstStyle/>
           <a:p>
             <a:pPr algn="l">
               <a:lnSpc>
-                <a:spcPct val="118000"/>
-              </a:lnSpc>
-              <a:spcAft>
-                <a:spcPts val="500"/>
-              </a:spcAft>
-            </a:pPr>
-            <a:r>
-              <a:rPr sz="2200" b="1">
+                <a:spcPct val="122000"/>
+              </a:lnSpc>
+              <a:spcAft>
+                <a:spcPts val="400"/>
+              </a:spcAft>
+            </a:pPr>
+            <a:r>
+              <a:rPr sz="2100" b="1">
                 <a:solidFill>
                   <a:srgbClr val="FFFFFF"/>
                 </a:solidFill>
-                <a:latin typeface="Helvetica Neue"/>
+                <a:latin typeface="Calibri"/>
               </a:rPr>
               <a:t>Register the app</a:t>
             </a:r>
@@ -7962,7 +7958,7 @@
           <a:p>
             <a:pPr algn="l">
               <a:lnSpc>
-                <a:spcPct val="118000"/>
+                <a:spcPct val="122000"/>
               </a:lnSpc>
               <a:spcAft>
                 <a:spcPts val="0"/>
@@ -7973,23 +7969,23 @@
                 <a:solidFill>
                   <a:srgbClr val="FFFFFF"/>
                 </a:solidFill>
-                <a:latin typeface="Helvetica Neue"/>
-              </a:rPr>
-              <a:t>One free Google Cloud project so the app can reach that Drive. About ten minutes.</a:t>
-            </a:r>
-          </a:p>
-        </p:txBody>
-      </p:sp>
-      <p:sp>
-        <p:nvSpPr>
-          <p:cNvPr id="8" name="Oval 7"/>
+                <a:latin typeface="Calibri"/>
+              </a:rPr>
+              <a:t>One free Google Cloud project, so the app can reach that Drive. About ten minutes.</a:t>
+            </a:r>
+          </a:p>
+        </p:txBody>
+      </p:sp>
+      <p:sp>
+        <p:nvSpPr>
+          <p:cNvPr id="10" name="Oval 9"/>
           <p:cNvSpPr/>
           <p:nvPr/>
         </p:nvSpPr>
         <p:spPr>
           <a:xfrm>
-            <a:off x="777240" y="4572000"/>
-            <a:ext cx="566928" cy="566928"/>
+            <a:off x="822960" y="4526280"/>
+            <a:ext cx="548640" cy="548640"/>
           </a:xfrm>
           <a:prstGeom prst="ellipse">
             <a:avLst/>
@@ -8019,13 +8015,45 @@
         <p:txBody>
           <a:bodyPr rtlCol="0" anchor="ctr"/>
           <a:lstStyle/>
-          <a:p>
-            <a:pPr algn="ctr"/>
-            <a:r>
-              <a:rPr sz="2000" b="1">
+          <a:p/>
+        </p:txBody>
+      </p:sp>
+      <p:sp>
+        <p:nvSpPr>
+          <p:cNvPr id="11" name="TextBox 10"/>
+          <p:cNvSpPr txBox="1"/>
+          <p:nvPr/>
+        </p:nvSpPr>
+        <p:spPr>
+          <a:xfrm>
+            <a:off x="822960" y="4608576"/>
+            <a:ext cx="548640" cy="384048"/>
+          </a:xfrm>
+          <a:prstGeom prst="rect">
+            <a:avLst/>
+          </a:prstGeom>
+          <a:noFill/>
+        </p:spPr>
+        <p:txBody>
+          <a:bodyPr wrap="square" anchor="t" lIns="0" rIns="0" tIns="0" bIns="0">
+            <a:noAutofit/>
+          </a:bodyPr>
+          <a:lstStyle/>
+          <a:p>
+            <a:pPr algn="ctr">
+              <a:lnSpc>
+                <a:spcPct val="122000"/>
+              </a:lnSpc>
+              <a:spcAft>
+                <a:spcPts val="0"/>
+              </a:spcAft>
+            </a:pPr>
+            <a:r>
+              <a:rPr sz="1900" b="1">
                 <a:solidFill>
                   <a:srgbClr val="1C4F8B"/>
                 </a:solidFill>
+                <a:latin typeface="Calibri"/>
               </a:rPr>
               <a:t>3</a:t>
             </a:r>
@@ -8034,14 +8062,14 @@
       </p:sp>
       <p:sp>
         <p:nvSpPr>
-          <p:cNvPr id="9" name="TextBox 8"/>
+          <p:cNvPr id="12" name="TextBox 11"/>
           <p:cNvSpPr txBox="1"/>
           <p:nvPr/>
         </p:nvSpPr>
         <p:spPr>
           <a:xfrm>
-            <a:off x="1691640" y="4590288"/>
-            <a:ext cx="8686800" cy="914400"/>
+            <a:off x="1691640" y="4507992"/>
+            <a:ext cx="8778240" cy="960120"/>
           </a:xfrm>
           <a:prstGeom prst="rect">
             <a:avLst/>
@@ -8050,24 +8078,24 @@
         </p:spPr>
         <p:txBody>
           <a:bodyPr wrap="square" anchor="t" lIns="0" rIns="0" tIns="0" bIns="0">
-            <a:spAutoFit/>
+            <a:noAutofit/>
           </a:bodyPr>
           <a:lstStyle/>
           <a:p>
             <a:pPr algn="l">
               <a:lnSpc>
-                <a:spcPct val="118000"/>
-              </a:lnSpc>
-              <a:spcAft>
-                <a:spcPts val="500"/>
-              </a:spcAft>
-            </a:pPr>
-            <a:r>
-              <a:rPr sz="2200" b="1">
+                <a:spcPct val="122000"/>
+              </a:lnSpc>
+              <a:spcAft>
+                <a:spcPts val="400"/>
+              </a:spcAft>
+            </a:pPr>
+            <a:r>
+              <a:rPr sz="2100" b="1">
                 <a:solidFill>
                   <a:srgbClr val="FFFFFF"/>
                 </a:solidFill>
-                <a:latin typeface="Helvetica Neue"/>
+                <a:latin typeface="Calibri"/>
               </a:rPr>
               <a:t>Run the wizard</a:t>
             </a:r>
@@ -8075,7 +8103,7 @@
           <a:p>
             <a:pPr algn="l">
               <a:lnSpc>
-                <a:spcPct val="118000"/>
+                <a:spcPct val="122000"/>
               </a:lnSpc>
               <a:spcAft>
                 <a:spcPts val="0"/>
@@ -8086,7 +8114,7 @@
                 <a:solidFill>
                   <a:srgbClr val="FFFFFF"/>
                 </a:solidFill>
-                <a:latin typeface="Helvetica Neue"/>
+                <a:latin typeface="Calibri"/>
               </a:rPr>
               <a:t>Paste the folder link, create your administrator account, add cadets.</a:t>
             </a:r>
@@ -8095,14 +8123,14 @@
       </p:sp>
       <p:sp>
         <p:nvSpPr>
-          <p:cNvPr id="10" name="Rectangle 9"/>
+          <p:cNvPr id="13" name="Rectangle 12"/>
           <p:cNvSpPr/>
           <p:nvPr/>
         </p:nvSpPr>
         <p:spPr>
           <a:xfrm>
-            <a:off x="777240" y="5806440"/>
-            <a:ext cx="10607040" cy="19050"/>
+            <a:off x="822960" y="5806440"/>
+            <a:ext cx="10424160" cy="19050"/>
           </a:xfrm>
           <a:prstGeom prst="rect">
             <a:avLst/>
@@ -8132,21 +8160,19 @@
         <p:txBody>
           <a:bodyPr rtlCol="0" anchor="ctr"/>
           <a:lstStyle/>
-          <a:p>
-            <a:pPr algn="ctr"/>
-          </a:p>
-        </p:txBody>
-      </p:sp>
-      <p:sp>
-        <p:nvSpPr>
-          <p:cNvPr id="11" name="TextBox 10"/>
+          <a:p/>
+        </p:txBody>
+      </p:sp>
+      <p:sp>
+        <p:nvSpPr>
+          <p:cNvPr id="14" name="TextBox 13"/>
           <p:cNvSpPr txBox="1"/>
           <p:nvPr/>
         </p:nvSpPr>
         <p:spPr>
           <a:xfrm>
-            <a:off x="777240" y="6035040"/>
-            <a:ext cx="10607040" cy="457200"/>
+            <a:off x="822960" y="6035040"/>
+            <a:ext cx="10424160" cy="411480"/>
           </a:xfrm>
           <a:prstGeom prst="rect">
             <a:avLst/>
@@ -8155,13 +8181,13 @@
         </p:spPr>
         <p:txBody>
           <a:bodyPr wrap="square" anchor="t" lIns="0" rIns="0" tIns="0" bIns="0">
-            <a:spAutoFit/>
+            <a:noAutofit/>
           </a:bodyPr>
           <a:lstStyle/>
           <a:p>
             <a:pPr algn="l">
               <a:lnSpc>
-                <a:spcPct val="118000"/>
+                <a:spcPct val="122000"/>
               </a:lnSpc>
               <a:spcAft>
                 <a:spcPts val="0"/>
@@ -8172,9 +8198,9 @@
                 <a:solidFill>
                   <a:srgbClr val="FFFFFF"/>
                 </a:solidFill>
-                <a:latin typeface="Helvetica Neue"/>
-              </a:rPr>
-              <a:t>The full step-by-step is in the Installation and Setup Guide.</a:t>
+                <a:latin typeface="Calibri"/>
+              </a:rPr>
+              <a:t>Step by step, with screenshots: TOP-Feedback Setup Guide (PDF).</a:t>
             </a:r>
           </a:p>
         </p:txBody>
@@ -8205,8 +8231,8 @@
         </p:nvSpPr>
         <p:spPr>
           <a:xfrm>
-            <a:off x="777240" y="566928"/>
-            <a:ext cx="8229600" cy="274320"/>
+            <a:off x="822960" y="502920"/>
+            <a:ext cx="8229600" cy="292608"/>
           </a:xfrm>
           <a:prstGeom prst="rect">
             <a:avLst/>
@@ -8215,26 +8241,26 @@
         </p:spPr>
         <p:txBody>
           <a:bodyPr wrap="square" anchor="t" lIns="0" rIns="0" tIns="0" bIns="0">
-            <a:spAutoFit/>
+            <a:noAutofit/>
           </a:bodyPr>
           <a:lstStyle/>
           <a:p>
             <a:pPr algn="l">
               <a:lnSpc>
-                <a:spcPct val="118000"/>
+                <a:spcPct val="122000"/>
               </a:lnSpc>
               <a:spcAft>
                 <a:spcPts val="0"/>
               </a:spcAft>
             </a:pPr>
             <a:r>
-              <a:rPr sz="1100" b="1">
+              <a:rPr sz="1200" b="1">
                 <a:solidFill>
                   <a:srgbClr val="1C4F8B"/>
                 </a:solidFill>
-                <a:latin typeface="Helvetica Neue"/>
-              </a:rPr>
-              <a:t>WHY THIS EXISTS</a:t>
+                <a:latin typeface="Calibri"/>
+              </a:rPr>
+              <a:t>WHAT IT IS</a:t>
             </a:r>
           </a:p>
         </p:txBody>
@@ -8247,8 +8273,8 @@
         </p:nvSpPr>
         <p:spPr>
           <a:xfrm>
-            <a:off x="777240" y="914400"/>
-            <a:ext cx="10607040" cy="914400"/>
+            <a:off x="822960" y="896112"/>
+            <a:ext cx="10545775" cy="960120"/>
           </a:xfrm>
           <a:prstGeom prst="rect">
             <a:avLst/>
@@ -8257,26 +8283,26 @@
         </p:spPr>
         <p:txBody>
           <a:bodyPr wrap="square" anchor="t" lIns="0" rIns="0" tIns="0" bIns="0">
-            <a:spAutoFit/>
+            <a:noAutofit/>
           </a:bodyPr>
           <a:lstStyle/>
           <a:p>
             <a:pPr algn="l">
               <a:lnSpc>
-                <a:spcPct val="118000"/>
+                <a:spcPct val="122000"/>
               </a:lnSpc>
               <a:spcAft>
                 <a:spcPts val="0"/>
               </a:spcAft>
             </a:pPr>
             <a:r>
-              <a:rPr sz="3400" b="1">
+              <a:rPr sz="3000" b="1">
                 <a:solidFill>
                   <a:srgbClr val="14181F"/>
                 </a:solidFill>
-                <a:latin typeface="Helvetica Neue"/>
-              </a:rPr>
-              <a:t>Feedback that nobody can act on</a:t>
+                <a:latin typeface="Calibri"/>
+              </a:rPr>
+              <a:t>A feedback app that stores nothing on anyone else's computer</a:t>
             </a:r>
           </a:p>
         </p:txBody>
@@ -8289,8 +8315,8 @@
         </p:nvSpPr>
         <p:spPr>
           <a:xfrm>
-            <a:off x="777240" y="2148840"/>
-            <a:ext cx="4937760" cy="3657600"/>
+            <a:off x="822960" y="1938528"/>
+            <a:ext cx="10424160" cy="914400"/>
           </a:xfrm>
           <a:prstGeom prst="rect">
             <a:avLst/>
@@ -8298,84 +8324,27 @@
           <a:noFill/>
         </p:spPr>
         <p:txBody>
-          <a:bodyPr wrap="square" lIns="0" rIns="0" tIns="0" bIns="0">
-            <a:spAutoFit/>
+          <a:bodyPr wrap="square" anchor="t" lIns="0" rIns="0" tIns="0" bIns="0">
+            <a:noAutofit/>
           </a:bodyPr>
           <a:lstStyle/>
           <a:p>
-            <a:pPr>
-              <a:lnSpc>
-                <a:spcPct val="125000"/>
-              </a:lnSpc>
-              <a:spcAft>
-                <a:spcPts val="2000"/>
+            <a:pPr algn="l">
+              <a:lnSpc>
+                <a:spcPct val="122000"/>
+              </a:lnSpc>
+              <a:spcAft>
+                <a:spcPts val="0"/>
               </a:spcAft>
             </a:pPr>
             <a:r>
               <a:rPr sz="1800" b="0">
                 <a:solidFill>
-                  <a:srgbClr val="14181F"/>
-                </a:solidFill>
-                <a:latin typeface="Helvetica Neue"/>
-              </a:rPr>
-              <a:t>Paper forms get collected, stacked, and never counted.</a:t>
-            </a:r>
-          </a:p>
-          <a:p>
-            <a:pPr>
-              <a:lnSpc>
-                <a:spcPct val="125000"/>
-              </a:lnSpc>
-              <a:spcAft>
-                <a:spcPts val="2000"/>
-              </a:spcAft>
-            </a:pPr>
-            <a:r>
-              <a:rPr sz="1800" b="0">
-                <a:solidFill>
-                  <a:srgbClr val="14181F"/>
-                </a:solidFill>
-                <a:latin typeface="Helvetica Neue"/>
-              </a:rPr>
-              <a:t>Survey tools put cadet feedback on a company's servers.</a:t>
-            </a:r>
-          </a:p>
-          <a:p>
-            <a:pPr>
-              <a:lnSpc>
-                <a:spcPct val="125000"/>
-              </a:lnSpc>
-              <a:spcAft>
-                <a:spcPts val="2000"/>
-              </a:spcAft>
-            </a:pPr>
-            <a:r>
-              <a:rPr sz="1800" b="0">
-                <a:solidFill>
-                  <a:srgbClr val="14181F"/>
-                </a:solidFill>
-                <a:latin typeface="Helvetica Neue"/>
-              </a:rPr>
-              <a:t>Averages hide the thing you needed to see.</a:t>
-            </a:r>
-          </a:p>
-          <a:p>
-            <a:pPr>
-              <a:lnSpc>
-                <a:spcPct val="125000"/>
-              </a:lnSpc>
-              <a:spcAft>
-                <a:spcPts val="2000"/>
-              </a:spcAft>
-            </a:pPr>
-            <a:r>
-              <a:rPr sz="1800" b="0">
-                <a:solidFill>
-                  <a:srgbClr val="14181F"/>
-                </a:solidFill>
-                <a:latin typeface="Helvetica Neue"/>
-              </a:rPr>
-              <a:t>A disclosure of hazing can sit unread in a pile for weeks.</a:t>
+                  <a:srgbClr val="55606E"/>
+                </a:solidFill>
+                <a:latin typeface="Calibri"/>
+              </a:rPr>
+              <a:t>Cadets answer a short form on their phone. Instructors see the results analysed, not just listed. Every record is written to a Google Drive folder your detachment already owns.</a:t>
             </a:r>
           </a:p>
         </p:txBody>
@@ -8388,8 +8357,8 @@
         </p:nvSpPr>
         <p:spPr>
           <a:xfrm>
-            <a:off x="6492240" y="2011680"/>
-            <a:ext cx="4892040" cy="3200400"/>
+            <a:off x="822960" y="3017520"/>
+            <a:ext cx="3246120" cy="2514600"/>
           </a:xfrm>
           <a:prstGeom prst="roundRect">
             <a:avLst>
@@ -8397,10 +8366,12 @@
             </a:avLst>
           </a:prstGeom>
           <a:solidFill>
-            <a:srgbClr val="EEF3FA"/>
+            <a:srgbClr val="FFFFFF"/>
           </a:solidFill>
-          <a:ln>
-            <a:noFill/>
+          <a:ln w="12700">
+            <a:solidFill>
+              <a:srgbClr val="D3DCE8"/>
+            </a:solidFill>
           </a:ln>
           <a:effectLst/>
         </p:spPr>
@@ -8421,89 +8392,49 @@
         <p:txBody>
           <a:bodyPr rtlCol="0" anchor="ctr"/>
           <a:lstStyle/>
-          <a:p>
-            <a:pPr algn="ctr"/>
-          </a:p>
-        </p:txBody>
-      </p:sp>
-      <p:sp>
-        <p:nvSpPr>
-          <p:cNvPr id="6" name="TextBox 5"/>
-          <p:cNvSpPr txBox="1"/>
-          <p:nvPr/>
-        </p:nvSpPr>
-        <p:spPr>
-          <a:xfrm>
-            <a:off x="6949440" y="2423160"/>
-            <a:ext cx="4023360" cy="2743200"/>
-          </a:xfrm>
-          <a:prstGeom prst="rect">
-            <a:avLst/>
-          </a:prstGeom>
-          <a:noFill/>
-        </p:spPr>
-        <p:txBody>
-          <a:bodyPr wrap="square" anchor="t" lIns="0" rIns="0" tIns="0" bIns="0">
-            <a:spAutoFit/>
-          </a:bodyPr>
-          <a:lstStyle/>
-          <a:p>
-            <a:pPr algn="l">
-              <a:lnSpc>
-                <a:spcPct val="118000"/>
-              </a:lnSpc>
-              <a:spcAft>
-                <a:spcPts val="1400"/>
-              </a:spcAft>
-            </a:pPr>
-            <a:r>
-              <a:rPr sz="1500" b="1">
-                <a:solidFill>
-                  <a:srgbClr val="1C4F8B"/>
-                </a:solidFill>
-                <a:latin typeface="Helvetica Neue"/>
-              </a:rPr>
-              <a:t>What this replaces</a:t>
-            </a:r>
-          </a:p>
-          <a:p>
-            <a:pPr algn="l">
-              <a:lnSpc>
-                <a:spcPct val="118000"/>
-              </a:lnSpc>
-              <a:spcAft>
-                <a:spcPts val="1400"/>
-              </a:spcAft>
-            </a:pPr>
-            <a:r>
-              <a:rPr sz="1600" b="0">
-                <a:solidFill>
-                  <a:srgbClr val="14181F"/>
-                </a:solidFill>
-                <a:latin typeface="Helvetica Neue"/>
-              </a:rPr>
-              <a:t>One app that issues the form, collects the responses, does the statistics, reads the written answers, and flags anything that needs a person to act on it today.</a:t>
-            </a:r>
-          </a:p>
-          <a:p>
-            <a:pPr algn="l">
-              <a:lnSpc>
-                <a:spcPct val="118000"/>
-              </a:lnSpc>
-              <a:spcAft>
-                <a:spcPts val="0"/>
-              </a:spcAft>
-            </a:pPr>
-            <a:r>
-              <a:rPr sz="1600" b="1">
-                <a:solidFill>
-                  <a:srgbClr val="14181F"/>
-                </a:solidFill>
-                <a:latin typeface="Helvetica Neue"/>
-              </a:rPr>
-              <a:t>Runs on a phone. Works offline. Costs nothing.</a:t>
-            </a:r>
-          </a:p>
+          <a:p/>
+        </p:txBody>
+      </p:sp>
+      <p:sp>
+        <p:nvSpPr>
+          <p:cNvPr id="6" name="Rectangle 5"/>
+          <p:cNvSpPr/>
+          <p:nvPr/>
+        </p:nvSpPr>
+        <p:spPr>
+          <a:xfrm>
+            <a:off x="822960" y="3017520"/>
+            <a:ext cx="3246120" cy="50292"/>
+          </a:xfrm>
+          <a:prstGeom prst="rect">
+            <a:avLst/>
+          </a:prstGeom>
+          <a:solidFill>
+            <a:srgbClr val="1C4F8B"/>
+          </a:solidFill>
+          <a:ln>
+            <a:noFill/>
+          </a:ln>
+          <a:effectLst/>
+        </p:spPr>
+        <p:style>
+          <a:lnRef idx="1">
+            <a:schemeClr val="accent1"/>
+          </a:lnRef>
+          <a:fillRef idx="3">
+            <a:schemeClr val="accent1"/>
+          </a:fillRef>
+          <a:effectRef idx="2">
+            <a:schemeClr val="accent1"/>
+          </a:effectRef>
+          <a:fontRef idx="minor">
+            <a:schemeClr val="lt1"/>
+          </a:fontRef>
+        </p:style>
+        <p:txBody>
+          <a:bodyPr rtlCol="0" anchor="ctr"/>
+          <a:lstStyle/>
+          <a:p/>
         </p:txBody>
       </p:sp>
       <p:sp>
@@ -8514,8 +8445,8 @@
         </p:nvSpPr>
         <p:spPr>
           <a:xfrm>
-            <a:off x="10972800" y="6355080"/>
-            <a:ext cx="548640" cy="274320"/>
+            <a:off x="1133856" y="3401568"/>
+            <a:ext cx="2624328" cy="1856232"/>
           </a:xfrm>
           <a:prstGeom prst="rect">
             <a:avLst/>
@@ -8524,24 +8455,383 @@
         </p:spPr>
         <p:txBody>
           <a:bodyPr wrap="square" anchor="t" lIns="0" rIns="0" tIns="0" bIns="0">
-            <a:spAutoFit/>
+            <a:noAutofit/>
           </a:bodyPr>
           <a:lstStyle/>
           <a:p>
+            <a:pPr algn="l">
+              <a:lnSpc>
+                <a:spcPct val="122000"/>
+              </a:lnSpc>
+              <a:spcAft>
+                <a:spcPts val="1000"/>
+              </a:spcAft>
+            </a:pPr>
+            <a:r>
+              <a:rPr sz="1900" b="1">
+                <a:solidFill>
+                  <a:srgbClr val="14181F"/>
+                </a:solidFill>
+                <a:latin typeface="Calibri"/>
+              </a:rPr>
+              <a:t>Your Google account</a:t>
+            </a:r>
+          </a:p>
+          <a:p>
+            <a:pPr algn="l">
+              <a:lnSpc>
+                <a:spcPct val="122000"/>
+              </a:lnSpc>
+              <a:spcAft>
+                <a:spcPts val="0"/>
+              </a:spcAft>
+            </a:pPr>
+            <a:r>
+              <a:rPr sz="1400" b="0">
+                <a:solidFill>
+                  <a:srgbClr val="55606E"/>
+                </a:solidFill>
+                <a:latin typeface="Calibri"/>
+              </a:rPr>
+              <a:t>No vendor holds your data, because no vendor is involved. If you stop using the app, every response is still sitting in your Drive.</a:t>
+            </a:r>
+          </a:p>
+        </p:txBody>
+      </p:sp>
+      <p:sp>
+        <p:nvSpPr>
+          <p:cNvPr id="8" name="Rounded Rectangle 7"/>
+          <p:cNvSpPr/>
+          <p:nvPr/>
+        </p:nvSpPr>
+        <p:spPr>
+          <a:xfrm>
+            <a:off x="4453128" y="3017520"/>
+            <a:ext cx="3246120" cy="2514600"/>
+          </a:xfrm>
+          <a:prstGeom prst="roundRect">
+            <a:avLst>
+              <a:gd name="adj" fmla="val 4000"/>
+            </a:avLst>
+          </a:prstGeom>
+          <a:solidFill>
+            <a:srgbClr val="FFFFFF"/>
+          </a:solidFill>
+          <a:ln w="12700">
+            <a:solidFill>
+              <a:srgbClr val="D3DCE8"/>
+            </a:solidFill>
+          </a:ln>
+          <a:effectLst/>
+        </p:spPr>
+        <p:style>
+          <a:lnRef idx="1">
+            <a:schemeClr val="accent1"/>
+          </a:lnRef>
+          <a:fillRef idx="3">
+            <a:schemeClr val="accent1"/>
+          </a:fillRef>
+          <a:effectRef idx="2">
+            <a:schemeClr val="accent1"/>
+          </a:effectRef>
+          <a:fontRef idx="minor">
+            <a:schemeClr val="lt1"/>
+          </a:fontRef>
+        </p:style>
+        <p:txBody>
+          <a:bodyPr rtlCol="0" anchor="ctr"/>
+          <a:lstStyle/>
+          <a:p/>
+        </p:txBody>
+      </p:sp>
+      <p:sp>
+        <p:nvSpPr>
+          <p:cNvPr id="9" name="Rectangle 8"/>
+          <p:cNvSpPr/>
+          <p:nvPr/>
+        </p:nvSpPr>
+        <p:spPr>
+          <a:xfrm>
+            <a:off x="4453128" y="3017520"/>
+            <a:ext cx="3246120" cy="50292"/>
+          </a:xfrm>
+          <a:prstGeom prst="rect">
+            <a:avLst/>
+          </a:prstGeom>
+          <a:solidFill>
+            <a:srgbClr val="1C4F8B"/>
+          </a:solidFill>
+          <a:ln>
+            <a:noFill/>
+          </a:ln>
+          <a:effectLst/>
+        </p:spPr>
+        <p:style>
+          <a:lnRef idx="1">
+            <a:schemeClr val="accent1"/>
+          </a:lnRef>
+          <a:fillRef idx="3">
+            <a:schemeClr val="accent1"/>
+          </a:fillRef>
+          <a:effectRef idx="2">
+            <a:schemeClr val="accent1"/>
+          </a:effectRef>
+          <a:fontRef idx="minor">
+            <a:schemeClr val="lt1"/>
+          </a:fontRef>
+        </p:style>
+        <p:txBody>
+          <a:bodyPr rtlCol="0" anchor="ctr"/>
+          <a:lstStyle/>
+          <a:p/>
+        </p:txBody>
+      </p:sp>
+      <p:sp>
+        <p:nvSpPr>
+          <p:cNvPr id="10" name="TextBox 9"/>
+          <p:cNvSpPr txBox="1"/>
+          <p:nvPr/>
+        </p:nvSpPr>
+        <p:spPr>
+          <a:xfrm>
+            <a:off x="4764024" y="3401568"/>
+            <a:ext cx="2624328" cy="1856232"/>
+          </a:xfrm>
+          <a:prstGeom prst="rect">
+            <a:avLst/>
+          </a:prstGeom>
+          <a:noFill/>
+        </p:spPr>
+        <p:txBody>
+          <a:bodyPr wrap="square" anchor="t" lIns="0" rIns="0" tIns="0" bIns="0">
+            <a:noAutofit/>
+          </a:bodyPr>
+          <a:lstStyle/>
+          <a:p>
+            <a:pPr algn="l">
+              <a:lnSpc>
+                <a:spcPct val="122000"/>
+              </a:lnSpc>
+              <a:spcAft>
+                <a:spcPts val="1000"/>
+              </a:spcAft>
+            </a:pPr>
+            <a:r>
+              <a:rPr sz="1900" b="1">
+                <a:solidFill>
+                  <a:srgbClr val="14181F"/>
+                </a:solidFill>
+                <a:latin typeface="Calibri"/>
+              </a:rPr>
+              <a:t>Any device</a:t>
+            </a:r>
+          </a:p>
+          <a:p>
+            <a:pPr algn="l">
+              <a:lnSpc>
+                <a:spcPct val="122000"/>
+              </a:lnSpc>
+              <a:spcAft>
+                <a:spcPts val="0"/>
+              </a:spcAft>
+            </a:pPr>
+            <a:r>
+              <a:rPr sz="1400" b="0">
+                <a:solidFill>
+                  <a:srgbClr val="55606E"/>
+                </a:solidFill>
+                <a:latin typeface="Calibri"/>
+              </a:rPr>
+              <a:t>Runs in a browser and installs to a phone home screen. Works with no signal and sends when the connection returns.</a:t>
+            </a:r>
+          </a:p>
+        </p:txBody>
+      </p:sp>
+      <p:sp>
+        <p:nvSpPr>
+          <p:cNvPr id="11" name="Rounded Rectangle 10"/>
+          <p:cNvSpPr/>
+          <p:nvPr/>
+        </p:nvSpPr>
+        <p:spPr>
+          <a:xfrm>
+            <a:off x="8083296" y="3017520"/>
+            <a:ext cx="3246120" cy="2514600"/>
+          </a:xfrm>
+          <a:prstGeom prst="roundRect">
+            <a:avLst>
+              <a:gd name="adj" fmla="val 4000"/>
+            </a:avLst>
+          </a:prstGeom>
+          <a:solidFill>
+            <a:srgbClr val="FFFFFF"/>
+          </a:solidFill>
+          <a:ln w="12700">
+            <a:solidFill>
+              <a:srgbClr val="D3DCE8"/>
+            </a:solidFill>
+          </a:ln>
+          <a:effectLst/>
+        </p:spPr>
+        <p:style>
+          <a:lnRef idx="1">
+            <a:schemeClr val="accent1"/>
+          </a:lnRef>
+          <a:fillRef idx="3">
+            <a:schemeClr val="accent1"/>
+          </a:fillRef>
+          <a:effectRef idx="2">
+            <a:schemeClr val="accent1"/>
+          </a:effectRef>
+          <a:fontRef idx="minor">
+            <a:schemeClr val="lt1"/>
+          </a:fontRef>
+        </p:style>
+        <p:txBody>
+          <a:bodyPr rtlCol="0" anchor="ctr"/>
+          <a:lstStyle/>
+          <a:p/>
+        </p:txBody>
+      </p:sp>
+      <p:sp>
+        <p:nvSpPr>
+          <p:cNvPr id="12" name="Rectangle 11"/>
+          <p:cNvSpPr/>
+          <p:nvPr/>
+        </p:nvSpPr>
+        <p:spPr>
+          <a:xfrm>
+            <a:off x="8083296" y="3017520"/>
+            <a:ext cx="3246120" cy="50292"/>
+          </a:xfrm>
+          <a:prstGeom prst="rect">
+            <a:avLst/>
+          </a:prstGeom>
+          <a:solidFill>
+            <a:srgbClr val="1C4F8B"/>
+          </a:solidFill>
+          <a:ln>
+            <a:noFill/>
+          </a:ln>
+          <a:effectLst/>
+        </p:spPr>
+        <p:style>
+          <a:lnRef idx="1">
+            <a:schemeClr val="accent1"/>
+          </a:lnRef>
+          <a:fillRef idx="3">
+            <a:schemeClr val="accent1"/>
+          </a:fillRef>
+          <a:effectRef idx="2">
+            <a:schemeClr val="accent1"/>
+          </a:effectRef>
+          <a:fontRef idx="minor">
+            <a:schemeClr val="lt1"/>
+          </a:fontRef>
+        </p:style>
+        <p:txBody>
+          <a:bodyPr rtlCol="0" anchor="ctr"/>
+          <a:lstStyle/>
+          <a:p/>
+        </p:txBody>
+      </p:sp>
+      <p:sp>
+        <p:nvSpPr>
+          <p:cNvPr id="13" name="TextBox 12"/>
+          <p:cNvSpPr txBox="1"/>
+          <p:nvPr/>
+        </p:nvSpPr>
+        <p:spPr>
+          <a:xfrm>
+            <a:off x="8394192" y="3401568"/>
+            <a:ext cx="2624328" cy="1856232"/>
+          </a:xfrm>
+          <a:prstGeom prst="rect">
+            <a:avLst/>
+          </a:prstGeom>
+          <a:noFill/>
+        </p:spPr>
+        <p:txBody>
+          <a:bodyPr wrap="square" anchor="t" lIns="0" rIns="0" tIns="0" bIns="0">
+            <a:noAutofit/>
+          </a:bodyPr>
+          <a:lstStyle/>
+          <a:p>
+            <a:pPr algn="l">
+              <a:lnSpc>
+                <a:spcPct val="122000"/>
+              </a:lnSpc>
+              <a:spcAft>
+                <a:spcPts val="1000"/>
+              </a:spcAft>
+            </a:pPr>
+            <a:r>
+              <a:rPr sz="1900" b="1">
+                <a:solidFill>
+                  <a:srgbClr val="14181F"/>
+                </a:solidFill>
+                <a:latin typeface="Calibri"/>
+              </a:rPr>
+              <a:t>Nothing to buy</a:t>
+            </a:r>
+          </a:p>
+          <a:p>
+            <a:pPr algn="l">
+              <a:lnSpc>
+                <a:spcPct val="122000"/>
+              </a:lnSpc>
+              <a:spcAft>
+                <a:spcPts val="0"/>
+              </a:spcAft>
+            </a:pPr>
+            <a:r>
+              <a:rPr sz="1400" b="0">
+                <a:solidFill>
+                  <a:srgbClr val="55606E"/>
+                </a:solidFill>
+                <a:latin typeface="Calibri"/>
+              </a:rPr>
+              <a:t>No licences, no subscription, no server to maintain. Setup is a Drive folder and about 45 minutes, once.</a:t>
+            </a:r>
+          </a:p>
+        </p:txBody>
+      </p:sp>
+      <p:sp>
+        <p:nvSpPr>
+          <p:cNvPr id="14" name="TextBox 13"/>
+          <p:cNvSpPr txBox="1"/>
+          <p:nvPr/>
+        </p:nvSpPr>
+        <p:spPr>
+          <a:xfrm>
+            <a:off x="10881360" y="6327648"/>
+            <a:ext cx="502920" cy="274320"/>
+          </a:xfrm>
+          <a:prstGeom prst="rect">
+            <a:avLst/>
+          </a:prstGeom>
+          <a:noFill/>
+        </p:spPr>
+        <p:txBody>
+          <a:bodyPr wrap="square" anchor="t" lIns="0" rIns="0" tIns="0" bIns="0">
+            <a:noAutofit/>
+          </a:bodyPr>
+          <a:lstStyle/>
+          <a:p>
             <a:pPr algn="r">
               <a:lnSpc>
-                <a:spcPct val="118000"/>
+                <a:spcPct val="122000"/>
               </a:lnSpc>
               <a:spcAft>
                 <a:spcPts val="0"/>
               </a:spcAft>
             </a:pPr>
             <a:r>
-              <a:rPr sz="1000" b="0">
+              <a:rPr sz="1100" b="0">
                 <a:solidFill>
                   <a:srgbClr val="8A939F"/>
                 </a:solidFill>
-                <a:latin typeface="Helvetica Neue"/>
+                <a:latin typeface="Calibri"/>
               </a:rPr>
               <a:t>2</a:t>
             </a:r>
@@ -8574,8 +8864,8 @@
         </p:nvSpPr>
         <p:spPr>
           <a:xfrm>
-            <a:off x="777240" y="566928"/>
-            <a:ext cx="8229600" cy="274320"/>
+            <a:off x="822960" y="502920"/>
+            <a:ext cx="8229600" cy="292608"/>
           </a:xfrm>
           <a:prstGeom prst="rect">
             <a:avLst/>
@@ -8584,26 +8874,26 @@
         </p:spPr>
         <p:txBody>
           <a:bodyPr wrap="square" anchor="t" lIns="0" rIns="0" tIns="0" bIns="0">
-            <a:spAutoFit/>
+            <a:noAutofit/>
           </a:bodyPr>
           <a:lstStyle/>
           <a:p>
             <a:pPr algn="l">
               <a:lnSpc>
-                <a:spcPct val="118000"/>
+                <a:spcPct val="122000"/>
               </a:lnSpc>
               <a:spcAft>
                 <a:spcPts val="0"/>
               </a:spcAft>
             </a:pPr>
             <a:r>
-              <a:rPr sz="1100" b="1">
+              <a:rPr sz="1200" b="1">
                 <a:solidFill>
                   <a:srgbClr val="1C4F8B"/>
                 </a:solidFill>
-                <a:latin typeface="Helvetica Neue"/>
-              </a:rPr>
-              <a:t>WHAT IT IS</a:t>
+                <a:latin typeface="Calibri"/>
+              </a:rPr>
+              <a:t>WHY IT EXISTS</a:t>
             </a:r>
           </a:p>
         </p:txBody>
@@ -8616,8 +8906,8 @@
         </p:nvSpPr>
         <p:spPr>
           <a:xfrm>
-            <a:off x="777240" y="914400"/>
-            <a:ext cx="10607040" cy="914400"/>
+            <a:off x="822960" y="896112"/>
+            <a:ext cx="10545775" cy="960120"/>
           </a:xfrm>
           <a:prstGeom prst="rect">
             <a:avLst/>
@@ -8626,13 +8916,13 @@
         </p:spPr>
         <p:txBody>
           <a:bodyPr wrap="square" anchor="t" lIns="0" rIns="0" tIns="0" bIns="0">
-            <a:spAutoFit/>
+            <a:noAutofit/>
           </a:bodyPr>
           <a:lstStyle/>
           <a:p>
             <a:pPr algn="l">
               <a:lnSpc>
-                <a:spcPct val="118000"/>
+                <a:spcPct val="122000"/>
               </a:lnSpc>
               <a:spcAft>
                 <a:spcPts val="0"/>
@@ -8643,36 +8933,133 @@
                 <a:solidFill>
                   <a:srgbClr val="14181F"/>
                 </a:solidFill>
-                <a:latin typeface="Helvetica Neue"/>
-              </a:rPr>
-              <a:t>A web app with no server behind it</a:t>
-            </a:r>
-          </a:p>
-        </p:txBody>
-      </p:sp>
-      <p:sp>
-        <p:nvSpPr>
-          <p:cNvPr id="4" name="Rounded Rectangle 3"/>
+                <a:latin typeface="Calibri"/>
+              </a:rPr>
+              <a:t>Feedback nobody can act on</a:t>
+            </a:r>
+          </a:p>
+        </p:txBody>
+      </p:sp>
+      <p:sp>
+        <p:nvSpPr>
+          <p:cNvPr id="4" name="TextBox 3"/>
+          <p:cNvSpPr txBox="1"/>
+          <p:nvPr/>
+        </p:nvSpPr>
+        <p:spPr>
+          <a:xfrm>
+            <a:off x="822960" y="2103120"/>
+            <a:ext cx="5394960" cy="3566160"/>
+          </a:xfrm>
+          <a:prstGeom prst="rect">
+            <a:avLst/>
+          </a:prstGeom>
+          <a:noFill/>
+        </p:spPr>
+        <p:txBody>
+          <a:bodyPr wrap="square" anchor="t" lIns="0" rIns="0" tIns="0" bIns="0">
+            <a:noAutofit/>
+          </a:bodyPr>
+          <a:lstStyle/>
+          <a:p>
+            <a:pPr algn="l">
+              <a:lnSpc>
+                <a:spcPct val="122000"/>
+              </a:lnSpc>
+              <a:spcAft>
+                <a:spcPts val="2200"/>
+              </a:spcAft>
+            </a:pPr>
+            <a:r>
+              <a:rPr sz="1800" b="1">
+                <a:solidFill>
+                  <a:srgbClr val="14181F"/>
+                </a:solidFill>
+                <a:latin typeface="Calibri"/>
+              </a:rPr>
+              <a:t>Paper forms get collected, stacked, and never counted.</a:t>
+            </a:r>
+          </a:p>
+          <a:p>
+            <a:pPr algn="l">
+              <a:lnSpc>
+                <a:spcPct val="122000"/>
+              </a:lnSpc>
+              <a:spcAft>
+                <a:spcPts val="2200"/>
+              </a:spcAft>
+            </a:pPr>
+            <a:r>
+              <a:rPr sz="1800" b="1">
+                <a:solidFill>
+                  <a:srgbClr val="14181F"/>
+                </a:solidFill>
+                <a:latin typeface="Calibri"/>
+              </a:rPr>
+              <a:t>Survey tools put cadet feedback on a company's servers.</a:t>
+            </a:r>
+          </a:p>
+          <a:p>
+            <a:pPr algn="l">
+              <a:lnSpc>
+                <a:spcPct val="122000"/>
+              </a:lnSpc>
+              <a:spcAft>
+                <a:spcPts val="2200"/>
+              </a:spcAft>
+            </a:pPr>
+            <a:r>
+              <a:rPr sz="1800" b="1">
+                <a:solidFill>
+                  <a:srgbClr val="14181F"/>
+                </a:solidFill>
+                <a:latin typeface="Calibri"/>
+              </a:rPr>
+              <a:t>An average hides the very thing you needed to see.</a:t>
+            </a:r>
+          </a:p>
+          <a:p>
+            <a:pPr algn="l">
+              <a:lnSpc>
+                <a:spcPct val="122000"/>
+              </a:lnSpc>
+              <a:spcAft>
+                <a:spcPts val="2200"/>
+              </a:spcAft>
+            </a:pPr>
+            <a:r>
+              <a:rPr sz="1800" b="1">
+                <a:solidFill>
+                  <a:srgbClr val="14181F"/>
+                </a:solidFill>
+                <a:latin typeface="Calibri"/>
+              </a:rPr>
+              <a:t>A disclosure of hazing can sit unread in a pile for weeks.</a:t>
+            </a:r>
+          </a:p>
+        </p:txBody>
+      </p:sp>
+      <p:sp>
+        <p:nvSpPr>
+          <p:cNvPr id="5" name="Rounded Rectangle 4"/>
           <p:cNvSpPr/>
           <p:nvPr/>
         </p:nvSpPr>
         <p:spPr>
           <a:xfrm>
-            <a:off x="777240" y="2286000"/>
-            <a:ext cx="3337560" cy="2834640"/>
+            <a:off x="6629400" y="2011680"/>
+            <a:ext cx="4754880" cy="3200400"/>
           </a:xfrm>
           <a:prstGeom prst="roundRect">
             <a:avLst>
-              <a:gd name="adj" fmla="val 5000"/>
+              <a:gd name="adj" fmla="val 4000"/>
             </a:avLst>
           </a:prstGeom>
           <a:solidFill>
-            <a:srgbClr val="FFFFFF"/>
+            <a:srgbClr val="ECF2FA"/>
           </a:solidFill>
-          <a:ln w="12700">
-            <a:solidFill>
-              <a:srgbClr val="D8DEE8"/>
-            </a:solidFill>
+          <a:ln>
+            <a:noFill/>
           </a:ln>
           <a:effectLst/>
         </p:spPr>
@@ -8693,53 +9080,7 @@
         <p:txBody>
           <a:bodyPr rtlCol="0" anchor="ctr"/>
           <a:lstStyle/>
-          <a:p>
-            <a:pPr algn="ctr"/>
-          </a:p>
-        </p:txBody>
-      </p:sp>
-      <p:sp>
-        <p:nvSpPr>
-          <p:cNvPr id="5" name="Rectangle 4"/>
-          <p:cNvSpPr/>
-          <p:nvPr/>
-        </p:nvSpPr>
-        <p:spPr>
-          <a:xfrm>
-            <a:off x="777240" y="2286000"/>
-            <a:ext cx="3337560" cy="47625"/>
-          </a:xfrm>
-          <a:prstGeom prst="rect">
-            <a:avLst/>
-          </a:prstGeom>
-          <a:solidFill>
-            <a:srgbClr val="1C4F8B"/>
-          </a:solidFill>
-          <a:ln>
-            <a:noFill/>
-          </a:ln>
-          <a:effectLst/>
-        </p:spPr>
-        <p:style>
-          <a:lnRef idx="1">
-            <a:schemeClr val="accent1"/>
-          </a:lnRef>
-          <a:fillRef idx="3">
-            <a:schemeClr val="accent1"/>
-          </a:fillRef>
-          <a:effectRef idx="2">
-            <a:schemeClr val="accent1"/>
-          </a:effectRef>
-          <a:fontRef idx="minor">
-            <a:schemeClr val="lt1"/>
-          </a:fontRef>
-        </p:style>
-        <p:txBody>
-          <a:bodyPr rtlCol="0" anchor="ctr"/>
-          <a:lstStyle/>
-          <a:p>
-            <a:pPr algn="ctr"/>
-          </a:p>
+          <a:p/>
         </p:txBody>
       </p:sp>
       <p:sp>
@@ -8750,8 +9091,8 @@
         </p:nvSpPr>
         <p:spPr>
           <a:xfrm>
-            <a:off x="1143000" y="2697480"/>
-            <a:ext cx="2606040" cy="2194560"/>
+            <a:off x="7040880" y="2395728"/>
+            <a:ext cx="3931920" cy="2468880"/>
           </a:xfrm>
           <a:prstGeom prst="rect">
             <a:avLst/>
@@ -8760,151 +9101,78 @@
         </p:spPr>
         <p:txBody>
           <a:bodyPr wrap="square" anchor="t" lIns="0" rIns="0" tIns="0" bIns="0">
-            <a:spAutoFit/>
+            <a:noAutofit/>
           </a:bodyPr>
           <a:lstStyle/>
           <a:p>
             <a:pPr algn="l">
               <a:lnSpc>
-                <a:spcPct val="118000"/>
+                <a:spcPct val="122000"/>
               </a:lnSpc>
               <a:spcAft>
                 <a:spcPts val="1200"/>
               </a:spcAft>
             </a:pPr>
             <a:r>
-              <a:rPr sz="1900" b="1">
+              <a:rPr sz="1600" b="1">
+                <a:solidFill>
+                  <a:srgbClr val="1C4F8B"/>
+                </a:solidFill>
+                <a:latin typeface="Calibri"/>
+              </a:rPr>
+              <a:t>What it replaces</a:t>
+            </a:r>
+          </a:p>
+          <a:p>
+            <a:pPr algn="l">
+              <a:lnSpc>
+                <a:spcPct val="122000"/>
+              </a:lnSpc>
+              <a:spcAft>
+                <a:spcPts val="1200"/>
+              </a:spcAft>
+            </a:pPr>
+            <a:r>
+              <a:rPr sz="1500" b="0">
                 <a:solidFill>
                   <a:srgbClr val="14181F"/>
                 </a:solidFill>
-                <a:latin typeface="Helvetica Neue"/>
-              </a:rPr>
-              <a:t>Your Google account</a:t>
+                <a:latin typeface="Calibri"/>
+              </a:rPr>
+              <a:t>One app that issues the form, collects the responses, runs the statistics, reads the written answers, and flags anything a person needs to see today.</a:t>
             </a:r>
           </a:p>
           <a:p>
             <a:pPr algn="l">
               <a:lnSpc>
-                <a:spcPct val="118000"/>
+                <a:spcPct val="122000"/>
               </a:lnSpc>
               <a:spcAft>
                 <a:spcPts val="0"/>
               </a:spcAft>
             </a:pPr>
             <a:r>
-              <a:rPr sz="1400" b="0">
-                <a:solidFill>
-                  <a:srgbClr val="55606E"/>
-                </a:solidFill>
-                <a:latin typeface="Helvetica Neue"/>
-              </a:rPr>
-              <a:t>Every record is written to a Drive folder your detachment owns. No vendor holds your data, because no vendor is involved.</a:t>
-            </a:r>
-          </a:p>
-        </p:txBody>
-      </p:sp>
-      <p:sp>
-        <p:nvSpPr>
-          <p:cNvPr id="7" name="Rounded Rectangle 6"/>
-          <p:cNvSpPr/>
-          <p:nvPr/>
-        </p:nvSpPr>
-        <p:spPr>
-          <a:xfrm>
-            <a:off x="4498848" y="2286000"/>
-            <a:ext cx="3337560" cy="2834640"/>
-          </a:xfrm>
-          <a:prstGeom prst="roundRect">
-            <a:avLst>
-              <a:gd name="adj" fmla="val 5000"/>
-            </a:avLst>
-          </a:prstGeom>
-          <a:solidFill>
-            <a:srgbClr val="FFFFFF"/>
-          </a:solidFill>
-          <a:ln w="12700">
-            <a:solidFill>
-              <a:srgbClr val="D8DEE8"/>
-            </a:solidFill>
-          </a:ln>
-          <a:effectLst/>
-        </p:spPr>
-        <p:style>
-          <a:lnRef idx="1">
-            <a:schemeClr val="accent1"/>
-          </a:lnRef>
-          <a:fillRef idx="3">
-            <a:schemeClr val="accent1"/>
-          </a:fillRef>
-          <a:effectRef idx="2">
-            <a:schemeClr val="accent1"/>
-          </a:effectRef>
-          <a:fontRef idx="minor">
-            <a:schemeClr val="lt1"/>
-          </a:fontRef>
-        </p:style>
-        <p:txBody>
-          <a:bodyPr rtlCol="0" anchor="ctr"/>
-          <a:lstStyle/>
-          <a:p>
-            <a:pPr algn="ctr"/>
-          </a:p>
-        </p:txBody>
-      </p:sp>
-      <p:sp>
-        <p:nvSpPr>
-          <p:cNvPr id="8" name="Rectangle 7"/>
-          <p:cNvSpPr/>
-          <p:nvPr/>
-        </p:nvSpPr>
-        <p:spPr>
-          <a:xfrm>
-            <a:off x="4498848" y="2286000"/>
-            <a:ext cx="3337560" cy="47625"/>
-          </a:xfrm>
-          <a:prstGeom prst="rect">
-            <a:avLst/>
-          </a:prstGeom>
-          <a:solidFill>
-            <a:srgbClr val="1C4F8B"/>
-          </a:solidFill>
-          <a:ln>
-            <a:noFill/>
-          </a:ln>
-          <a:effectLst/>
-        </p:spPr>
-        <p:style>
-          <a:lnRef idx="1">
-            <a:schemeClr val="accent1"/>
-          </a:lnRef>
-          <a:fillRef idx="3">
-            <a:schemeClr val="accent1"/>
-          </a:fillRef>
-          <a:effectRef idx="2">
-            <a:schemeClr val="accent1"/>
-          </a:effectRef>
-          <a:fontRef idx="minor">
-            <a:schemeClr val="lt1"/>
-          </a:fontRef>
-        </p:style>
-        <p:txBody>
-          <a:bodyPr rtlCol="0" anchor="ctr"/>
-          <a:lstStyle/>
-          <a:p>
-            <a:pPr algn="ctr"/>
-          </a:p>
-        </p:txBody>
-      </p:sp>
-      <p:sp>
-        <p:nvSpPr>
-          <p:cNvPr id="9" name="TextBox 8"/>
+              <a:rPr sz="1500" b="1">
+                <a:solidFill>
+                  <a:srgbClr val="14181F"/>
+                </a:solidFill>
+                <a:latin typeface="Calibri"/>
+              </a:rPr>
+              <a:t>On a phone. Offline. At no cost.</a:t>
+            </a:r>
+          </a:p>
+        </p:txBody>
+      </p:sp>
+      <p:sp>
+        <p:nvSpPr>
+          <p:cNvPr id="7" name="TextBox 6"/>
           <p:cNvSpPr txBox="1"/>
           <p:nvPr/>
         </p:nvSpPr>
         <p:spPr>
           <a:xfrm>
-            <a:off x="4864608" y="2697480"/>
-            <a:ext cx="2606040" cy="2194560"/>
+            <a:off x="10881360" y="6327648"/>
+            <a:ext cx="502920" cy="274320"/>
           </a:xfrm>
           <a:prstGeom prst="rect">
             <a:avLst/>
@@ -8913,238 +9181,24 @@
         </p:spPr>
         <p:txBody>
           <a:bodyPr wrap="square" anchor="t" lIns="0" rIns="0" tIns="0" bIns="0">
-            <a:spAutoFit/>
+            <a:noAutofit/>
           </a:bodyPr>
           <a:lstStyle/>
           <a:p>
-            <a:pPr algn="l">
-              <a:lnSpc>
-                <a:spcPct val="118000"/>
-              </a:lnSpc>
-              <a:spcAft>
-                <a:spcPts val="1200"/>
-              </a:spcAft>
-            </a:pPr>
-            <a:r>
-              <a:rPr sz="1900" b="1">
-                <a:solidFill>
-                  <a:srgbClr val="14181F"/>
-                </a:solidFill>
-                <a:latin typeface="Helvetica Neue"/>
-              </a:rPr>
-              <a:t>Any device</a:t>
-            </a:r>
-          </a:p>
-          <a:p>
-            <a:pPr algn="l">
-              <a:lnSpc>
-                <a:spcPct val="118000"/>
+            <a:pPr algn="r">
+              <a:lnSpc>
+                <a:spcPct val="122000"/>
               </a:lnSpc>
               <a:spcAft>
                 <a:spcPts val="0"/>
               </a:spcAft>
             </a:pPr>
             <a:r>
-              <a:rPr sz="1400" b="0">
-                <a:solidFill>
-                  <a:srgbClr val="55606E"/>
-                </a:solidFill>
-                <a:latin typeface="Helvetica Neue"/>
-              </a:rPr>
-              <a:t>Opens in a browser and installs to a phone home screen. Cadets fill in feedback on the walk out of the classroom.</a:t>
-            </a:r>
-          </a:p>
-        </p:txBody>
-      </p:sp>
-      <p:sp>
-        <p:nvSpPr>
-          <p:cNvPr id="10" name="Rounded Rectangle 9"/>
-          <p:cNvSpPr/>
-          <p:nvPr/>
-        </p:nvSpPr>
-        <p:spPr>
-          <a:xfrm>
-            <a:off x="8220456" y="2286000"/>
-            <a:ext cx="3337560" cy="2834640"/>
-          </a:xfrm>
-          <a:prstGeom prst="roundRect">
-            <a:avLst>
-              <a:gd name="adj" fmla="val 5000"/>
-            </a:avLst>
-          </a:prstGeom>
-          <a:solidFill>
-            <a:srgbClr val="FFFFFF"/>
-          </a:solidFill>
-          <a:ln w="12700">
-            <a:solidFill>
-              <a:srgbClr val="D8DEE8"/>
-            </a:solidFill>
-          </a:ln>
-          <a:effectLst/>
-        </p:spPr>
-        <p:style>
-          <a:lnRef idx="1">
-            <a:schemeClr val="accent1"/>
-          </a:lnRef>
-          <a:fillRef idx="3">
-            <a:schemeClr val="accent1"/>
-          </a:fillRef>
-          <a:effectRef idx="2">
-            <a:schemeClr val="accent1"/>
-          </a:effectRef>
-          <a:fontRef idx="minor">
-            <a:schemeClr val="lt1"/>
-          </a:fontRef>
-        </p:style>
-        <p:txBody>
-          <a:bodyPr rtlCol="0" anchor="ctr"/>
-          <a:lstStyle/>
-          <a:p>
-            <a:pPr algn="ctr"/>
-          </a:p>
-        </p:txBody>
-      </p:sp>
-      <p:sp>
-        <p:nvSpPr>
-          <p:cNvPr id="11" name="Rectangle 10"/>
-          <p:cNvSpPr/>
-          <p:nvPr/>
-        </p:nvSpPr>
-        <p:spPr>
-          <a:xfrm>
-            <a:off x="8220456" y="2286000"/>
-            <a:ext cx="3337560" cy="47625"/>
-          </a:xfrm>
-          <a:prstGeom prst="rect">
-            <a:avLst/>
-          </a:prstGeom>
-          <a:solidFill>
-            <a:srgbClr val="1C4F8B"/>
-          </a:solidFill>
-          <a:ln>
-            <a:noFill/>
-          </a:ln>
-          <a:effectLst/>
-        </p:spPr>
-        <p:style>
-          <a:lnRef idx="1">
-            <a:schemeClr val="accent1"/>
-          </a:lnRef>
-          <a:fillRef idx="3">
-            <a:schemeClr val="accent1"/>
-          </a:fillRef>
-          <a:effectRef idx="2">
-            <a:schemeClr val="accent1"/>
-          </a:effectRef>
-          <a:fontRef idx="minor">
-            <a:schemeClr val="lt1"/>
-          </a:fontRef>
-        </p:style>
-        <p:txBody>
-          <a:bodyPr rtlCol="0" anchor="ctr"/>
-          <a:lstStyle/>
-          <a:p>
-            <a:pPr algn="ctr"/>
-          </a:p>
-        </p:txBody>
-      </p:sp>
-      <p:sp>
-        <p:nvSpPr>
-          <p:cNvPr id="12" name="TextBox 11"/>
-          <p:cNvSpPr txBox="1"/>
-          <p:nvPr/>
-        </p:nvSpPr>
-        <p:spPr>
-          <a:xfrm>
-            <a:off x="8586216" y="2697480"/>
-            <a:ext cx="2606040" cy="2194560"/>
-          </a:xfrm>
-          <a:prstGeom prst="rect">
-            <a:avLst/>
-          </a:prstGeom>
-          <a:noFill/>
-        </p:spPr>
-        <p:txBody>
-          <a:bodyPr wrap="square" anchor="t" lIns="0" rIns="0" tIns="0" bIns="0">
-            <a:spAutoFit/>
-          </a:bodyPr>
-          <a:lstStyle/>
-          <a:p>
-            <a:pPr algn="l">
-              <a:lnSpc>
-                <a:spcPct val="118000"/>
-              </a:lnSpc>
-              <a:spcAft>
-                <a:spcPts val="1200"/>
-              </a:spcAft>
-            </a:pPr>
-            <a:r>
-              <a:rPr sz="1900" b="1">
-                <a:solidFill>
-                  <a:srgbClr val="14181F"/>
-                </a:solidFill>
-                <a:latin typeface="Helvetica Neue"/>
-              </a:rPr>
-              <a:t>Nothing to buy</a:t>
-            </a:r>
-          </a:p>
-          <a:p>
-            <a:pPr algn="l">
-              <a:lnSpc>
-                <a:spcPct val="118000"/>
-              </a:lnSpc>
-              <a:spcAft>
-                <a:spcPts val="0"/>
-              </a:spcAft>
-            </a:pPr>
-            <a:r>
-              <a:rPr sz="1400" b="0">
-                <a:solidFill>
-                  <a:srgbClr val="55606E"/>
-                </a:solidFill>
-                <a:latin typeface="Helvetica Neue"/>
-              </a:rPr>
-              <a:t>No licences, no subscription, no servers to maintain. Setup is a Google folder and about 45 minutes.</a:t>
-            </a:r>
-          </a:p>
-        </p:txBody>
-      </p:sp>
-      <p:sp>
-        <p:nvSpPr>
-          <p:cNvPr id="13" name="TextBox 12"/>
-          <p:cNvSpPr txBox="1"/>
-          <p:nvPr/>
-        </p:nvSpPr>
-        <p:spPr>
-          <a:xfrm>
-            <a:off x="10972800" y="6355080"/>
-            <a:ext cx="548640" cy="274320"/>
-          </a:xfrm>
-          <a:prstGeom prst="rect">
-            <a:avLst/>
-          </a:prstGeom>
-          <a:noFill/>
-        </p:spPr>
-        <p:txBody>
-          <a:bodyPr wrap="square" anchor="t" lIns="0" rIns="0" tIns="0" bIns="0">
-            <a:spAutoFit/>
-          </a:bodyPr>
-          <a:lstStyle/>
-          <a:p>
-            <a:pPr algn="r">
-              <a:lnSpc>
-                <a:spcPct val="118000"/>
-              </a:lnSpc>
-              <a:spcAft>
-                <a:spcPts val="0"/>
-              </a:spcAft>
-            </a:pPr>
-            <a:r>
-              <a:rPr sz="1000" b="0">
+              <a:rPr sz="1100" b="0">
                 <a:solidFill>
                   <a:srgbClr val="8A939F"/>
                 </a:solidFill>
-                <a:latin typeface="Helvetica Neue"/>
+                <a:latin typeface="Calibri"/>
               </a:rPr>
               <a:t>3</a:t>
             </a:r>
@@ -9177,8 +9231,8 @@
         </p:nvSpPr>
         <p:spPr>
           <a:xfrm>
-            <a:off x="777240" y="566928"/>
-            <a:ext cx="8229600" cy="274320"/>
+            <a:off x="822960" y="502920"/>
+            <a:ext cx="8229600" cy="292608"/>
           </a:xfrm>
           <a:prstGeom prst="rect">
             <a:avLst/>
@@ -9187,26 +9241,26 @@
         </p:spPr>
         <p:txBody>
           <a:bodyPr wrap="square" anchor="t" lIns="0" rIns="0" tIns="0" bIns="0">
-            <a:spAutoFit/>
+            <a:noAutofit/>
           </a:bodyPr>
           <a:lstStyle/>
           <a:p>
             <a:pPr algn="l">
               <a:lnSpc>
-                <a:spcPct val="118000"/>
+                <a:spcPct val="122000"/>
               </a:lnSpc>
               <a:spcAft>
                 <a:spcPts val="0"/>
               </a:spcAft>
             </a:pPr>
             <a:r>
-              <a:rPr sz="1100" b="1">
+              <a:rPr sz="1200" b="1">
                 <a:solidFill>
                   <a:srgbClr val="1C4F8B"/>
                 </a:solidFill>
-                <a:latin typeface="Helvetica Neue"/>
-              </a:rPr>
-              <a:t>DATA OWNERSHIP</a:t>
+                <a:latin typeface="Calibri"/>
+              </a:rPr>
+              <a:t>WHERE THE DATA LIVES</a:t>
             </a:r>
           </a:p>
         </p:txBody>
@@ -9219,8 +9273,8 @@
         </p:nvSpPr>
         <p:spPr>
           <a:xfrm>
-            <a:off x="777240" y="914400"/>
-            <a:ext cx="10607040" cy="914400"/>
+            <a:off x="822960" y="896112"/>
+            <a:ext cx="10545775" cy="960120"/>
           </a:xfrm>
           <a:prstGeom prst="rect">
             <a:avLst/>
@@ -9229,13 +9283,13 @@
         </p:spPr>
         <p:txBody>
           <a:bodyPr wrap="square" anchor="t" lIns="0" rIns="0" tIns="0" bIns="0">
-            <a:spAutoFit/>
+            <a:noAutofit/>
           </a:bodyPr>
           <a:lstStyle/>
           <a:p>
             <a:pPr algn="l">
               <a:lnSpc>
-                <a:spcPct val="118000"/>
+                <a:spcPct val="122000"/>
               </a:lnSpc>
               <a:spcAft>
                 <a:spcPts val="0"/>
@@ -9246,7 +9300,7 @@
                 <a:solidFill>
                   <a:srgbClr val="14181F"/>
                 </a:solidFill>
-                <a:latin typeface="Helvetica Neue"/>
+                <a:latin typeface="Calibri"/>
               </a:rPr>
               <a:t>Your folder is the database</a:t>
             </a:r>
@@ -9261,8 +9315,8 @@
         </p:nvSpPr>
         <p:spPr>
           <a:xfrm>
-            <a:off x="777240" y="1691640"/>
-            <a:ext cx="9692640" cy="548640"/>
+            <a:off x="822960" y="1783080"/>
+            <a:ext cx="9966960" cy="566928"/>
           </a:xfrm>
           <a:prstGeom prst="rect">
             <a:avLst/>
@@ -9271,13 +9325,13 @@
         </p:spPr>
         <p:txBody>
           <a:bodyPr wrap="square" anchor="t" lIns="0" rIns="0" tIns="0" bIns="0">
-            <a:spAutoFit/>
+            <a:noAutofit/>
           </a:bodyPr>
           <a:lstStyle/>
           <a:p>
             <a:pPr algn="l">
               <a:lnSpc>
-                <a:spcPct val="118000"/>
+                <a:spcPct val="122000"/>
               </a:lnSpc>
               <a:spcAft>
                 <a:spcPts val="0"/>
@@ -9288,9 +9342,9 @@
                 <a:solidFill>
                   <a:srgbClr val="55606E"/>
                 </a:solidFill>
-                <a:latin typeface="Helvetica Neue"/>
-              </a:rPr>
-              <a:t>Each record is a plain JSON file you can open in Drive. Nothing is locked in a format only this app can read.</a:t>
+                <a:latin typeface="Calibri"/>
+              </a:rPr>
+              <a:t>Each record is a plain file you can open in Drive — nothing is locked in a format only this app can read.</a:t>
             </a:r>
           </a:p>
         </p:txBody>
@@ -9303,16 +9357,16 @@
         </p:nvSpPr>
         <p:spPr>
           <a:xfrm>
-            <a:off x="777240" y="2468880"/>
-            <a:ext cx="5669280" cy="3200400"/>
+            <a:off x="822960" y="2514600"/>
+            <a:ext cx="5486400" cy="3200400"/>
           </a:xfrm>
           <a:prstGeom prst="roundRect">
             <a:avLst>
-              <a:gd name="adj" fmla="val 4000"/>
+              <a:gd name="adj" fmla="val 3000"/>
             </a:avLst>
           </a:prstGeom>
           <a:solidFill>
-            <a:srgbClr val="EEF3FA"/>
+            <a:srgbClr val="ECF2FA"/>
           </a:solidFill>
           <a:ln>
             <a:noFill/>
@@ -9336,9 +9390,7 @@
         <p:txBody>
           <a:bodyPr rtlCol="0" anchor="ctr"/>
           <a:lstStyle/>
-          <a:p>
-            <a:pPr algn="ctr"/>
-          </a:p>
+          <a:p/>
         </p:txBody>
       </p:sp>
       <p:sp>
@@ -9349,8 +9401,8 @@
         </p:nvSpPr>
         <p:spPr>
           <a:xfrm>
-            <a:off x="1143000" y="2697480"/>
-            <a:ext cx="5120640" cy="2743200"/>
+            <a:off x="1143000" y="2743200"/>
+            <a:ext cx="4937760" cy="2743200"/>
           </a:xfrm>
           <a:prstGeom prst="rect">
             <a:avLst/>
@@ -9358,8 +9410,8 @@
           <a:noFill/>
         </p:spPr>
         <p:txBody>
-          <a:bodyPr wrap="none">
-            <a:spAutoFit/>
+          <a:bodyPr wrap="none" lIns="0" rIns="0" tIns="0" bIns="0">
+            <a:noAutofit/>
           </a:bodyPr>
           <a:lstStyle/>
           <a:p>
@@ -9369,11 +9421,11 @@
               </a:spcAft>
             </a:pPr>
             <a:r>
-              <a:rPr sz="1200">
+              <a:rPr sz="1100">
                 <a:solidFill>
                   <a:srgbClr val="1C4F8B"/>
                 </a:solidFill>
-                <a:latin typeface="Menlo"/>
+                <a:latin typeface="Courier New"/>
               </a:rPr>
               <a:t>TOP-Feedback/</a:t>
             </a:r>
@@ -9385,13 +9437,13 @@
               </a:spcAft>
             </a:pPr>
             <a:r>
-              <a:rPr sz="1200">
+              <a:rPr sz="1100">
                 <a:solidFill>
                   <a:srgbClr val="55606E"/>
                 </a:solidFill>
-                <a:latin typeface="Menlo"/>
-              </a:rPr>
-              <a:t>  config/      detachment profile and settings</a:t>
+                <a:latin typeface="Courier New"/>
+              </a:rPr>
+              <a:t>   config/      detachment profile and settings</a:t>
             </a:r>
           </a:p>
           <a:p>
@@ -9401,13 +9453,13 @@
               </a:spcAft>
             </a:pPr>
             <a:r>
-              <a:rPr sz="1200">
+              <a:rPr sz="1100">
                 <a:solidFill>
                   <a:srgbClr val="55606E"/>
                 </a:solidFill>
-                <a:latin typeface="Menlo"/>
-              </a:rPr>
-              <a:t>  users/       accounts — cadets, instructors, admins</a:t>
+                <a:latin typeface="Courier New"/>
+              </a:rPr>
+              <a:t>   users/       accounts: cadets, instructors, admins</a:t>
             </a:r>
           </a:p>
           <a:p>
@@ -9417,13 +9469,13 @@
               </a:spcAft>
             </a:pPr>
             <a:r>
-              <a:rPr sz="1200">
+              <a:rPr sz="1100">
                 <a:solidFill>
                   <a:srgbClr val="55606E"/>
                 </a:solidFill>
-                <a:latin typeface="Menlo"/>
-              </a:rPr>
-              <a:t>  forms/       feedback form definitions</a:t>
+                <a:latin typeface="Courier New"/>
+              </a:rPr>
+              <a:t>   forms/       feedback form definitions</a:t>
             </a:r>
           </a:p>
           <a:p>
@@ -9433,13 +9485,13 @@
               </a:spcAft>
             </a:pPr>
             <a:r>
-              <a:rPr sz="1200">
+              <a:rPr sz="1100">
                 <a:solidFill>
                   <a:srgbClr val="55606E"/>
                 </a:solidFill>
-                <a:latin typeface="Menlo"/>
-              </a:rPr>
-              <a:t>  requests/    feedback issued, each with an ID</a:t>
+                <a:latin typeface="Courier New"/>
+              </a:rPr>
+              <a:t>   requests/    feedback issued, each with an ID</a:t>
             </a:r>
           </a:p>
           <a:p>
@@ -9449,13 +9501,13 @@
               </a:spcAft>
             </a:pPr>
             <a:r>
-              <a:rPr sz="1200">
+              <a:rPr sz="1100">
                 <a:solidFill>
                   <a:srgbClr val="55606E"/>
                 </a:solidFill>
-                <a:latin typeface="Menlo"/>
-              </a:rPr>
-              <a:t>  responses/   submitted feedback</a:t>
+                <a:latin typeface="Courier New"/>
+              </a:rPr>
+              <a:t>   responses/   submitted feedback</a:t>
             </a:r>
           </a:p>
           <a:p>
@@ -9465,13 +9517,13 @@
               </a:spcAft>
             </a:pPr>
             <a:r>
-              <a:rPr sz="1200">
+              <a:rPr sz="1100">
                 <a:solidFill>
                   <a:srgbClr val="55606E"/>
                 </a:solidFill>
-                <a:latin typeface="Menlo"/>
-              </a:rPr>
-              <a:t>  receipts/    who submitted — kept apart from</a:t>
+                <a:latin typeface="Courier New"/>
+              </a:rPr>
+              <a:t>   receipts/    who submitted, kept apart from</a:t>
             </a:r>
           </a:p>
           <a:p>
@@ -9481,13 +9533,13 @@
               </a:spcAft>
             </a:pPr>
             <a:r>
-              <a:rPr sz="1200">
+              <a:rPr sz="1100">
                 <a:solidFill>
                   <a:srgbClr val="55606E"/>
                 </a:solidFill>
-                <a:latin typeface="Menlo"/>
-              </a:rPr>
-              <a:t>               what they said</a:t>
+                <a:latin typeface="Courier New"/>
+              </a:rPr>
+              <a:t>                what they said</a:t>
             </a:r>
           </a:p>
           <a:p>
@@ -9497,13 +9549,13 @@
               </a:spcAft>
             </a:pPr>
             <a:r>
-              <a:rPr sz="1200">
+              <a:rPr sz="1100">
                 <a:solidFill>
                   <a:srgbClr val="55606E"/>
                 </a:solidFill>
-                <a:latin typeface="Menlo"/>
-              </a:rPr>
-              <a:t>  reports/     exported reports</a:t>
+                <a:latin typeface="Courier New"/>
+              </a:rPr>
+              <a:t>   reports/     exported reports</a:t>
             </a:r>
           </a:p>
         </p:txBody>
@@ -9516,8 +9568,8 @@
         </p:nvSpPr>
         <p:spPr>
           <a:xfrm>
-            <a:off x="6858000" y="2606040"/>
-            <a:ext cx="4572000" cy="3657600"/>
+            <a:off x="6766560" y="2606040"/>
+            <a:ext cx="4572000" cy="3108960"/>
           </a:xfrm>
           <a:prstGeom prst="rect">
             <a:avLst/>
@@ -9525,14 +9577,14 @@
           <a:noFill/>
         </p:spPr>
         <p:txBody>
-          <a:bodyPr wrap="square" lIns="0" rIns="0" tIns="0" bIns="0">
-            <a:spAutoFit/>
+          <a:bodyPr wrap="square" anchor="t" lIns="0" rIns="0" tIns="0" bIns="0">
+            <a:noAutofit/>
           </a:bodyPr>
           <a:lstStyle/>
           <a:p>
-            <a:pPr>
-              <a:lnSpc>
-                <a:spcPct val="125000"/>
+            <a:pPr algn="l">
+              <a:lnSpc>
+                <a:spcPct val="122000"/>
               </a:lnSpc>
               <a:spcAft>
                 <a:spcPts val="1600"/>
@@ -9543,34 +9595,34 @@
                 <a:solidFill>
                   <a:srgbClr val="14181F"/>
                 </a:solidFill>
-                <a:latin typeface="Helvetica Neue"/>
-              </a:rPr>
-              <a:t>If you stop using this app, you still have every response.</a:t>
-            </a:r>
-          </a:p>
-          <a:p>
-            <a:pPr lvl="1">
-              <a:lnSpc>
-                <a:spcPct val="125000"/>
-              </a:lnSpc>
-              <a:spcAft>
-                <a:spcPts val="1200"/>
-              </a:spcAft>
-            </a:pPr>
-            <a:r>
-              <a:rPr sz="1400" b="0">
+                <a:latin typeface="Calibri"/>
+              </a:rPr>
+              <a:t>Stop using the app and you still have every response.</a:t>
+            </a:r>
+          </a:p>
+          <a:p>
+            <a:pPr algn="l">
+              <a:lnSpc>
+                <a:spcPct val="122000"/>
+              </a:lnSpc>
+              <a:spcAft>
+                <a:spcPts val="1100"/>
+              </a:spcAft>
+            </a:pPr>
+            <a:r>
+              <a:rPr sz="1300" b="0">
                 <a:solidFill>
                   <a:srgbClr val="55606E"/>
                 </a:solidFill>
-                <a:latin typeface="Helvetica Neue"/>
-              </a:rPr>
-              <a:t>—  Readable in Drive, backed up by Google, recoverable from the trash for 30 days.</a:t>
-            </a:r>
-          </a:p>
-          <a:p>
-            <a:pPr>
-              <a:lnSpc>
-                <a:spcPct val="125000"/>
+                <a:latin typeface="Calibri"/>
+              </a:rPr>
+              <a:t>   Readable in Drive, backed up by Google, recoverable from the trash for 30 days.</a:t>
+            </a:r>
+          </a:p>
+          <a:p>
+            <a:pPr algn="l">
+              <a:lnSpc>
+                <a:spcPct val="122000"/>
               </a:lnSpc>
               <a:spcAft>
                 <a:spcPts val="1600"/>
@@ -9581,28 +9633,28 @@
                 <a:solidFill>
                   <a:srgbClr val="14181F"/>
                 </a:solidFill>
-                <a:latin typeface="Helvetica Neue"/>
-              </a:rPr>
-              <a:t>Access is controlled by folder sharing.</a:t>
-            </a:r>
-          </a:p>
-          <a:p>
-            <a:pPr lvl="1">
-              <a:lnSpc>
-                <a:spcPct val="125000"/>
-              </a:lnSpc>
-              <a:spcAft>
-                <a:spcPts val="1200"/>
-              </a:spcAft>
-            </a:pPr>
-            <a:r>
-              <a:rPr sz="1400" b="0">
+                <a:latin typeface="Calibri"/>
+              </a:rPr>
+              <a:t>Who can read the feedback is a Drive sharing setting.</a:t>
+            </a:r>
+          </a:p>
+          <a:p>
+            <a:pPr algn="l">
+              <a:lnSpc>
+                <a:spcPct val="122000"/>
+              </a:lnSpc>
+              <a:spcAft>
+                <a:spcPts val="1100"/>
+              </a:spcAft>
+            </a:pPr>
+            <a:r>
+              <a:rPr sz="1300" b="0">
                 <a:solidFill>
                   <a:srgbClr val="55606E"/>
                 </a:solidFill>
-                <a:latin typeface="Helvetica Neue"/>
-              </a:rPr>
-              <a:t>—  Who can read the feedback is a Drive permission, not a setting in this app.</a:t>
+                <a:latin typeface="Calibri"/>
+              </a:rPr>
+              <a:t>   Not a setting inside this app. That is the access control that actually matters.</a:t>
             </a:r>
           </a:p>
         </p:txBody>
@@ -9615,8 +9667,8 @@
         </p:nvSpPr>
         <p:spPr>
           <a:xfrm>
-            <a:off x="10972800" y="6355080"/>
-            <a:ext cx="548640" cy="274320"/>
+            <a:off x="10881360" y="6327648"/>
+            <a:ext cx="502920" cy="274320"/>
           </a:xfrm>
           <a:prstGeom prst="rect">
             <a:avLst/>
@@ -9625,24 +9677,24 @@
         </p:spPr>
         <p:txBody>
           <a:bodyPr wrap="square" anchor="t" lIns="0" rIns="0" tIns="0" bIns="0">
-            <a:spAutoFit/>
+            <a:noAutofit/>
           </a:bodyPr>
           <a:lstStyle/>
           <a:p>
             <a:pPr algn="r">
               <a:lnSpc>
-                <a:spcPct val="118000"/>
+                <a:spcPct val="122000"/>
               </a:lnSpc>
               <a:spcAft>
                 <a:spcPts val="0"/>
               </a:spcAft>
             </a:pPr>
             <a:r>
-              <a:rPr sz="1000" b="0">
+              <a:rPr sz="1100" b="0">
                 <a:solidFill>
                   <a:srgbClr val="8A939F"/>
                 </a:solidFill>
-                <a:latin typeface="Helvetica Neue"/>
+                <a:latin typeface="Calibri"/>
               </a:rPr>
               <a:t>4</a:t>
             </a:r>
@@ -9675,8 +9727,8 @@
         </p:nvSpPr>
         <p:spPr>
           <a:xfrm>
-            <a:off x="777240" y="566928"/>
-            <a:ext cx="8229600" cy="274320"/>
+            <a:off x="822960" y="502920"/>
+            <a:ext cx="8229600" cy="292608"/>
           </a:xfrm>
           <a:prstGeom prst="rect">
             <a:avLst/>
@@ -9685,26 +9737,26 @@
         </p:spPr>
         <p:txBody>
           <a:bodyPr wrap="square" anchor="t" lIns="0" rIns="0" tIns="0" bIns="0">
-            <a:spAutoFit/>
+            <a:noAutofit/>
           </a:bodyPr>
           <a:lstStyle/>
           <a:p>
             <a:pPr algn="l">
               <a:lnSpc>
-                <a:spcPct val="118000"/>
+                <a:spcPct val="122000"/>
               </a:lnSpc>
               <a:spcAft>
                 <a:spcPts val="0"/>
               </a:spcAft>
             </a:pPr>
             <a:r>
-              <a:rPr sz="1100" b="1">
+              <a:rPr sz="1200" b="1">
                 <a:solidFill>
                   <a:srgbClr val="1C4F8B"/>
                 </a:solidFill>
-                <a:latin typeface="Helvetica Neue"/>
-              </a:rPr>
-              <a:t>THREE WAYS IN</a:t>
+                <a:latin typeface="Calibri"/>
+              </a:rPr>
+              <a:t>WHO USES IT</a:t>
             </a:r>
           </a:p>
         </p:txBody>
@@ -9717,8 +9769,8 @@
         </p:nvSpPr>
         <p:spPr>
           <a:xfrm>
-            <a:off x="777240" y="914400"/>
-            <a:ext cx="10607040" cy="914400"/>
+            <a:off x="822960" y="896112"/>
+            <a:ext cx="10545775" cy="960120"/>
           </a:xfrm>
           <a:prstGeom prst="rect">
             <a:avLst/>
@@ -9727,13 +9779,13 @@
         </p:spPr>
         <p:txBody>
           <a:bodyPr wrap="square" anchor="t" lIns="0" rIns="0" tIns="0" bIns="0">
-            <a:spAutoFit/>
+            <a:noAutofit/>
           </a:bodyPr>
           <a:lstStyle/>
           <a:p>
             <a:pPr algn="l">
               <a:lnSpc>
-                <a:spcPct val="118000"/>
+                <a:spcPct val="122000"/>
               </a:lnSpc>
               <a:spcAft>
                 <a:spcPts val="0"/>
@@ -9744,7 +9796,7 @@
                 <a:solidFill>
                   <a:srgbClr val="14181F"/>
                 </a:solidFill>
-                <a:latin typeface="Helvetica Neue"/>
+                <a:latin typeface="Calibri"/>
               </a:rPr>
               <a:t>One app, three doors</a:t>
             </a:r>
@@ -9759,8 +9811,8 @@
         </p:nvSpPr>
         <p:spPr>
           <a:xfrm>
-            <a:off x="1202564" y="2047875"/>
-            <a:ext cx="5184392" cy="3768089"/>
+            <a:off x="1171067" y="2002155"/>
+            <a:ext cx="5247386" cy="3813809"/>
           </a:xfrm>
           <a:prstGeom prst="rect">
             <a:avLst/>
@@ -9770,7 +9822,7 @@
           </a:solidFill>
           <a:ln w="12700">
             <a:solidFill>
-              <a:srgbClr val="D8DEE8"/>
+              <a:srgbClr val="D3DCE8"/>
             </a:solidFill>
           </a:ln>
           <a:effectLst/>
@@ -9792,9 +9844,7 @@
         <p:txBody>
           <a:bodyPr rtlCol="0" anchor="ctr"/>
           <a:lstStyle/>
-          <a:p>
-            <a:pPr algn="ctr"/>
-          </a:p>
+          <a:p/>
         </p:txBody>
       </p:sp>
       <p:pic>
@@ -9813,8 +9863,8 @@
         </p:blipFill>
         <p:spPr>
           <a:xfrm>
-            <a:off x="1212089" y="2057400"/>
-            <a:ext cx="5165342" cy="3749039"/>
+            <a:off x="1180592" y="2011680"/>
+            <a:ext cx="5228336" cy="3794759"/>
           </a:xfrm>
           <a:prstGeom prst="rect">
             <a:avLst/>
@@ -9829,8 +9879,8 @@
         </p:nvSpPr>
         <p:spPr>
           <a:xfrm>
-            <a:off x="7315200" y="2286000"/>
-            <a:ext cx="4114800" cy="3657600"/>
+            <a:off x="7223760" y="2240280"/>
+            <a:ext cx="4206240" cy="3566160"/>
           </a:xfrm>
           <a:prstGeom prst="rect">
             <a:avLst/>
@@ -9838,14 +9888,14 @@
           <a:noFill/>
         </p:spPr>
         <p:txBody>
-          <a:bodyPr wrap="square" lIns="0" rIns="0" tIns="0" bIns="0">
-            <a:spAutoFit/>
+          <a:bodyPr wrap="square" anchor="t" lIns="0" rIns="0" tIns="0" bIns="0">
+            <a:noAutofit/>
           </a:bodyPr>
           <a:lstStyle/>
           <a:p>
-            <a:pPr>
-              <a:lnSpc>
-                <a:spcPct val="125000"/>
+            <a:pPr algn="l">
+              <a:lnSpc>
+                <a:spcPct val="122000"/>
               </a:lnSpc>
               <a:spcAft>
                 <a:spcPts val="1300"/>
@@ -9856,34 +9906,34 @@
                 <a:solidFill>
                   <a:srgbClr val="14181F"/>
                 </a:solidFill>
-                <a:latin typeface="Helvetica Neue"/>
+                <a:latin typeface="Calibri"/>
               </a:rPr>
               <a:t>Student</a:t>
             </a:r>
           </a:p>
           <a:p>
-            <a:pPr lvl="1">
-              <a:lnSpc>
-                <a:spcPct val="125000"/>
-              </a:lnSpc>
-              <a:spcAft>
-                <a:spcPts val="900"/>
-              </a:spcAft>
-            </a:pPr>
-            <a:r>
-              <a:rPr sz="1400" b="0">
+            <a:pPr algn="l">
+              <a:lnSpc>
+                <a:spcPct val="122000"/>
+              </a:lnSpc>
+              <a:spcAft>
+                <a:spcPts val="800"/>
+              </a:spcAft>
+            </a:pPr>
+            <a:r>
+              <a:rPr sz="1300" b="0">
                 <a:solidFill>
                   <a:srgbClr val="55606E"/>
                 </a:solidFill>
-                <a:latin typeface="Helvetica Neue"/>
-              </a:rPr>
-              <a:t>—  Signs in, sees only the feedback assigned to them, submits it once.</a:t>
-            </a:r>
-          </a:p>
-          <a:p>
-            <a:pPr>
-              <a:lnSpc>
-                <a:spcPct val="125000"/>
+                <a:latin typeface="Calibri"/>
+              </a:rPr>
+              <a:t>   Signs in, sees only the feedback assigned to them, submits it once.</a:t>
+            </a:r>
+          </a:p>
+          <a:p>
+            <a:pPr algn="l">
+              <a:lnSpc>
+                <a:spcPct val="122000"/>
               </a:lnSpc>
               <a:spcAft>
                 <a:spcPts val="1300"/>
@@ -9894,34 +9944,34 @@
                 <a:solidFill>
                   <a:srgbClr val="14181F"/>
                 </a:solidFill>
-                <a:latin typeface="Helvetica Neue"/>
+                <a:latin typeface="Calibri"/>
               </a:rPr>
               <a:t>Instructor Portal</a:t>
             </a:r>
           </a:p>
           <a:p>
-            <a:pPr lvl="1">
-              <a:lnSpc>
-                <a:spcPct val="125000"/>
-              </a:lnSpc>
-              <a:spcAft>
-                <a:spcPts val="900"/>
-              </a:spcAft>
-            </a:pPr>
-            <a:r>
-              <a:rPr sz="1400" b="0">
+            <a:pPr algn="l">
+              <a:lnSpc>
+                <a:spcPct val="122000"/>
+              </a:lnSpc>
+              <a:spcAft>
+                <a:spcPts val="800"/>
+              </a:spcAft>
+            </a:pPr>
+            <a:r>
+              <a:rPr sz="1300" b="0">
                 <a:solidFill>
                   <a:srgbClr val="55606E"/>
                 </a:solidFill>
-                <a:latin typeface="Helvetica Neue"/>
-              </a:rPr>
-              <a:t>—  Creates feedback, reads responses, runs the analysis.</a:t>
-            </a:r>
-          </a:p>
-          <a:p>
-            <a:pPr>
-              <a:lnSpc>
-                <a:spcPct val="125000"/>
+                <a:latin typeface="Calibri"/>
+              </a:rPr>
+              <a:t>   Creates feedback, reads responses, runs the analysis.</a:t>
+            </a:r>
+          </a:p>
+          <a:p>
+            <a:pPr algn="l">
+              <a:lnSpc>
+                <a:spcPct val="122000"/>
               </a:lnSpc>
               <a:spcAft>
                 <a:spcPts val="1300"/>
@@ -9932,28 +9982,28 @@
                 <a:solidFill>
                   <a:srgbClr val="14181F"/>
                 </a:solidFill>
-                <a:latin typeface="Helvetica Neue"/>
+                <a:latin typeface="Calibri"/>
               </a:rPr>
               <a:t>Database Administration</a:t>
             </a:r>
           </a:p>
           <a:p>
-            <a:pPr lvl="1">
-              <a:lnSpc>
-                <a:spcPct val="125000"/>
-              </a:lnSpc>
-              <a:spcAft>
-                <a:spcPts val="900"/>
-              </a:spcAft>
-            </a:pPr>
-            <a:r>
-              <a:rPr sz="1400" b="0">
+            <a:pPr algn="l">
+              <a:lnSpc>
+                <a:spcPct val="122000"/>
+              </a:lnSpc>
+              <a:spcAft>
+                <a:spcPts val="800"/>
+              </a:spcAft>
+            </a:pPr>
+            <a:r>
+              <a:rPr sz="1300" b="0">
                 <a:solidFill>
                   <a:srgbClr val="55606E"/>
                 </a:solidFill>
-                <a:latin typeface="Helvetica Neue"/>
-              </a:rPr>
-              <a:t>—  Creates accounts and resets passwords.</a:t>
+                <a:latin typeface="Calibri"/>
+              </a:rPr>
+              <a:t>   Creates accounts and resets passwords.</a:t>
             </a:r>
           </a:p>
         </p:txBody>
@@ -9966,8 +10016,8 @@
         </p:nvSpPr>
         <p:spPr>
           <a:xfrm>
-            <a:off x="10972800" y="6355080"/>
-            <a:ext cx="548640" cy="274320"/>
+            <a:off x="10881360" y="6327648"/>
+            <a:ext cx="502920" cy="274320"/>
           </a:xfrm>
           <a:prstGeom prst="rect">
             <a:avLst/>
@@ -9976,24 +10026,24 @@
         </p:spPr>
         <p:txBody>
           <a:bodyPr wrap="square" anchor="t" lIns="0" rIns="0" tIns="0" bIns="0">
-            <a:spAutoFit/>
+            <a:noAutofit/>
           </a:bodyPr>
           <a:lstStyle/>
           <a:p>
             <a:pPr algn="r">
               <a:lnSpc>
-                <a:spcPct val="118000"/>
+                <a:spcPct val="122000"/>
               </a:lnSpc>
               <a:spcAft>
                 <a:spcPts val="0"/>
               </a:spcAft>
             </a:pPr>
             <a:r>
-              <a:rPr sz="1000" b="0">
+              <a:rPr sz="1100" b="0">
                 <a:solidFill>
                   <a:srgbClr val="8A939F"/>
                 </a:solidFill>
-                <a:latin typeface="Helvetica Neue"/>
+                <a:latin typeface="Calibri"/>
               </a:rPr>
               <a:t>5</a:t>
             </a:r>
@@ -10026,8 +10076,8 @@
         </p:nvSpPr>
         <p:spPr>
           <a:xfrm>
-            <a:off x="777240" y="566928"/>
-            <a:ext cx="8229600" cy="274320"/>
+            <a:off x="822960" y="502920"/>
+            <a:ext cx="8229600" cy="292608"/>
           </a:xfrm>
           <a:prstGeom prst="rect">
             <a:avLst/>
@@ -10036,24 +10086,24 @@
         </p:spPr>
         <p:txBody>
           <a:bodyPr wrap="square" anchor="t" lIns="0" rIns="0" tIns="0" bIns="0">
-            <a:spAutoFit/>
+            <a:noAutofit/>
           </a:bodyPr>
           <a:lstStyle/>
           <a:p>
             <a:pPr algn="l">
               <a:lnSpc>
-                <a:spcPct val="118000"/>
+                <a:spcPct val="122000"/>
               </a:lnSpc>
               <a:spcAft>
                 <a:spcPts val="0"/>
               </a:spcAft>
             </a:pPr>
             <a:r>
-              <a:rPr sz="1100" b="1">
+              <a:rPr sz="1200" b="1">
                 <a:solidFill>
                   <a:srgbClr val="1C4F8B"/>
                 </a:solidFill>
-                <a:latin typeface="Helvetica Neue"/>
+                <a:latin typeface="Calibri"/>
               </a:rPr>
               <a:t>FOR CADETS</a:t>
             </a:r>
@@ -10068,8 +10118,8 @@
         </p:nvSpPr>
         <p:spPr>
           <a:xfrm>
-            <a:off x="777240" y="914400"/>
-            <a:ext cx="10607040" cy="914400"/>
+            <a:off x="822960" y="896112"/>
+            <a:ext cx="10545775" cy="960120"/>
           </a:xfrm>
           <a:prstGeom prst="rect">
             <a:avLst/>
@@ -10078,13 +10128,13 @@
         </p:spPr>
         <p:txBody>
           <a:bodyPr wrap="square" anchor="t" lIns="0" rIns="0" tIns="0" bIns="0">
-            <a:spAutoFit/>
+            <a:noAutofit/>
           </a:bodyPr>
           <a:lstStyle/>
           <a:p>
             <a:pPr algn="l">
               <a:lnSpc>
-                <a:spcPct val="118000"/>
+                <a:spcPct val="122000"/>
               </a:lnSpc>
               <a:spcAft>
                 <a:spcPts val="0"/>
@@ -10095,7 +10145,7 @@
                 <a:solidFill>
                   <a:srgbClr val="14181F"/>
                 </a:solidFill>
-                <a:latin typeface="Helvetica Neue"/>
+                <a:latin typeface="Calibri"/>
               </a:rPr>
               <a:t>Only what is assigned to you</a:t>
             </a:r>
@@ -10110,8 +10160,8 @@
         </p:nvSpPr>
         <p:spPr>
           <a:xfrm>
-            <a:off x="777240" y="1691640"/>
-            <a:ext cx="9692640" cy="548640"/>
+            <a:off x="822960" y="1783080"/>
+            <a:ext cx="9966960" cy="566928"/>
           </a:xfrm>
           <a:prstGeom prst="rect">
             <a:avLst/>
@@ -10120,13 +10170,13 @@
         </p:spPr>
         <p:txBody>
           <a:bodyPr wrap="square" anchor="t" lIns="0" rIns="0" tIns="0" bIns="0">
-            <a:spAutoFit/>
+            <a:noAutofit/>
           </a:bodyPr>
           <a:lstStyle/>
           <a:p>
             <a:pPr algn="l">
               <a:lnSpc>
-                <a:spcPct val="118000"/>
+                <a:spcPct val="122000"/>
               </a:lnSpc>
               <a:spcAft>
                 <a:spcPts val="0"/>
@@ -10137,9 +10187,9 @@
                 <a:solidFill>
                   <a:srgbClr val="55606E"/>
                 </a:solidFill>
-                <a:latin typeface="Helvetica Neue"/>
-              </a:rPr>
-              <a:t>Filtered by school year, semester, class and due date. Completed feedback drops off the list.</a:t>
+                <a:latin typeface="Calibri"/>
+              </a:rPr>
+              <a:t>Filtered by school year, semester, class and due date. Anything already submitted drops off the list.</a:t>
             </a:r>
           </a:p>
         </p:txBody>
@@ -10152,8 +10202,8 @@
         </p:nvSpPr>
         <p:spPr>
           <a:xfrm>
-            <a:off x="3551555" y="2367915"/>
-            <a:ext cx="5058410" cy="3676650"/>
+            <a:off x="3646043" y="2505075"/>
+            <a:ext cx="4869434" cy="3539490"/>
           </a:xfrm>
           <a:prstGeom prst="rect">
             <a:avLst/>
@@ -10163,7 +10213,7 @@
           </a:solidFill>
           <a:ln w="12700">
             <a:solidFill>
-              <a:srgbClr val="D8DEE8"/>
+              <a:srgbClr val="D3DCE8"/>
             </a:solidFill>
           </a:ln>
           <a:effectLst/>
@@ -10185,9 +10235,7 @@
         <p:txBody>
           <a:bodyPr rtlCol="0" anchor="ctr"/>
           <a:lstStyle/>
-          <a:p>
-            <a:pPr algn="ctr"/>
-          </a:p>
+          <a:p/>
         </p:txBody>
       </p:sp>
       <p:pic>
@@ -10206,8 +10254,8 @@
         </p:blipFill>
         <p:spPr>
           <a:xfrm>
-            <a:off x="3561080" y="2377440"/>
-            <a:ext cx="5039360" cy="3657600"/>
+            <a:off x="3655568" y="2514600"/>
+            <a:ext cx="4850384" cy="3520440"/>
           </a:xfrm>
           <a:prstGeom prst="rect">
             <a:avLst/>
@@ -10222,8 +10270,8 @@
         </p:nvSpPr>
         <p:spPr>
           <a:xfrm>
-            <a:off x="10972800" y="6355080"/>
-            <a:ext cx="548640" cy="274320"/>
+            <a:off x="10881360" y="6327648"/>
+            <a:ext cx="502920" cy="274320"/>
           </a:xfrm>
           <a:prstGeom prst="rect">
             <a:avLst/>
@@ -10232,24 +10280,24 @@
         </p:spPr>
         <p:txBody>
           <a:bodyPr wrap="square" anchor="t" lIns="0" rIns="0" tIns="0" bIns="0">
-            <a:spAutoFit/>
+            <a:noAutofit/>
           </a:bodyPr>
           <a:lstStyle/>
           <a:p>
             <a:pPr algn="r">
               <a:lnSpc>
-                <a:spcPct val="118000"/>
+                <a:spcPct val="122000"/>
               </a:lnSpc>
               <a:spcAft>
                 <a:spcPts val="0"/>
               </a:spcAft>
             </a:pPr>
             <a:r>
-              <a:rPr sz="1000" b="0">
+              <a:rPr sz="1100" b="0">
                 <a:solidFill>
                   <a:srgbClr val="8A939F"/>
                 </a:solidFill>
-                <a:latin typeface="Helvetica Neue"/>
+                <a:latin typeface="Calibri"/>
               </a:rPr>
               <a:t>6</a:t>
             </a:r>
@@ -10282,8 +10330,8 @@
         </p:nvSpPr>
         <p:spPr>
           <a:xfrm>
-            <a:off x="777240" y="566928"/>
-            <a:ext cx="8229600" cy="274320"/>
+            <a:off x="822960" y="502920"/>
+            <a:ext cx="8229600" cy="292608"/>
           </a:xfrm>
           <a:prstGeom prst="rect">
             <a:avLst/>
@@ -10292,26 +10340,26 @@
         </p:spPr>
         <p:txBody>
           <a:bodyPr wrap="square" anchor="t" lIns="0" rIns="0" tIns="0" bIns="0">
-            <a:spAutoFit/>
+            <a:noAutofit/>
           </a:bodyPr>
           <a:lstStyle/>
           <a:p>
             <a:pPr algn="l">
               <a:lnSpc>
-                <a:spcPct val="118000"/>
+                <a:spcPct val="122000"/>
               </a:lnSpc>
               <a:spcAft>
                 <a:spcPts val="0"/>
               </a:spcAft>
             </a:pPr>
             <a:r>
-              <a:rPr sz="1100" b="1">
+              <a:rPr sz="1200" b="1">
                 <a:solidFill>
                   <a:srgbClr val="1C4F8B"/>
                 </a:solidFill>
-                <a:latin typeface="Helvetica Neue"/>
-              </a:rPr>
-              <a:t>THE RATING SCALE</a:t>
+                <a:latin typeface="Calibri"/>
+              </a:rPr>
+              <a:t>ANSWERING</a:t>
             </a:r>
           </a:p>
         </p:txBody>
@@ -10324,8 +10372,8 @@
         </p:nvSpPr>
         <p:spPr>
           <a:xfrm>
-            <a:off x="777240" y="914400"/>
-            <a:ext cx="10607040" cy="914400"/>
+            <a:off x="822960" y="896112"/>
+            <a:ext cx="10545775" cy="960120"/>
           </a:xfrm>
           <a:prstGeom prst="rect">
             <a:avLst/>
@@ -10334,24 +10382,24 @@
         </p:spPr>
         <p:txBody>
           <a:bodyPr wrap="square" anchor="t" lIns="0" rIns="0" tIns="0" bIns="0">
-            <a:spAutoFit/>
+            <a:noAutofit/>
           </a:bodyPr>
           <a:lstStyle/>
           <a:p>
             <a:pPr algn="l">
               <a:lnSpc>
-                <a:spcPct val="118000"/>
+                <a:spcPct val="122000"/>
               </a:lnSpc>
               <a:spcAft>
                 <a:spcPts val="0"/>
               </a:spcAft>
             </a:pPr>
             <a:r>
-              <a:rPr sz="3400" b="1">
+              <a:rPr sz="3000" b="1">
                 <a:solidFill>
                   <a:srgbClr val="14181F"/>
                 </a:solidFill>
-                <a:latin typeface="Helvetica Neue"/>
+                <a:latin typeface="Calibri"/>
               </a:rPr>
               <a:t>Cadets choose a word. The maths runs on the number.</a:t>
             </a:r>
@@ -10366,7 +10414,7 @@
         </p:nvSpPr>
         <p:spPr>
           <a:xfrm>
-            <a:off x="2161264" y="2139315"/>
+            <a:off x="2115544" y="2139315"/>
             <a:ext cx="3907072" cy="3950970"/>
           </a:xfrm>
           <a:prstGeom prst="rect">
@@ -10377,7 +10425,7 @@
           </a:solidFill>
           <a:ln w="12700">
             <a:solidFill>
-              <a:srgbClr val="D8DEE8"/>
+              <a:srgbClr val="D3DCE8"/>
             </a:solidFill>
           </a:ln>
           <a:effectLst/>
@@ -10399,9 +10447,7 @@
         <p:txBody>
           <a:bodyPr rtlCol="0" anchor="ctr"/>
           <a:lstStyle/>
-          <a:p>
-            <a:pPr algn="ctr"/>
-          </a:p>
+          <a:p/>
         </p:txBody>
       </p:sp>
       <p:pic>
@@ -10420,7 +10466,7 @@
         </p:blipFill>
         <p:spPr>
           <a:xfrm>
-            <a:off x="2170789" y="2148840"/>
+            <a:off x="2125069" y="2148840"/>
             <a:ext cx="3888022" cy="3931920"/>
           </a:xfrm>
           <a:prstGeom prst="rect">
@@ -10436,8 +10482,8 @@
         </p:nvSpPr>
         <p:spPr>
           <a:xfrm>
-            <a:off x="7863840" y="2377440"/>
-            <a:ext cx="3566160" cy="3657600"/>
+            <a:off x="7680960" y="2286000"/>
+            <a:ext cx="3749039" cy="3657600"/>
           </a:xfrm>
           <a:prstGeom prst="rect">
             <a:avLst/>
@@ -10445,17 +10491,17 @@
           <a:noFill/>
         </p:spPr>
         <p:txBody>
-          <a:bodyPr wrap="square" lIns="0" rIns="0" tIns="0" bIns="0">
-            <a:spAutoFit/>
+          <a:bodyPr wrap="square" anchor="t" lIns="0" rIns="0" tIns="0" bIns="0">
+            <a:noAutofit/>
           </a:bodyPr>
           <a:lstStyle/>
           <a:p>
-            <a:pPr>
-              <a:lnSpc>
-                <a:spcPct val="125000"/>
-              </a:lnSpc>
-              <a:spcAft>
-                <a:spcPts val="1200"/>
+            <a:pPr algn="l">
+              <a:lnSpc>
+                <a:spcPct val="122000"/>
+              </a:lnSpc>
+              <a:spcAft>
+                <a:spcPts val="1100"/>
               </a:spcAft>
             </a:pPr>
             <a:r>
@@ -10463,37 +10509,37 @@
                 <a:solidFill>
                   <a:srgbClr val="14181F"/>
                 </a:solidFill>
-                <a:latin typeface="Helvetica Neue"/>
-              </a:rPr>
-              <a:t>Nine points, every one named.</a:t>
-            </a:r>
-          </a:p>
-          <a:p>
-            <a:pPr lvl="1">
-              <a:lnSpc>
-                <a:spcPct val="125000"/>
-              </a:lnSpc>
-              <a:spcAft>
-                <a:spcPts val="800"/>
-              </a:spcAft>
-            </a:pPr>
-            <a:r>
-              <a:rPr sz="1300" b="0">
+                <a:latin typeface="Calibri"/>
+              </a:rPr>
+              <a:t>Nine ratings, every one named</a:t>
+            </a:r>
+          </a:p>
+          <a:p>
+            <a:pPr algn="l">
+              <a:lnSpc>
+                <a:spcPct val="122000"/>
+              </a:lnSpc>
+              <a:spcAft>
+                <a:spcPts val="600"/>
+              </a:spcAft>
+            </a:pPr>
+            <a:r>
+              <a:rPr sz="1200" b="0">
                 <a:solidFill>
                   <a:srgbClr val="55606E"/>
                 </a:solidFill>
-                <a:latin typeface="Helvetica Neue"/>
-              </a:rPr>
-              <a:t>—  Detrimental · Significant · Unfavorable · Minor · Neutral · Slight · Favorable · Major · Outstanding</a:t>
-            </a:r>
-          </a:p>
-          <a:p>
-            <a:pPr>
-              <a:lnSpc>
-                <a:spcPct val="125000"/>
-              </a:lnSpc>
-              <a:spcAft>
-                <a:spcPts val="1200"/>
+                <a:latin typeface="Calibri"/>
+              </a:rPr>
+              <a:t>   Detrimental, Significant, Unfavorable, Minor, Neutral, Slight, Favorable, Major, Outstanding.</a:t>
+            </a:r>
+          </a:p>
+          <a:p>
+            <a:pPr algn="l">
+              <a:lnSpc>
+                <a:spcPct val="122000"/>
+              </a:lnSpc>
+              <a:spcAft>
+                <a:spcPts val="1100"/>
               </a:spcAft>
             </a:pPr>
             <a:r>
@@ -10501,37 +10547,37 @@
                 <a:solidFill>
                   <a:srgbClr val="14181F"/>
                 </a:solidFill>
-                <a:latin typeface="Helvetica Neue"/>
-              </a:rPr>
-              <a:t>No numbers on screen.</a:t>
-            </a:r>
-          </a:p>
-          <a:p>
-            <a:pPr lvl="1">
-              <a:lnSpc>
-                <a:spcPct val="125000"/>
-              </a:lnSpc>
-              <a:spcAft>
-                <a:spcPts val="800"/>
-              </a:spcAft>
-            </a:pPr>
-            <a:r>
-              <a:rPr sz="1300" b="0">
+                <a:latin typeface="Calibri"/>
+              </a:rPr>
+              <a:t>No numbers on screen</a:t>
+            </a:r>
+          </a:p>
+          <a:p>
+            <a:pPr algn="l">
+              <a:lnSpc>
+                <a:spcPct val="122000"/>
+              </a:lnSpc>
+              <a:spcAft>
+                <a:spcPts val="600"/>
+              </a:spcAft>
+            </a:pPr>
+            <a:r>
+              <a:rPr sz="1200" b="0">
                 <a:solidFill>
                   <a:srgbClr val="55606E"/>
                 </a:solidFill>
-                <a:latin typeface="Helvetica Neue"/>
-              </a:rPr>
-              <a:t>—  A visible number invites people to average it in their heads while answering.</a:t>
-            </a:r>
-          </a:p>
-          <a:p>
-            <a:pPr>
-              <a:lnSpc>
-                <a:spcPct val="125000"/>
-              </a:lnSpc>
-              <a:spcAft>
-                <a:spcPts val="1200"/>
+                <a:latin typeface="Calibri"/>
+              </a:rPr>
+              <a:t>   A visible number invites people to average it in their head while answering.</a:t>
+            </a:r>
+          </a:p>
+          <a:p>
+            <a:pPr algn="l">
+              <a:lnSpc>
+                <a:spcPct val="122000"/>
+              </a:lnSpc>
+              <a:spcAft>
+                <a:spcPts val="1100"/>
               </a:spcAft>
             </a:pPr>
             <a:r>
@@ -10539,28 +10585,28 @@
                 <a:solidFill>
                   <a:srgbClr val="14181F"/>
                 </a:solidFill>
-                <a:latin typeface="Helvetica Neue"/>
+                <a:latin typeface="Calibri"/>
               </a:rPr>
               <a:t>Written answers capped at 250 words</a:t>
             </a:r>
           </a:p>
           <a:p>
-            <a:pPr lvl="1">
-              <a:lnSpc>
-                <a:spcPct val="125000"/>
-              </a:lnSpc>
-              <a:spcAft>
-                <a:spcPts val="800"/>
-              </a:spcAft>
-            </a:pPr>
-            <a:r>
-              <a:rPr sz="1300" b="0">
+            <a:pPr algn="l">
+              <a:lnSpc>
+                <a:spcPct val="122000"/>
+              </a:lnSpc>
+              <a:spcAft>
+                <a:spcPts val="600"/>
+              </a:spcAft>
+            </a:pPr>
+            <a:r>
+              <a:rPr sz="1200" b="0">
                 <a:solidFill>
                   <a:srgbClr val="55606E"/>
                 </a:solidFill>
-                <a:latin typeface="Helvetica Neue"/>
-              </a:rPr>
-              <a:t>—  with a live counter.</a:t>
+                <a:latin typeface="Calibri"/>
+              </a:rPr>
+              <a:t>   With a live counter as they type.</a:t>
             </a:r>
           </a:p>
         </p:txBody>
@@ -10573,8 +10619,8 @@
         </p:nvSpPr>
         <p:spPr>
           <a:xfrm>
-            <a:off x="10972800" y="6355080"/>
-            <a:ext cx="548640" cy="274320"/>
+            <a:off x="10881360" y="6327648"/>
+            <a:ext cx="502920" cy="274320"/>
           </a:xfrm>
           <a:prstGeom prst="rect">
             <a:avLst/>
@@ -10583,24 +10629,24 @@
         </p:spPr>
         <p:txBody>
           <a:bodyPr wrap="square" anchor="t" lIns="0" rIns="0" tIns="0" bIns="0">
-            <a:spAutoFit/>
+            <a:noAutofit/>
           </a:bodyPr>
           <a:lstStyle/>
           <a:p>
             <a:pPr algn="r">
               <a:lnSpc>
-                <a:spcPct val="118000"/>
+                <a:spcPct val="122000"/>
               </a:lnSpc>
               <a:spcAft>
                 <a:spcPts val="0"/>
               </a:spcAft>
             </a:pPr>
             <a:r>
-              <a:rPr sz="1000" b="0">
+              <a:rPr sz="1100" b="0">
                 <a:solidFill>
                   <a:srgbClr val="8A939F"/>
                 </a:solidFill>
-                <a:latin typeface="Helvetica Neue"/>
+                <a:latin typeface="Calibri"/>
               </a:rPr>
               <a:t>7</a:t>
             </a:r>
@@ -10640,7 +10686,7 @@
             <a:avLst/>
           </a:prstGeom>
           <a:solidFill>
-            <a:srgbClr val="EEF3FA"/>
+            <a:srgbClr val="ECF2FA"/>
           </a:solidFill>
           <a:ln>
             <a:noFill/>
@@ -10664,9 +10710,7 @@
         <p:txBody>
           <a:bodyPr rtlCol="0" anchor="ctr"/>
           <a:lstStyle/>
-          <a:p>
-            <a:pPr algn="ctr"/>
-          </a:p>
+          <a:p/>
         </p:txBody>
       </p:sp>
       <p:sp>
@@ -10677,8 +10721,8 @@
         </p:nvSpPr>
         <p:spPr>
           <a:xfrm>
-            <a:off x="777240" y="566928"/>
-            <a:ext cx="8229600" cy="274320"/>
+            <a:off x="822960" y="502920"/>
+            <a:ext cx="8229600" cy="292608"/>
           </a:xfrm>
           <a:prstGeom prst="rect">
             <a:avLst/>
@@ -10687,24 +10731,24 @@
         </p:spPr>
         <p:txBody>
           <a:bodyPr wrap="square" anchor="t" lIns="0" rIns="0" tIns="0" bIns="0">
-            <a:spAutoFit/>
+            <a:noAutofit/>
           </a:bodyPr>
           <a:lstStyle/>
           <a:p>
             <a:pPr algn="l">
               <a:lnSpc>
-                <a:spcPct val="118000"/>
+                <a:spcPct val="122000"/>
               </a:lnSpc>
               <a:spcAft>
                 <a:spcPts val="0"/>
               </a:spcAft>
             </a:pPr>
             <a:r>
-              <a:rPr sz="1100" b="1">
+              <a:rPr sz="1200" b="1">
                 <a:solidFill>
                   <a:srgbClr val="1C4F8B"/>
                 </a:solidFill>
-                <a:latin typeface="Helvetica Neue"/>
+                <a:latin typeface="Calibri"/>
               </a:rPr>
               <a:t>ON A PHONE</a:t>
             </a:r>
@@ -10719,8 +10763,8 @@
         </p:nvSpPr>
         <p:spPr>
           <a:xfrm>
-            <a:off x="777240" y="914400"/>
-            <a:ext cx="5852160" cy="1097280"/>
+            <a:off x="822960" y="896112"/>
+            <a:ext cx="10545775" cy="960120"/>
           </a:xfrm>
           <a:prstGeom prst="rect">
             <a:avLst/>
@@ -10729,13 +10773,13 @@
         </p:spPr>
         <p:txBody>
           <a:bodyPr wrap="square" anchor="t" lIns="0" rIns="0" tIns="0" bIns="0">
-            <a:spAutoFit/>
+            <a:noAutofit/>
           </a:bodyPr>
           <a:lstStyle/>
           <a:p>
             <a:pPr algn="l">
               <a:lnSpc>
-                <a:spcPct val="118000"/>
+                <a:spcPct val="122000"/>
               </a:lnSpc>
               <a:spcAft>
                 <a:spcPts val="0"/>
@@ -10746,10 +10790,9 @@
                 <a:solidFill>
                   <a:srgbClr val="14181F"/>
                 </a:solidFill>
-                <a:latin typeface="Helvetica Neue"/>
-              </a:rPr>
-              <a:t>Built for the walk out
-of the classroom</a:t>
+                <a:latin typeface="Calibri"/>
+              </a:rPr>
+              <a:t>Built for the walk out of the classroom</a:t>
             </a:r>
           </a:p>
         </p:txBody>
@@ -10762,8 +10805,8 @@
         </p:nvSpPr>
         <p:spPr>
           <a:xfrm>
-            <a:off x="777240" y="2651760"/>
-            <a:ext cx="5120640" cy="3657600"/>
+            <a:off x="822960" y="2331720"/>
+            <a:ext cx="5852160" cy="3566160"/>
           </a:xfrm>
           <a:prstGeom prst="rect">
             <a:avLst/>
@@ -10771,33 +10814,33 @@
           <a:noFill/>
         </p:spPr>
         <p:txBody>
-          <a:bodyPr wrap="square" lIns="0" rIns="0" tIns="0" bIns="0">
-            <a:spAutoFit/>
+          <a:bodyPr wrap="square" anchor="t" lIns="0" rIns="0" tIns="0" bIns="0">
+            <a:noAutofit/>
           </a:bodyPr>
           <a:lstStyle/>
           <a:p>
-            <a:pPr>
-              <a:lnSpc>
-                <a:spcPct val="125000"/>
-              </a:lnSpc>
-              <a:spcAft>
-                <a:spcPts val="1400"/>
-              </a:spcAft>
-            </a:pPr>
-            <a:r>
-              <a:rPr sz="1600" b="1">
+            <a:pPr algn="l">
+              <a:lnSpc>
+                <a:spcPct val="122000"/>
+              </a:lnSpc>
+              <a:spcAft>
+                <a:spcPts val="1500"/>
+              </a:spcAft>
+            </a:pPr>
+            <a:r>
+              <a:rPr sz="1700" b="1">
                 <a:solidFill>
                   <a:srgbClr val="14181F"/>
                 </a:solidFill>
-                <a:latin typeface="Helvetica Neue"/>
-              </a:rPr>
-              <a:t>Installs to the home screen.</a:t>
-            </a:r>
-          </a:p>
-          <a:p>
-            <a:pPr lvl="1">
-              <a:lnSpc>
-                <a:spcPct val="125000"/>
+                <a:latin typeface="Calibri"/>
+              </a:rPr>
+              <a:t>Installs to the home screen</a:t>
+            </a:r>
+          </a:p>
+          <a:p>
+            <a:pPr algn="l">
+              <a:lnSpc>
+                <a:spcPct val="122000"/>
               </a:lnSpc>
               <a:spcAft>
                 <a:spcPts val="1000"/>
@@ -10808,34 +10851,34 @@
                 <a:solidFill>
                   <a:srgbClr val="55606E"/>
                 </a:solidFill>
-                <a:latin typeface="Helvetica Neue"/>
-              </a:rPr>
-              <a:t>—  Opens like an ordinary app — no address to remember.</a:t>
-            </a:r>
-          </a:p>
-          <a:p>
-            <a:pPr>
-              <a:lnSpc>
-                <a:spcPct val="125000"/>
-              </a:lnSpc>
-              <a:spcAft>
-                <a:spcPts val="1400"/>
-              </a:spcAft>
-            </a:pPr>
-            <a:r>
-              <a:rPr sz="1600" b="1">
+                <a:latin typeface="Calibri"/>
+              </a:rPr>
+              <a:t>   Opens like an ordinary app. No address for anyone to remember.</a:t>
+            </a:r>
+          </a:p>
+          <a:p>
+            <a:pPr algn="l">
+              <a:lnSpc>
+                <a:spcPct val="122000"/>
+              </a:lnSpc>
+              <a:spcAft>
+                <a:spcPts val="1500"/>
+              </a:spcAft>
+            </a:pPr>
+            <a:r>
+              <a:rPr sz="1700" b="1">
                 <a:solidFill>
                   <a:srgbClr val="14181F"/>
                 </a:solidFill>
-                <a:latin typeface="Helvetica Neue"/>
-              </a:rPr>
-              <a:t>Works with no signal.</a:t>
-            </a:r>
-          </a:p>
-          <a:p>
-            <a:pPr lvl="1">
-              <a:lnSpc>
-                <a:spcPct val="125000"/>
+                <a:latin typeface="Calibri"/>
+              </a:rPr>
+              <a:t>Works with no signal</a:t>
+            </a:r>
+          </a:p>
+          <a:p>
+            <a:pPr algn="l">
+              <a:lnSpc>
+                <a:spcPct val="122000"/>
               </a:lnSpc>
               <a:spcAft>
                 <a:spcPts val="1000"/>
@@ -10846,35 +10889,79 @@
                 <a:solidFill>
                   <a:srgbClr val="55606E"/>
                 </a:solidFill>
-                <a:latin typeface="Helvetica Neue"/>
-              </a:rPr>
-              <a:t>—  A submission made offline is saved on the device, shown as pending, and sent automatically when the connection returns.</a:t>
-            </a:r>
-          </a:p>
-          <a:p>
-            <a:pPr>
-              <a:lnSpc>
-                <a:spcPct val="125000"/>
-              </a:lnSpc>
-              <a:spcAft>
-                <a:spcPts val="1400"/>
-              </a:spcAft>
-            </a:pPr>
-            <a:r>
-              <a:rPr sz="1600" b="1">
+                <a:latin typeface="Calibri"/>
+              </a:rPr>
+              <a:t>   A submission made offline is saved on the device, shown as pending, and sent automatically when the connection returns.</a:t>
+            </a:r>
+          </a:p>
+          <a:p>
+            <a:pPr algn="l">
+              <a:lnSpc>
+                <a:spcPct val="122000"/>
+              </a:lnSpc>
+              <a:spcAft>
+                <a:spcPts val="1500"/>
+              </a:spcAft>
+            </a:pPr>
+            <a:r>
+              <a:rPr sz="1700" b="1">
                 <a:solidFill>
                   <a:srgbClr val="14181F"/>
                 </a:solidFill>
-                <a:latin typeface="Helvetica Neue"/>
-              </a:rPr>
-              <a:t>Nothing is ever lost to a dropped connection.</a:t>
-            </a:r>
-          </a:p>
+                <a:latin typeface="Calibri"/>
+              </a:rPr>
+              <a:t>Nothing is lost to a dropped connection</a:t>
+            </a:r>
+          </a:p>
+        </p:txBody>
+      </p:sp>
+      <p:sp>
+        <p:nvSpPr>
+          <p:cNvPr id="6" name="Rectangle 5"/>
+          <p:cNvSpPr/>
+          <p:nvPr/>
+        </p:nvSpPr>
+        <p:spPr>
+          <a:xfrm>
+            <a:off x="8197215" y="767715"/>
+            <a:ext cx="2716530" cy="5414010"/>
+          </a:xfrm>
+          <a:prstGeom prst="rect">
+            <a:avLst/>
+          </a:prstGeom>
+          <a:solidFill>
+            <a:srgbClr val="FFFFFF"/>
+          </a:solidFill>
+          <a:ln w="12700">
+            <a:solidFill>
+              <a:srgbClr val="D3DCE8"/>
+            </a:solidFill>
+          </a:ln>
+          <a:effectLst/>
+        </p:spPr>
+        <p:style>
+          <a:lnRef idx="1">
+            <a:schemeClr val="accent1"/>
+          </a:lnRef>
+          <a:fillRef idx="3">
+            <a:schemeClr val="accent1"/>
+          </a:fillRef>
+          <a:effectRef idx="2">
+            <a:schemeClr val="accent1"/>
+          </a:effectRef>
+          <a:fontRef idx="minor">
+            <a:schemeClr val="lt1"/>
+          </a:fontRef>
+        </p:style>
+        <p:txBody>
+          <a:bodyPr rtlCol="0" anchor="ctr"/>
+          <a:lstStyle/>
+          <a:p/>
         </p:txBody>
       </p:sp>
       <p:pic>
         <p:nvPicPr>
-          <p:cNvPr id="6" name="Picture 5" descr="student-mobile.png"/>
+          <p:cNvPr id="7" name="Picture 6" descr="student-mobile.png"/>
           <p:cNvPicPr>
             <a:picLocks noChangeAspect="1"/>
           </p:cNvPicPr>
@@ -10888,8 +10975,8 @@
         </p:blipFill>
         <p:spPr>
           <a:xfrm>
-            <a:off x="7955280" y="502920"/>
-            <a:ext cx="2926080" cy="5852160"/>
+            <a:off x="8206740" y="777240"/>
+            <a:ext cx="2697480" cy="5394960"/>
           </a:xfrm>
           <a:prstGeom prst="rect">
             <a:avLst/>
@@ -10898,14 +10985,14 @@
       </p:pic>
       <p:sp>
         <p:nvSpPr>
-          <p:cNvPr id="7" name="TextBox 6"/>
+          <p:cNvPr id="8" name="TextBox 7"/>
           <p:cNvSpPr txBox="1"/>
           <p:nvPr/>
         </p:nvSpPr>
         <p:spPr>
           <a:xfrm>
-            <a:off x="10972800" y="6355080"/>
-            <a:ext cx="548640" cy="274320"/>
+            <a:off x="10881360" y="6327648"/>
+            <a:ext cx="502920" cy="274320"/>
           </a:xfrm>
           <a:prstGeom prst="rect">
             <a:avLst/>
@@ -10914,24 +11001,24 @@
         </p:spPr>
         <p:txBody>
           <a:bodyPr wrap="square" anchor="t" lIns="0" rIns="0" tIns="0" bIns="0">
-            <a:spAutoFit/>
+            <a:noAutofit/>
           </a:bodyPr>
           <a:lstStyle/>
           <a:p>
             <a:pPr algn="r">
               <a:lnSpc>
-                <a:spcPct val="118000"/>
+                <a:spcPct val="122000"/>
               </a:lnSpc>
               <a:spcAft>
                 <a:spcPts val="0"/>
               </a:spcAft>
             </a:pPr>
             <a:r>
-              <a:rPr sz="1000" b="0">
+              <a:rPr sz="1100" b="0">
                 <a:solidFill>
                   <a:srgbClr val="8A939F"/>
                 </a:solidFill>
-                <a:latin typeface="Helvetica Neue"/>
+                <a:latin typeface="Calibri"/>
               </a:rPr>
               <a:t>8</a:t>
             </a:r>
@@ -10964,8 +11051,8 @@
         </p:nvSpPr>
         <p:spPr>
           <a:xfrm>
-            <a:off x="777240" y="566928"/>
-            <a:ext cx="8229600" cy="274320"/>
+            <a:off x="822960" y="502920"/>
+            <a:ext cx="8229600" cy="292608"/>
           </a:xfrm>
           <a:prstGeom prst="rect">
             <a:avLst/>
@@ -10974,24 +11061,24 @@
         </p:spPr>
         <p:txBody>
           <a:bodyPr wrap="square" anchor="t" lIns="0" rIns="0" tIns="0" bIns="0">
-            <a:spAutoFit/>
+            <a:noAutofit/>
           </a:bodyPr>
           <a:lstStyle/>
           <a:p>
             <a:pPr algn="l">
               <a:lnSpc>
-                <a:spcPct val="118000"/>
+                <a:spcPct val="122000"/>
               </a:lnSpc>
               <a:spcAft>
                 <a:spcPts val="0"/>
               </a:spcAft>
             </a:pPr>
             <a:r>
-              <a:rPr sz="1100" b="1">
+              <a:rPr sz="1200" b="1">
                 <a:solidFill>
                   <a:srgbClr val="1C4F8B"/>
                 </a:solidFill>
-                <a:latin typeface="Helvetica Neue"/>
+                <a:latin typeface="Calibri"/>
               </a:rPr>
               <a:t>FOR INSTRUCTORS</a:t>
             </a:r>
@@ -11006,8 +11093,8 @@
         </p:nvSpPr>
         <p:spPr>
           <a:xfrm>
-            <a:off x="777240" y="914400"/>
-            <a:ext cx="10607040" cy="914400"/>
+            <a:off x="822960" y="896112"/>
+            <a:ext cx="10545775" cy="960120"/>
           </a:xfrm>
           <a:prstGeom prst="rect">
             <a:avLst/>
@@ -11016,13 +11103,13 @@
         </p:spPr>
         <p:txBody>
           <a:bodyPr wrap="square" anchor="t" lIns="0" rIns="0" tIns="0" bIns="0">
-            <a:spAutoFit/>
+            <a:noAutofit/>
           </a:bodyPr>
           <a:lstStyle/>
           <a:p>
             <a:pPr algn="l">
               <a:lnSpc>
-                <a:spcPct val="118000"/>
+                <a:spcPct val="122000"/>
               </a:lnSpc>
               <a:spcAft>
                 <a:spcPts val="0"/>
@@ -11033,7 +11120,7 @@
                 <a:solidFill>
                   <a:srgbClr val="14181F"/>
                 </a:solidFill>
-                <a:latin typeface="Helvetica Neue"/>
+                <a:latin typeface="Calibri"/>
               </a:rPr>
               <a:t>Two things to do, both one click away</a:t>
             </a:r>
@@ -11048,8 +11135,8 @@
         </p:nvSpPr>
         <p:spPr>
           <a:xfrm>
-            <a:off x="3425571" y="2185035"/>
-            <a:ext cx="5310378" cy="3859530"/>
+            <a:off x="3457067" y="2185035"/>
+            <a:ext cx="5247386" cy="3813809"/>
           </a:xfrm>
           <a:prstGeom prst="rect">
             <a:avLst/>
@@ -11059,7 +11146,7 @@
           </a:solidFill>
           <a:ln w="12700">
             <a:solidFill>
-              <a:srgbClr val="D8DEE8"/>
+              <a:srgbClr val="D3DCE8"/>
             </a:solidFill>
           </a:ln>
           <a:effectLst/>
@@ -11081,9 +11168,7 @@
         <p:txBody>
           <a:bodyPr rtlCol="0" anchor="ctr"/>
           <a:lstStyle/>
-          <a:p>
-            <a:pPr algn="ctr"/>
-          </a:p>
+          <a:p/>
         </p:txBody>
       </p:sp>
       <p:pic>
@@ -11102,8 +11187,8 @@
         </p:blipFill>
         <p:spPr>
           <a:xfrm>
-            <a:off x="3435096" y="2194560"/>
-            <a:ext cx="5291328" cy="3840480"/>
+            <a:off x="3466592" y="2194560"/>
+            <a:ext cx="5228336" cy="3794759"/>
           </a:xfrm>
           <a:prstGeom prst="rect">
             <a:avLst/>
@@ -11118,8 +11203,8 @@
         </p:nvSpPr>
         <p:spPr>
           <a:xfrm>
-            <a:off x="10972800" y="6355080"/>
-            <a:ext cx="548640" cy="274320"/>
+            <a:off x="10881360" y="6327648"/>
+            <a:ext cx="502920" cy="274320"/>
           </a:xfrm>
           <a:prstGeom prst="rect">
             <a:avLst/>
@@ -11128,24 +11213,24 @@
         </p:spPr>
         <p:txBody>
           <a:bodyPr wrap="square" anchor="t" lIns="0" rIns="0" tIns="0" bIns="0">
-            <a:spAutoFit/>
+            <a:noAutofit/>
           </a:bodyPr>
           <a:lstStyle/>
           <a:p>
             <a:pPr algn="r">
               <a:lnSpc>
-                <a:spcPct val="118000"/>
+                <a:spcPct val="122000"/>
               </a:lnSpc>
               <a:spcAft>
                 <a:spcPts val="0"/>
               </a:spcAft>
             </a:pPr>
             <a:r>
-              <a:rPr sz="1000" b="0">
+              <a:rPr sz="1100" b="0">
                 <a:solidFill>
                   <a:srgbClr val="8A939F"/>
                 </a:solidFill>
-                <a:latin typeface="Helvetica Neue"/>
+                <a:latin typeface="Calibri"/>
               </a:rPr>
               <a:t>9</a:t>
             </a:r>

--- a/docs/TOP-Feedback-Introduction.pptx
+++ b/docs/TOP-Feedback-Introduction.pptx
@@ -1008,7 +1008,7 @@
           <a:lstStyle/>
           <a:p>
             <a:r>
-              <a:t>Mention that the credentials list can only be read once, because only hashes are stored. Download it, hand it out, delete the file.</a:t>
+              <a:t>Worth dwelling on for a cadre audience: there is nothing to distribute and nothing to reset. Cadets travel in from several schools, so there is no one campus login to key on, but they all already have a Google account because that is where we mail them. Being on this list is what grants access, and that is your decision.</a:t>
             </a:r>
           </a:p>
         </p:txBody>
@@ -1358,7 +1358,7 @@
           <a:lstStyle/>
           <a:p>
             <a:r>
-              <a:t>Everyone signs in, cadets included. That is what makes one-submission-per-student a fact rather than an honour system.</a:t>
+              <a:t>Everyone signs in with their own Google account, cadets included. That is what makes one-submission-per-student a fact rather than an honour system. Nobody issues or resets a password, because the app has none.</a:t>
             </a:r>
           </a:p>
         </p:txBody>
@@ -5069,8 +5069,8 @@
         </p:nvSpPr>
         <p:spPr>
           <a:xfrm>
-            <a:off x="2790645" y="2139315"/>
-            <a:ext cx="2282550" cy="3950970"/>
+            <a:off x="2882826" y="2139315"/>
+            <a:ext cx="2098188" cy="3950970"/>
           </a:xfrm>
           <a:prstGeom prst="rect">
             <a:avLst/>
@@ -5121,8 +5121,8 @@
         </p:blipFill>
         <p:spPr>
           <a:xfrm>
-            <a:off x="2800170" y="2148840"/>
-            <a:ext cx="2263500" cy="3931920"/>
+            <a:off x="2892351" y="2148840"/>
+            <a:ext cx="2079138" cy="3931920"/>
           </a:xfrm>
           <a:prstGeom prst="rect">
             <a:avLst/>
@@ -7427,7 +7427,7 @@
                 </a:solidFill>
                 <a:latin typeface="Calibri"/>
               </a:rPr>
-              <a:t>Accounts your detachment controls</a:t>
+              <a:t>A roster, not a password list</a:t>
             </a:r>
           </a:p>
         </p:txBody>
@@ -7469,7 +7469,7 @@
                 </a:solidFill>
                 <a:latin typeface="Calibri"/>
               </a:rPr>
-              <a:t>Add cadets one at a time or import a whole class by CSV. Passwords are generated and handed to you once.</a:t>
+              <a:t>Everyone signs in with the Google account you already mail them at. Add people by email, one at a time or a whole class by CSV.</a:t>
             </a:r>
           </a:p>
         </p:txBody>
@@ -7482,8 +7482,8 @@
         </p:nvSpPr>
         <p:spPr>
           <a:xfrm>
-            <a:off x="4718830" y="2550795"/>
-            <a:ext cx="2723859" cy="3448050"/>
+            <a:off x="5254179" y="2550795"/>
+            <a:ext cx="1653162" cy="3448050"/>
           </a:xfrm>
           <a:prstGeom prst="rect">
             <a:avLst/>
@@ -7534,8 +7534,8 @@
         </p:blipFill>
         <p:spPr>
           <a:xfrm>
-            <a:off x="4728355" y="2560320"/>
-            <a:ext cx="2704809" cy="3429000"/>
+            <a:off x="5263704" y="2560320"/>
+            <a:ext cx="1634112" cy="3429000"/>
           </a:xfrm>
           <a:prstGeom prst="rect">
             <a:avLst/>
@@ -8116,7 +8116,7 @@
                 </a:solidFill>
                 <a:latin typeface="Calibri"/>
               </a:rPr>
-              <a:t>Paste the folder link, create your administrator account, add cadets.</a:t>
+              <a:t>Paste the folder link, sign in with Google to claim it, add cadets by email.</a:t>
             </a:r>
           </a:p>
         </p:txBody>
@@ -9459,7 +9459,7 @@
                 </a:solidFill>
                 <a:latin typeface="Courier New"/>
               </a:rPr>
-              <a:t>   users/       accounts: cadets, instructors, admins</a:t>
+              <a:t>   users/       the roster: who may sign in, and as what</a:t>
             </a:r>
           </a:p>
           <a:p>
@@ -10003,7 +10003,7 @@
                 </a:solidFill>
                 <a:latin typeface="Calibri"/>
               </a:rPr>
-              <a:t>   Creates accounts and resets passwords.</a:t>
+              <a:t>   Keeps the roster of who may use the app, and as what.</a:t>
             </a:r>
           </a:p>
         </p:txBody>
@@ -10923,8 +10923,8 @@
         </p:nvSpPr>
         <p:spPr>
           <a:xfrm>
-            <a:off x="8197215" y="767715"/>
-            <a:ext cx="2716530" cy="5414010"/>
+            <a:off x="9112376" y="767715"/>
+            <a:ext cx="886207" cy="5414010"/>
           </a:xfrm>
           <a:prstGeom prst="rect">
             <a:avLst/>
@@ -10975,8 +10975,8 @@
         </p:blipFill>
         <p:spPr>
           <a:xfrm>
-            <a:off x="8206740" y="777240"/>
-            <a:ext cx="2697480" cy="5394960"/>
+            <a:off x="9121901" y="777240"/>
+            <a:ext cx="867157" cy="5394960"/>
           </a:xfrm>
           <a:prstGeom prst="rect">
             <a:avLst/>

--- a/docs/TOP-Feedback-Introduction.pptx
+++ b/docs/TOP-Feedback-Introduction.pptx
@@ -22,6 +22,9 @@
     <p:sldId id="270" r:id="rId22"/>
     <p:sldId id="271" r:id="rId23"/>
     <p:sldId id="272" r:id="rId24"/>
+    <p:sldId id="273" r:id="rId25"/>
+    <p:sldId id="274" r:id="rId26"/>
+    <p:sldId id="275" r:id="rId27"/>
   </p:sldIdLst>
   <p:sldSz cx="12191695" cy="6858000" type="screen4x3"/>
   <p:notesSz cx="6858000" cy="9144000"/>
@@ -1078,7 +1081,147 @@
           <a:lstStyle/>
           <a:p>
             <a:r>
-              <a:t>Close here. Anyone who will actually perform the install should be given the setup guide PDF rather than this deck.</a:t>
+              <a:t>This slide answers the objection that kills tools like this: 'my cadets will never set that up'. They do not have to. The link carries the configuration, so there is no Client ID or folder address in anybody's hands but yours. Worth demonstrating live if there is a screen in the room — it takes about ten seconds and it lands better than any slide.</a:t>
+            </a:r>
+          </a:p>
+        </p:txBody>
+      </p:sp>
+      <p:sp>
+        <p:nvSpPr>
+          <p:cNvPr id="4" name="Slide Number Placeholder 3"/>
+          <p:cNvSpPr>
+            <a:spLocks noGrp="1"/>
+          </p:cNvSpPr>
+          <p:nvPr>
+            <p:ph type="sldNum" idx="5" sz="quarter"/>
+          </p:nvPr>
+        </p:nvSpPr>
+        <p:spPr/>
+      </p:sp>
+    </p:spTree>
+  </p:cSld>
+  <p:clrMapOvr>
+    <a:masterClrMapping/>
+  </p:clrMapOvr>
+</p:notes>
+</file>
+
+<file path=ppt/notesSlides/notesSlide18.xml><?xml version="1.0" encoding="utf-8"?>
+<p:notes xmlns:a="http://schemas.openxmlformats.org/drawingml/2006/main" xmlns:p="http://schemas.openxmlformats.org/presentationml/2006/main" xmlns:r="http://schemas.openxmlformats.org/officeDocument/2006/relationships">
+  <p:cSld>
+    <p:spTree>
+      <p:nvGrpSpPr>
+        <p:cNvPr id="1" name=""/>
+        <p:cNvGrpSpPr/>
+        <p:nvPr/>
+      </p:nvGrpSpPr>
+      <p:grpSpPr>
+        <a:xfrm>
+          <a:off x="0" y="0"/>
+          <a:ext cx="0" cy="0"/>
+          <a:chOff x="0" y="0"/>
+          <a:chExt cx="0" cy="0"/>
+        </a:xfrm>
+      </p:grpSpPr>
+      <p:sp>
+        <p:nvSpPr>
+          <p:cNvPr id="2" name="Slide Image Placeholder 1"/>
+          <p:cNvSpPr>
+            <a:spLocks noGrp="1"/>
+          </p:cNvSpPr>
+          <p:nvPr>
+            <p:ph type="sldImg" idx="2"/>
+          </p:nvPr>
+        </p:nvSpPr>
+        <p:spPr/>
+      </p:sp>
+      <p:sp>
+        <p:nvSpPr>
+          <p:cNvPr id="3" name="Notes Placeholder 2"/>
+          <p:cNvSpPr>
+            <a:spLocks noGrp="1"/>
+          </p:cNvSpPr>
+          <p:nvPr>
+            <p:ph type="body" idx="3" sz="quarter"/>
+          </p:nvPr>
+        </p:nvSpPr>
+        <p:spPr/>
+        <p:txBody>
+          <a:bodyPr/>
+          <a:lstStyle/>
+          <a:p>
+            <a:r>
+              <a:t>This is the capability a commander will care about most, and the one no general purpose survey tool offers. Every other screen answers 'how did the event go'. This answers 'how is this person doing', across a term, without anyone compiling a spreadsheet. Say plainly that it is not a ranking, and that the app says so on the screen — response counts and cohorts differ, and an average of nine ordinal points is not a performance score. It also withholds anyone under three responses, counting their total rather than each form, because two responses across two forms is still two identifiable cadets.</a:t>
+            </a:r>
+          </a:p>
+        </p:txBody>
+      </p:sp>
+      <p:sp>
+        <p:nvSpPr>
+          <p:cNvPr id="4" name="Slide Number Placeholder 3"/>
+          <p:cNvSpPr>
+            <a:spLocks noGrp="1"/>
+          </p:cNvSpPr>
+          <p:nvPr>
+            <p:ph type="sldNum" idx="5" sz="quarter"/>
+          </p:nvPr>
+        </p:nvSpPr>
+        <p:spPr/>
+      </p:sp>
+    </p:spTree>
+  </p:cSld>
+  <p:clrMapOvr>
+    <a:masterClrMapping/>
+  </p:clrMapOvr>
+</p:notes>
+</file>
+
+<file path=ppt/notesSlides/notesSlide19.xml><?xml version="1.0" encoding="utf-8"?>
+<p:notes xmlns:a="http://schemas.openxmlformats.org/drawingml/2006/main" xmlns:p="http://schemas.openxmlformats.org/presentationml/2006/main" xmlns:r="http://schemas.openxmlformats.org/officeDocument/2006/relationships">
+  <p:cSld>
+    <p:spTree>
+      <p:nvGrpSpPr>
+        <p:cNvPr id="1" name=""/>
+        <p:cNvGrpSpPr/>
+        <p:nvPr/>
+      </p:nvGrpSpPr>
+      <p:grpSpPr>
+        <a:xfrm>
+          <a:off x="0" y="0"/>
+          <a:ext cx="0" cy="0"/>
+          <a:chOff x="0" y="0"/>
+          <a:chExt cx="0" cy="0"/>
+        </a:xfrm>
+      </p:grpSpPr>
+      <p:sp>
+        <p:nvSpPr>
+          <p:cNvPr id="2" name="Slide Image Placeholder 1"/>
+          <p:cNvSpPr>
+            <a:spLocks noGrp="1"/>
+          </p:cNvSpPr>
+          <p:nvPr>
+            <p:ph type="sldImg" idx="2"/>
+          </p:nvPr>
+        </p:nvSpPr>
+        <p:spPr/>
+      </p:sp>
+      <p:sp>
+        <p:nvSpPr>
+          <p:cNvPr id="3" name="Notes Placeholder 2"/>
+          <p:cNvSpPr>
+            <a:spLocks noGrp="1"/>
+          </p:cNvSpPr>
+          <p:nvPr>
+            <p:ph type="body" idx="3" sz="quarter"/>
+          </p:nvPr>
+        </p:nvSpPr>
+        <p:spPr/>
+        <p:txBody>
+          <a:bodyPr/>
+          <a:lstStyle/>
+          <a:p>
+            <a:r>
+              <a:t>Expect the data question early from anyone senior. The answer is that there is no vendor holding anything: the records sit in the detachment's own Drive, and the maintainer's role is the source code. The strongest single fact here is that after setup, nobody but the folder owner has access to the folder at all — cadets and cadre both go through the detachment's own server. That is unusual, and it is worth saying slowly.</a:t>
             </a:r>
           </a:p>
         </p:txBody>
@@ -1173,6 +1316,76 @@
 </p:notes>
 </file>
 
+<file path=ppt/notesSlides/notesSlide20.xml><?xml version="1.0" encoding="utf-8"?>
+<p:notes xmlns:a="http://schemas.openxmlformats.org/drawingml/2006/main" xmlns:p="http://schemas.openxmlformats.org/presentationml/2006/main" xmlns:r="http://schemas.openxmlformats.org/officeDocument/2006/relationships">
+  <p:cSld>
+    <p:spTree>
+      <p:nvGrpSpPr>
+        <p:cNvPr id="1" name=""/>
+        <p:cNvGrpSpPr/>
+        <p:nvPr/>
+      </p:nvGrpSpPr>
+      <p:grpSpPr>
+        <a:xfrm>
+          <a:off x="0" y="0"/>
+          <a:ext cx="0" cy="0"/>
+          <a:chOff x="0" y="0"/>
+          <a:chExt cx="0" cy="0"/>
+        </a:xfrm>
+      </p:grpSpPr>
+      <p:sp>
+        <p:nvSpPr>
+          <p:cNvPr id="2" name="Slide Image Placeholder 1"/>
+          <p:cNvSpPr>
+            <a:spLocks noGrp="1"/>
+          </p:cNvSpPr>
+          <p:nvPr>
+            <p:ph type="sldImg" idx="2"/>
+          </p:nvPr>
+        </p:nvSpPr>
+        <p:spPr/>
+      </p:sp>
+      <p:sp>
+        <p:nvSpPr>
+          <p:cNvPr id="3" name="Notes Placeholder 2"/>
+          <p:cNvSpPr>
+            <a:spLocks noGrp="1"/>
+          </p:cNvSpPr>
+          <p:nvPr>
+            <p:ph type="body" idx="3" sz="quarter"/>
+          </p:nvPr>
+        </p:nvSpPr>
+        <p:spPr/>
+        <p:txBody>
+          <a:bodyPr/>
+          <a:lstStyle/>
+          <a:p>
+            <a:r>
+              <a:t>Close here. Anyone who will actually perform the install should be given the setup guide PDF rather than this deck.</a:t>
+            </a:r>
+          </a:p>
+        </p:txBody>
+      </p:sp>
+      <p:sp>
+        <p:nvSpPr>
+          <p:cNvPr id="4" name="Slide Number Placeholder 3"/>
+          <p:cNvSpPr>
+            <a:spLocks noGrp="1"/>
+          </p:cNvSpPr>
+          <p:nvPr>
+            <p:ph type="sldNum" idx="5" sz="quarter"/>
+          </p:nvPr>
+        </p:nvSpPr>
+        <p:spPr/>
+      </p:sp>
+    </p:spTree>
+  </p:cSld>
+  <p:clrMapOvr>
+    <a:masterClrMapping/>
+  </p:clrMapOvr>
+</p:notes>
+</file>
+
 <file path=ppt/notesSlides/notesSlide3.xml><?xml version="1.0" encoding="utf-8"?>
 <p:notes xmlns:a="http://schemas.openxmlformats.org/drawingml/2006/main" xmlns:p="http://schemas.openxmlformats.org/presentationml/2006/main" xmlns:r="http://schemas.openxmlformats.org/officeDocument/2006/relationships">
   <p:cSld>
@@ -1358,7 +1571,7 @@
           <a:lstStyle/>
           <a:p>
             <a:r>
-              <a:t>Everyone signs in with their own Google account, cadets included. That is what makes one-submission-per-student a fact rather than an honour system. Nobody issues or resets a password, because the app has none.</a:t>
+              <a:t>The point of this slide is that access follows rank, and that it is enforced rather than assumed. Cadre and commander areas are separate folders on the detachment's Drive, not hidden screens — an instructor cannot reach commander feedback by opening Drive directly, because the server will not open that folder for them. At most two commanders at a time, so a change of command overlaps.</a:t>
             </a:r>
           </a:p>
         </p:txBody>
@@ -5069,8 +5282,8 @@
         </p:nvSpPr>
         <p:spPr>
           <a:xfrm>
-            <a:off x="2882826" y="2139315"/>
-            <a:ext cx="2098188" cy="3950970"/>
+            <a:off x="2931826" y="2139315"/>
+            <a:ext cx="2000188" cy="3950970"/>
           </a:xfrm>
           <a:prstGeom prst="rect">
             <a:avLst/>
@@ -5121,8 +5334,8 @@
         </p:blipFill>
         <p:spPr>
           <a:xfrm>
-            <a:off x="2892351" y="2148840"/>
-            <a:ext cx="2079138" cy="3931920"/>
+            <a:off x="2941351" y="2148840"/>
+            <a:ext cx="1981138" cy="3931920"/>
           </a:xfrm>
           <a:prstGeom prst="rect">
             <a:avLst/>
@@ -7482,8 +7695,8 @@
         </p:nvSpPr>
         <p:spPr>
           <a:xfrm>
-            <a:off x="5254179" y="2550795"/>
-            <a:ext cx="1653162" cy="3448050"/>
+            <a:off x="5381728" y="2550795"/>
+            <a:ext cx="1398064" cy="3310890"/>
           </a:xfrm>
           <a:prstGeom prst="rect">
             <a:avLst/>
@@ -7534,8 +7747,8 @@
         </p:blipFill>
         <p:spPr>
           <a:xfrm>
-            <a:off x="5263704" y="2560320"/>
-            <a:ext cx="1634112" cy="3429000"/>
+            <a:off x="5391253" y="2560320"/>
+            <a:ext cx="1379014" cy="3291840"/>
           </a:xfrm>
           <a:prstGeom prst="rect">
             <a:avLst/>
@@ -7604,23 +7817,288 @@
       <p:grpSpPr/>
       <p:sp>
         <p:nvSpPr>
-          <p:cNvPr id="2" name="Rectangle 1"/>
+          <p:cNvPr id="2" name="TextBox 1"/>
+          <p:cNvSpPr txBox="1"/>
+          <p:nvPr/>
+        </p:nvSpPr>
+        <p:spPr>
+          <a:xfrm>
+            <a:off x="822960" y="502920"/>
+            <a:ext cx="8229600" cy="292608"/>
+          </a:xfrm>
+          <a:prstGeom prst="rect">
+            <a:avLst/>
+          </a:prstGeom>
+          <a:noFill/>
+        </p:spPr>
+        <p:txBody>
+          <a:bodyPr wrap="square" anchor="t" lIns="0" rIns="0" tIns="0" bIns="0">
+            <a:noAutofit/>
+          </a:bodyPr>
+          <a:lstStyle/>
+          <a:p>
+            <a:pPr algn="l">
+              <a:lnSpc>
+                <a:spcPct val="122000"/>
+              </a:lnSpc>
+              <a:spcAft>
+                <a:spcPts val="0"/>
+              </a:spcAft>
+            </a:pPr>
+            <a:r>
+              <a:rPr sz="1200" b="1">
+                <a:solidFill>
+                  <a:srgbClr val="1C4F8B"/>
+                </a:solidFill>
+                <a:latin typeface="Calibri"/>
+              </a:rPr>
+              <a:t>GETTING A DETACHMENT ONTO IT</a:t>
+            </a:r>
+          </a:p>
+        </p:txBody>
+      </p:sp>
+      <p:sp>
+        <p:nvSpPr>
+          <p:cNvPr id="3" name="TextBox 2"/>
+          <p:cNvSpPr txBox="1"/>
+          <p:nvPr/>
+        </p:nvSpPr>
+        <p:spPr>
+          <a:xfrm>
+            <a:off x="822960" y="896112"/>
+            <a:ext cx="10545775" cy="960120"/>
+          </a:xfrm>
+          <a:prstGeom prst="rect">
+            <a:avLst/>
+          </a:prstGeom>
+          <a:noFill/>
+        </p:spPr>
+        <p:txBody>
+          <a:bodyPr wrap="square" anchor="t" lIns="0" rIns="0" tIns="0" bIns="0">
+            <a:noAutofit/>
+          </a:bodyPr>
+          <a:lstStyle/>
+          <a:p>
+            <a:pPr algn="l">
+              <a:lnSpc>
+                <a:spcPct val="122000"/>
+              </a:lnSpc>
+              <a:spcAft>
+                <a:spcPts val="0"/>
+              </a:spcAft>
+            </a:pPr>
+            <a:r>
+              <a:rPr sz="3400" b="1">
+                <a:solidFill>
+                  <a:srgbClr val="14181F"/>
+                </a:solidFill>
+                <a:latin typeface="Calibri"/>
+              </a:rPr>
+              <a:t>One link. Or point a room at a screen.</a:t>
+            </a:r>
+          </a:p>
+        </p:txBody>
+      </p:sp>
+      <p:sp>
+        <p:nvSpPr>
+          <p:cNvPr id="4" name="TextBox 3"/>
+          <p:cNvSpPr txBox="1"/>
+          <p:nvPr/>
+        </p:nvSpPr>
+        <p:spPr>
+          <a:xfrm>
+            <a:off x="822960" y="1783080"/>
+            <a:ext cx="9966960" cy="566928"/>
+          </a:xfrm>
+          <a:prstGeom prst="rect">
+            <a:avLst/>
+          </a:prstGeom>
+          <a:noFill/>
+        </p:spPr>
+        <p:txBody>
+          <a:bodyPr wrap="square" anchor="t" lIns="0" rIns="0" tIns="0" bIns="0">
+            <a:noAutofit/>
+          </a:bodyPr>
+          <a:lstStyle/>
+          <a:p>
+            <a:pPr algn="l">
+              <a:lnSpc>
+                <a:spcPct val="122000"/>
+              </a:lnSpc>
+              <a:spcAft>
+                <a:spcPts val="0"/>
+              </a:spcAft>
+            </a:pPr>
+            <a:r>
+              <a:rPr sz="1600" b="0">
+                <a:solidFill>
+                  <a:srgbClr val="55606E"/>
+                </a:solidFill>
+                <a:latin typeface="Calibri"/>
+              </a:rPr>
+              <a:t>Cadets do not install anything, configure anything, or type anything.</a:t>
+            </a:r>
+          </a:p>
+        </p:txBody>
+      </p:sp>
+      <p:sp>
+        <p:nvSpPr>
+          <p:cNvPr id="5" name="TextBox 4"/>
+          <p:cNvSpPr txBox="1"/>
+          <p:nvPr/>
+        </p:nvSpPr>
+        <p:spPr>
+          <a:xfrm>
+            <a:off x="822960" y="2194560"/>
+            <a:ext cx="5669280" cy="3657600"/>
+          </a:xfrm>
+          <a:prstGeom prst="rect">
+            <a:avLst/>
+          </a:prstGeom>
+          <a:noFill/>
+        </p:spPr>
+        <p:txBody>
+          <a:bodyPr wrap="square" anchor="t" lIns="0" rIns="0" tIns="0" bIns="0">
+            <a:noAutofit/>
+          </a:bodyPr>
+          <a:lstStyle/>
+          <a:p>
+            <a:pPr algn="l">
+              <a:lnSpc>
+                <a:spcPct val="122000"/>
+              </a:lnSpc>
+              <a:spcAft>
+                <a:spcPts val="1200"/>
+              </a:spcAft>
+            </a:pPr>
+            <a:r>
+              <a:rPr sz="1600" b="1">
+                <a:solidFill>
+                  <a:srgbClr val="14181F"/>
+                </a:solidFill>
+                <a:latin typeface="Calibri"/>
+              </a:rPr>
+              <a:t>Send a join link</a:t>
+            </a:r>
+          </a:p>
+          <a:p>
+            <a:pPr algn="l">
+              <a:lnSpc>
+                <a:spcPct val="122000"/>
+              </a:lnSpc>
+              <a:spcAft>
+                <a:spcPts val="700"/>
+              </a:spcAft>
+            </a:pPr>
+            <a:r>
+              <a:rPr sz="1300" b="0">
+                <a:solidFill>
+                  <a:srgbClr val="55606E"/>
+                </a:solidFill>
+                <a:latin typeface="Calibri"/>
+              </a:rPr>
+              <a:t>   Chat, email, however you already reach them. It carries the whole setup.</a:t>
+            </a:r>
+          </a:p>
+          <a:p>
+            <a:pPr algn="l">
+              <a:lnSpc>
+                <a:spcPct val="122000"/>
+              </a:lnSpc>
+              <a:spcAft>
+                <a:spcPts val="1200"/>
+              </a:spcAft>
+            </a:pPr>
+            <a:r>
+              <a:rPr sz="1600" b="1">
+                <a:solidFill>
+                  <a:srgbClr val="14181F"/>
+                </a:solidFill>
+                <a:latin typeface="Calibri"/>
+              </a:rPr>
+              <a:t>Or show the QR code</a:t>
+            </a:r>
+          </a:p>
+          <a:p>
+            <a:pPr algn="l">
+              <a:lnSpc>
+                <a:spcPct val="122000"/>
+              </a:lnSpc>
+              <a:spcAft>
+                <a:spcPts val="700"/>
+              </a:spcAft>
+            </a:pPr>
+            <a:r>
+              <a:rPr sz="1300" b="0">
+                <a:solidFill>
+                  <a:srgbClr val="55606E"/>
+                </a:solidFill>
+                <a:latin typeface="Calibri"/>
+              </a:rPr>
+              <a:t>   On a projector at the start of a meeting. Thirty phones in a minute.</a:t>
+            </a:r>
+          </a:p>
+          <a:p>
+            <a:pPr algn="l">
+              <a:lnSpc>
+                <a:spcPct val="122000"/>
+              </a:lnSpc>
+              <a:spcAft>
+                <a:spcPts val="1200"/>
+              </a:spcAft>
+            </a:pPr>
+            <a:r>
+              <a:rPr sz="1600" b="1">
+                <a:solidFill>
+                  <a:srgbClr val="14181F"/>
+                </a:solidFill>
+                <a:latin typeface="Calibri"/>
+              </a:rPr>
+              <a:t>They sign in with Google</a:t>
+            </a:r>
+          </a:p>
+          <a:p>
+            <a:pPr algn="l">
+              <a:lnSpc>
+                <a:spcPct val="122000"/>
+              </a:lnSpc>
+              <a:spcAft>
+                <a:spcPts val="700"/>
+              </a:spcAft>
+            </a:pPr>
+            <a:r>
+              <a:rPr sz="1300" b="0">
+                <a:solidFill>
+                  <a:srgbClr val="55606E"/>
+                </a:solidFill>
+                <a:latin typeface="Calibri"/>
+              </a:rPr>
+              <a:t>   The account you already mail them at. That is the whole enrolment.</a:t>
+            </a:r>
+          </a:p>
+        </p:txBody>
+      </p:sp>
+      <p:sp>
+        <p:nvSpPr>
+          <p:cNvPr id="6" name="Rectangle 5"/>
           <p:cNvSpPr/>
           <p:nvPr/>
         </p:nvSpPr>
         <p:spPr>
           <a:xfrm>
-            <a:off x="0" y="0"/>
-            <a:ext cx="12191695" cy="6858000"/>
+            <a:off x="6665595" y="2288274"/>
+            <a:ext cx="4773930" cy="3470172"/>
           </a:xfrm>
           <a:prstGeom prst="rect">
             <a:avLst/>
           </a:prstGeom>
           <a:solidFill>
-            <a:srgbClr val="1C4F8B"/>
+            <a:srgbClr val="FFFFFF"/>
           </a:solidFill>
-          <a:ln>
-            <a:noFill/>
+          <a:ln w="12700">
+            <a:solidFill>
+              <a:srgbClr val="D3DCE8"/>
+            </a:solidFill>
           </a:ln>
           <a:effectLst/>
         </p:spPr>
@@ -7644,16 +8122,40 @@
           <a:p/>
         </p:txBody>
       </p:sp>
-      <p:sp>
-        <p:nvSpPr>
-          <p:cNvPr id="3" name="TextBox 2"/>
+      <p:pic>
+        <p:nvPicPr>
+          <p:cNvPr id="7" name="Picture 6" descr="qr-desktop.png"/>
+          <p:cNvPicPr>
+            <a:picLocks noChangeAspect="1"/>
+          </p:cNvPicPr>
+          <p:nvPr/>
+        </p:nvPicPr>
+        <p:blipFill>
+          <a:blip r:embed="rId2"/>
+          <a:stretch>
+            <a:fillRect/>
+          </a:stretch>
+        </p:blipFill>
+        <p:spPr>
+          <a:xfrm>
+            <a:off x="6675120" y="2297799"/>
+            <a:ext cx="4754880" cy="3451122"/>
+          </a:xfrm>
+          <a:prstGeom prst="rect">
+            <a:avLst/>
+          </a:prstGeom>
+        </p:spPr>
+      </p:pic>
+      <p:sp>
+        <p:nvSpPr>
+          <p:cNvPr id="8" name="TextBox 7"/>
           <p:cNvSpPr txBox="1"/>
           <p:nvPr/>
         </p:nvSpPr>
         <p:spPr>
           <a:xfrm>
-            <a:off x="822960" y="1005840"/>
-            <a:ext cx="9144000" cy="868680"/>
+            <a:off x="10881360" y="6327648"/>
+            <a:ext cx="502920" cy="274320"/>
           </a:xfrm>
           <a:prstGeom prst="rect">
             <a:avLst/>
@@ -7666,7 +8168,7 @@
           </a:bodyPr>
           <a:lstStyle/>
           <a:p>
-            <a:pPr algn="l">
+            <a:pPr algn="r">
               <a:lnSpc>
                 <a:spcPct val="122000"/>
               </a:lnSpc>
@@ -7675,36 +8177,182 @@
               </a:spcAft>
             </a:pPr>
             <a:r>
-              <a:rPr sz="4200" b="1">
-                <a:solidFill>
-                  <a:srgbClr val="FFFFFF"/>
-                </a:solidFill>
-                <a:latin typeface="Calibri"/>
-              </a:rPr>
-              <a:t>Getting started</a:t>
-            </a:r>
-          </a:p>
-        </p:txBody>
-      </p:sp>
-      <p:sp>
-        <p:nvSpPr>
-          <p:cNvPr id="4" name="Oval 3"/>
+              <a:rPr sz="1100" b="0">
+                <a:solidFill>
+                  <a:srgbClr val="8A939F"/>
+                </a:solidFill>
+                <a:latin typeface="Calibri"/>
+              </a:rPr>
+              <a:t>17</a:t>
+            </a:r>
+          </a:p>
+        </p:txBody>
+      </p:sp>
+    </p:spTree>
+  </p:cSld>
+  <p:clrMapOvr>
+    <a:masterClrMapping/>
+  </p:clrMapOvr>
+</p:sld>
+</file>
+
+<file path=ppt/slides/slide18.xml><?xml version="1.0" encoding="utf-8"?>
+<p:sld xmlns:a="http://schemas.openxmlformats.org/drawingml/2006/main" xmlns:p="http://schemas.openxmlformats.org/presentationml/2006/main" xmlns:r="http://schemas.openxmlformats.org/officeDocument/2006/relationships">
+  <p:cSld>
+    <p:spTree>
+      <p:nvGrpSpPr>
+        <p:cNvPr id="1" name=""/>
+        <p:cNvGrpSpPr/>
+        <p:nvPr/>
+      </p:nvGrpSpPr>
+      <p:grpSpPr/>
+      <p:sp>
+        <p:nvSpPr>
+          <p:cNvPr id="2" name="TextBox 1"/>
+          <p:cNvSpPr txBox="1"/>
+          <p:nvPr/>
+        </p:nvSpPr>
+        <p:spPr>
+          <a:xfrm>
+            <a:off x="822960" y="502920"/>
+            <a:ext cx="8229600" cy="292608"/>
+          </a:xfrm>
+          <a:prstGeom prst="rect">
+            <a:avLst/>
+          </a:prstGeom>
+          <a:noFill/>
+        </p:spPr>
+        <p:txBody>
+          <a:bodyPr wrap="square" anchor="t" lIns="0" rIns="0" tIns="0" bIns="0">
+            <a:noAutofit/>
+          </a:bodyPr>
+          <a:lstStyle/>
+          <a:p>
+            <a:pPr algn="l">
+              <a:lnSpc>
+                <a:spcPct val="122000"/>
+              </a:lnSpc>
+              <a:spcAft>
+                <a:spcPts val="0"/>
+              </a:spcAft>
+            </a:pPr>
+            <a:r>
+              <a:rPr sz="1200" b="1">
+                <a:solidFill>
+                  <a:srgbClr val="1C4F8B"/>
+                </a:solidFill>
+                <a:latin typeface="Calibri"/>
+              </a:rPr>
+              <a:t>FOR THE COMMANDER</a:t>
+            </a:r>
+          </a:p>
+        </p:txBody>
+      </p:sp>
+      <p:sp>
+        <p:nvSpPr>
+          <p:cNvPr id="3" name="TextBox 2"/>
+          <p:cNvSpPr txBox="1"/>
+          <p:nvPr/>
+        </p:nvSpPr>
+        <p:spPr>
+          <a:xfrm>
+            <a:off x="822960" y="896112"/>
+            <a:ext cx="10545775" cy="960120"/>
+          </a:xfrm>
+          <a:prstGeom prst="rect">
+            <a:avLst/>
+          </a:prstGeom>
+          <a:noFill/>
+        </p:spPr>
+        <p:txBody>
+          <a:bodyPr wrap="square" anchor="t" lIns="0" rIns="0" tIns="0" bIns="0">
+            <a:noAutofit/>
+          </a:bodyPr>
+          <a:lstStyle/>
+          <a:p>
+            <a:pPr algn="l">
+              <a:lnSpc>
+                <a:spcPct val="122000"/>
+              </a:lnSpc>
+              <a:spcAft>
+                <a:spcPts val="0"/>
+              </a:spcAft>
+            </a:pPr>
+            <a:r>
+              <a:rPr sz="3400" b="1">
+                <a:solidFill>
+                  <a:srgbClr val="14181F"/>
+                </a:solidFill>
+                <a:latin typeface="Calibri"/>
+              </a:rPr>
+              <a:t>How is this instructor doing?</a:t>
+            </a:r>
+          </a:p>
+        </p:txBody>
+      </p:sp>
+      <p:sp>
+        <p:nvSpPr>
+          <p:cNvPr id="4" name="TextBox 3"/>
+          <p:cNvSpPr txBox="1"/>
+          <p:nvPr/>
+        </p:nvSpPr>
+        <p:spPr>
+          <a:xfrm>
+            <a:off x="822960" y="1783080"/>
+            <a:ext cx="9966960" cy="566928"/>
+          </a:xfrm>
+          <a:prstGeom prst="rect">
+            <a:avLst/>
+          </a:prstGeom>
+          <a:noFill/>
+        </p:spPr>
+        <p:txBody>
+          <a:bodyPr wrap="square" anchor="t" lIns="0" rIns="0" tIns="0" bIns="0">
+            <a:noAutofit/>
+          </a:bodyPr>
+          <a:lstStyle/>
+          <a:p>
+            <a:pPr algn="l">
+              <a:lnSpc>
+                <a:spcPct val="122000"/>
+              </a:lnSpc>
+              <a:spcAft>
+                <a:spcPts val="0"/>
+              </a:spcAft>
+            </a:pPr>
+            <a:r>
+              <a:rPr sz="1600" b="0">
+                <a:solidFill>
+                  <a:srgbClr val="55606E"/>
+                </a:solidFill>
+                <a:latin typeface="Calibri"/>
+              </a:rPr>
+              <a:t>The same feedback, grouped by the person it reflects on.</a:t>
+            </a:r>
+          </a:p>
+        </p:txBody>
+      </p:sp>
+      <p:sp>
+        <p:nvSpPr>
+          <p:cNvPr id="5" name="Rectangle 4"/>
           <p:cNvSpPr/>
           <p:nvPr/>
         </p:nvSpPr>
         <p:spPr>
           <a:xfrm>
-            <a:off x="822960" y="2240280"/>
-            <a:ext cx="548640" cy="548640"/>
-          </a:xfrm>
-          <a:prstGeom prst="ellipse">
+            <a:off x="3614547" y="2276475"/>
+            <a:ext cx="4932426" cy="3585210"/>
+          </a:xfrm>
+          <a:prstGeom prst="rect">
             <a:avLst/>
           </a:prstGeom>
           <a:solidFill>
             <a:srgbClr val="FFFFFF"/>
           </a:solidFill>
-          <a:ln>
-            <a:noFill/>
+          <a:ln w="12700">
+            <a:solidFill>
+              <a:srgbClr val="D3DCE8"/>
+            </a:solidFill>
           </a:ln>
           <a:effectLst/>
         </p:spPr>
@@ -7728,16 +8376,40 @@
           <a:p/>
         </p:txBody>
       </p:sp>
-      <p:sp>
-        <p:nvSpPr>
-          <p:cNvPr id="5" name="TextBox 4"/>
+      <p:pic>
+        <p:nvPicPr>
+          <p:cNvPr id="6" name="Picture 5" descr="people-list.png"/>
+          <p:cNvPicPr>
+            <a:picLocks noChangeAspect="1"/>
+          </p:cNvPicPr>
+          <p:nvPr/>
+        </p:nvPicPr>
+        <p:blipFill>
+          <a:blip r:embed="rId2"/>
+          <a:stretch>
+            <a:fillRect/>
+          </a:stretch>
+        </p:blipFill>
+        <p:spPr>
+          <a:xfrm>
+            <a:off x="3624072" y="2286000"/>
+            <a:ext cx="4913376" cy="3566160"/>
+          </a:xfrm>
+          <a:prstGeom prst="rect">
+            <a:avLst/>
+          </a:prstGeom>
+        </p:spPr>
+      </p:pic>
+      <p:sp>
+        <p:nvSpPr>
+          <p:cNvPr id="7" name="TextBox 6"/>
           <p:cNvSpPr txBox="1"/>
           <p:nvPr/>
         </p:nvSpPr>
         <p:spPr>
           <a:xfrm>
-            <a:off x="822960" y="2322576"/>
-            <a:ext cx="548640" cy="384048"/>
+            <a:off x="10881360" y="6327648"/>
+            <a:ext cx="502920" cy="274320"/>
           </a:xfrm>
           <a:prstGeom prst="rect">
             <a:avLst/>
@@ -7750,7 +8422,7 @@
           </a:bodyPr>
           <a:lstStyle/>
           <a:p>
-            <a:pPr algn="ctr">
+            <a:pPr algn="r">
               <a:lnSpc>
                 <a:spcPct val="122000"/>
               </a:lnSpc>
@@ -7759,94 +8431,51 @@
               </a:spcAft>
             </a:pPr>
             <a:r>
-              <a:rPr sz="1900" b="1">
-                <a:solidFill>
-                  <a:srgbClr val="1C4F8B"/>
-                </a:solidFill>
-                <a:latin typeface="Calibri"/>
-              </a:rPr>
-              <a:t>1</a:t>
-            </a:r>
-          </a:p>
-        </p:txBody>
-      </p:sp>
-      <p:sp>
-        <p:nvSpPr>
-          <p:cNvPr id="6" name="TextBox 5"/>
-          <p:cNvSpPr txBox="1"/>
-          <p:nvPr/>
-        </p:nvSpPr>
-        <p:spPr>
-          <a:xfrm>
-            <a:off x="1691640" y="2221992"/>
-            <a:ext cx="8778240" cy="960120"/>
-          </a:xfrm>
-          <a:prstGeom prst="rect">
-            <a:avLst/>
-          </a:prstGeom>
-          <a:noFill/>
-        </p:spPr>
-        <p:txBody>
-          <a:bodyPr wrap="square" anchor="t" lIns="0" rIns="0" tIns="0" bIns="0">
-            <a:noAutofit/>
-          </a:bodyPr>
-          <a:lstStyle/>
-          <a:p>
-            <a:pPr algn="l">
-              <a:lnSpc>
-                <a:spcPct val="122000"/>
-              </a:lnSpc>
-              <a:spcAft>
-                <a:spcPts val="400"/>
-              </a:spcAft>
-            </a:pPr>
-            <a:r>
-              <a:rPr sz="2100" b="1">
-                <a:solidFill>
-                  <a:srgbClr val="FFFFFF"/>
-                </a:solidFill>
-                <a:latin typeface="Calibri"/>
-              </a:rPr>
-              <a:t>Create the folder</a:t>
-            </a:r>
-          </a:p>
-          <a:p>
-            <a:pPr algn="l">
-              <a:lnSpc>
-                <a:spcPct val="122000"/>
-              </a:lnSpc>
-              <a:spcAft>
-                <a:spcPts val="0"/>
-              </a:spcAft>
-            </a:pPr>
-            <a:r>
-              <a:rPr sz="1500" b="0">
-                <a:solidFill>
-                  <a:srgbClr val="FFFFFF"/>
-                </a:solidFill>
-                <a:latin typeface="Calibri"/>
-              </a:rPr>
-              <a:t>A Google account the detachment owns, and a folder named TOP-Feedback.</a:t>
-            </a:r>
-          </a:p>
-        </p:txBody>
-      </p:sp>
-      <p:sp>
-        <p:nvSpPr>
-          <p:cNvPr id="7" name="Oval 6"/>
+              <a:rPr sz="1100" b="0">
+                <a:solidFill>
+                  <a:srgbClr val="8A939F"/>
+                </a:solidFill>
+                <a:latin typeface="Calibri"/>
+              </a:rPr>
+              <a:t>18</a:t>
+            </a:r>
+          </a:p>
+        </p:txBody>
+      </p:sp>
+    </p:spTree>
+  </p:cSld>
+  <p:clrMapOvr>
+    <a:masterClrMapping/>
+  </p:clrMapOvr>
+</p:sld>
+</file>
+
+<file path=ppt/slides/slide19.xml><?xml version="1.0" encoding="utf-8"?>
+<p:sld xmlns:a="http://schemas.openxmlformats.org/drawingml/2006/main" xmlns:p="http://schemas.openxmlformats.org/presentationml/2006/main" xmlns:r="http://schemas.openxmlformats.org/officeDocument/2006/relationships">
+  <p:cSld>
+    <p:spTree>
+      <p:nvGrpSpPr>
+        <p:cNvPr id="1" name=""/>
+        <p:cNvGrpSpPr/>
+        <p:nvPr/>
+      </p:nvGrpSpPr>
+      <p:grpSpPr/>
+      <p:sp>
+        <p:nvSpPr>
+          <p:cNvPr id="2" name="Rectangle 1"/>
           <p:cNvSpPr/>
           <p:nvPr/>
         </p:nvSpPr>
         <p:spPr>
           <a:xfrm>
-            <a:off x="822960" y="3383280"/>
-            <a:ext cx="548640" cy="548640"/>
-          </a:xfrm>
-          <a:prstGeom prst="ellipse">
+            <a:off x="0" y="0"/>
+            <a:ext cx="12191695" cy="6858000"/>
+          </a:xfrm>
+          <a:prstGeom prst="rect">
             <a:avLst/>
           </a:prstGeom>
           <a:solidFill>
-            <a:srgbClr val="FFFFFF"/>
+            <a:srgbClr val="1C4F8B"/>
           </a:solidFill>
           <a:ln>
             <a:noFill/>
@@ -7875,14 +8504,14 @@
       </p:sp>
       <p:sp>
         <p:nvSpPr>
-          <p:cNvPr id="8" name="TextBox 7"/>
+          <p:cNvPr id="3" name="TextBox 2"/>
           <p:cNvSpPr txBox="1"/>
           <p:nvPr/>
         </p:nvSpPr>
         <p:spPr>
           <a:xfrm>
-            <a:off x="822960" y="3465576"/>
-            <a:ext cx="548640" cy="384048"/>
+            <a:off x="822960" y="1097280"/>
+            <a:ext cx="10515600" cy="1005840"/>
           </a:xfrm>
           <a:prstGeom prst="rect">
             <a:avLst/>
@@ -7895,7 +8524,7 @@
           </a:bodyPr>
           <a:lstStyle/>
           <a:p>
-            <a:pPr algn="ctr">
+            <a:pPr algn="l">
               <a:lnSpc>
                 <a:spcPct val="122000"/>
               </a:lnSpc>
@@ -7904,27 +8533,27 @@
               </a:spcAft>
             </a:pPr>
             <a:r>
-              <a:rPr sz="1900" b="1">
-                <a:solidFill>
-                  <a:srgbClr val="1C4F8B"/>
-                </a:solidFill>
-                <a:latin typeface="Calibri"/>
-              </a:rPr>
-              <a:t>2</a:t>
-            </a:r>
-          </a:p>
-        </p:txBody>
-      </p:sp>
-      <p:sp>
-        <p:nvSpPr>
-          <p:cNvPr id="9" name="TextBox 8"/>
+              <a:rPr sz="3200" b="1">
+                <a:solidFill>
+                  <a:srgbClr val="FFFFFF"/>
+                </a:solidFill>
+                <a:latin typeface="Calibri"/>
+              </a:rPr>
+              <a:t>Your detachment owns its data. Nobody else can reach it.</a:t>
+            </a:r>
+          </a:p>
+        </p:txBody>
+      </p:sp>
+      <p:sp>
+        <p:nvSpPr>
+          <p:cNvPr id="4" name="TextBox 3"/>
           <p:cNvSpPr txBox="1"/>
           <p:nvPr/>
         </p:nvSpPr>
         <p:spPr>
           <a:xfrm>
-            <a:off x="1691640" y="3364992"/>
-            <a:ext cx="8778240" cy="960120"/>
+            <a:off x="822960" y="2468880"/>
+            <a:ext cx="10424160" cy="868680"/>
           </a:xfrm>
           <a:prstGeom prst="rect">
             <a:avLst/>
@@ -7946,13 +8575,13 @@
               </a:spcAft>
             </a:pPr>
             <a:r>
-              <a:rPr sz="2100" b="1">
+              <a:rPr sz="1900" b="1">
                 <a:solidFill>
                   <a:srgbClr val="FFFFFF"/>
                 </a:solidFill>
                 <a:latin typeface="Calibri"/>
               </a:rPr>
-              <a:t>Register the app</a:t>
+              <a:t>It lives in your Google Drive, in your account</a:t>
             </a:r>
           </a:p>
           <a:p>
@@ -7965,69 +8594,27 @@
               </a:spcAft>
             </a:pPr>
             <a:r>
-              <a:rPr sz="1500" b="0">
+              <a:rPr sz="1400" b="0">
                 <a:solidFill>
                   <a:srgbClr val="FFFFFF"/>
                 </a:solidFill>
                 <a:latin typeface="Calibri"/>
               </a:rPr>
-              <a:t>One free Google Cloud project, so the app can reach that Drive. About ten minutes.</a:t>
-            </a:r>
-          </a:p>
-        </p:txBody>
-      </p:sp>
-      <p:sp>
-        <p:nvSpPr>
-          <p:cNvPr id="10" name="Oval 9"/>
-          <p:cNvSpPr/>
-          <p:nvPr/>
-        </p:nvSpPr>
-        <p:spPr>
-          <a:xfrm>
-            <a:off x="822960" y="4526280"/>
-            <a:ext cx="548640" cy="548640"/>
-          </a:xfrm>
-          <a:prstGeom prst="ellipse">
-            <a:avLst/>
-          </a:prstGeom>
-          <a:solidFill>
-            <a:srgbClr val="FFFFFF"/>
-          </a:solidFill>
-          <a:ln>
-            <a:noFill/>
-          </a:ln>
-          <a:effectLst/>
-        </p:spPr>
-        <p:style>
-          <a:lnRef idx="1">
-            <a:schemeClr val="accent1"/>
-          </a:lnRef>
-          <a:fillRef idx="3">
-            <a:schemeClr val="accent1"/>
-          </a:fillRef>
-          <a:effectRef idx="2">
-            <a:schemeClr val="accent1"/>
-          </a:effectRef>
-          <a:fontRef idx="minor">
-            <a:schemeClr val="lt1"/>
-          </a:fontRef>
-        </p:style>
-        <p:txBody>
-          <a:bodyPr rtlCol="0" anchor="ctr"/>
-          <a:lstStyle/>
-          <a:p/>
-        </p:txBody>
-      </p:sp>
-      <p:sp>
-        <p:nvSpPr>
-          <p:cNvPr id="11" name="TextBox 10"/>
+              <a:t>No vendor database, no copy anywhere else. Delete the folder and it is gone.</a:t>
+            </a:r>
+          </a:p>
+        </p:txBody>
+      </p:sp>
+      <p:sp>
+        <p:nvSpPr>
+          <p:cNvPr id="5" name="TextBox 4"/>
           <p:cNvSpPr txBox="1"/>
           <p:nvPr/>
         </p:nvSpPr>
         <p:spPr>
           <a:xfrm>
-            <a:off x="822960" y="4608576"/>
-            <a:ext cx="548640" cy="384048"/>
+            <a:off x="822960" y="3401568"/>
+            <a:ext cx="10424160" cy="868680"/>
           </a:xfrm>
           <a:prstGeom prst="rect">
             <a:avLst/>
@@ -8040,7 +8627,26 @@
           </a:bodyPr>
           <a:lstStyle/>
           <a:p>
-            <a:pPr algn="ctr">
+            <a:pPr algn="l">
+              <a:lnSpc>
+                <a:spcPct val="122000"/>
+              </a:lnSpc>
+              <a:spcAft>
+                <a:spcPts val="400"/>
+              </a:spcAft>
+            </a:pPr>
+            <a:r>
+              <a:rPr sz="1900" b="1">
+                <a:solidFill>
+                  <a:srgbClr val="FFFFFF"/>
+                </a:solidFill>
+                <a:latin typeface="Calibri"/>
+              </a:rPr>
+              <a:t>Only the folder's owner needs access to it</a:t>
+            </a:r>
+          </a:p>
+          <a:p>
+            <a:pPr algn="l">
               <a:lnSpc>
                 <a:spcPct val="122000"/>
               </a:lnSpc>
@@ -8049,27 +8655,27 @@
               </a:spcAft>
             </a:pPr>
             <a:r>
-              <a:rPr sz="1900" b="1">
-                <a:solidFill>
-                  <a:srgbClr val="1C4F8B"/>
-                </a:solidFill>
-                <a:latin typeface="Calibri"/>
-              </a:rPr>
-              <a:t>3</a:t>
-            </a:r>
-          </a:p>
-        </p:txBody>
-      </p:sp>
-      <p:sp>
-        <p:nvSpPr>
-          <p:cNvPr id="12" name="TextBox 11"/>
+              <a:rPr sz="1400" b="0">
+                <a:solidFill>
+                  <a:srgbClr val="FFFFFF"/>
+                </a:solidFill>
+                <a:latin typeface="Calibri"/>
+              </a:rPr>
+              <a:t>Cadets and cadre reach their feedback through your own server, not the folder.</a:t>
+            </a:r>
+          </a:p>
+        </p:txBody>
+      </p:sp>
+      <p:sp>
+        <p:nvSpPr>
+          <p:cNvPr id="6" name="TextBox 5"/>
           <p:cNvSpPr txBox="1"/>
           <p:nvPr/>
         </p:nvSpPr>
         <p:spPr>
           <a:xfrm>
-            <a:off x="1691640" y="4507992"/>
-            <a:ext cx="8778240" cy="960120"/>
+            <a:off x="822960" y="4334256"/>
+            <a:ext cx="10424160" cy="868680"/>
           </a:xfrm>
           <a:prstGeom prst="rect">
             <a:avLst/>
@@ -8091,13 +8697,13 @@
               </a:spcAft>
             </a:pPr>
             <a:r>
-              <a:rPr sz="2100" b="1">
+              <a:rPr sz="1900" b="1">
                 <a:solidFill>
                   <a:srgbClr val="FFFFFF"/>
                 </a:solidFill>
                 <a:latin typeface="Calibri"/>
               </a:rPr>
-              <a:t>Run the wizard</a:t>
+              <a:t>Removing somebody removes them permanently</a:t>
             </a:r>
           </a:p>
           <a:p>
@@ -8110,69 +8716,27 @@
               </a:spcAft>
             </a:pPr>
             <a:r>
-              <a:rPr sz="1500" b="0">
+              <a:rPr sz="1400" b="0">
                 <a:solidFill>
                   <a:srgbClr val="FFFFFF"/>
                 </a:solidFill>
                 <a:latin typeface="Calibri"/>
               </a:rPr>
-              <a:t>Paste the folder link, sign in with Google to claim it, add cadets by email.</a:t>
-            </a:r>
-          </a:p>
-        </p:txBody>
-      </p:sp>
-      <p:sp>
-        <p:nvSpPr>
-          <p:cNvPr id="13" name="Rectangle 12"/>
-          <p:cNvSpPr/>
-          <p:nvPr/>
-        </p:nvSpPr>
-        <p:spPr>
-          <a:xfrm>
-            <a:off x="822960" y="5806440"/>
-            <a:ext cx="10424160" cy="19050"/>
-          </a:xfrm>
-          <a:prstGeom prst="rect">
-            <a:avLst/>
-          </a:prstGeom>
-          <a:solidFill>
-            <a:srgbClr val="FFFFFF"/>
-          </a:solidFill>
-          <a:ln>
-            <a:noFill/>
-          </a:ln>
-          <a:effectLst/>
-        </p:spPr>
-        <p:style>
-          <a:lnRef idx="1">
-            <a:schemeClr val="accent1"/>
-          </a:lnRef>
-          <a:fillRef idx="3">
-            <a:schemeClr val="accent1"/>
-          </a:fillRef>
-          <a:effectRef idx="2">
-            <a:schemeClr val="accent1"/>
-          </a:effectRef>
-          <a:fontRef idx="minor">
-            <a:schemeClr val="lt1"/>
-          </a:fontRef>
-        </p:style>
-        <p:txBody>
-          <a:bodyPr rtlCol="0" anchor="ctr"/>
-          <a:lstStyle/>
-          <a:p/>
-        </p:txBody>
-      </p:sp>
-      <p:sp>
-        <p:nvSpPr>
-          <p:cNvPr id="14" name="TextBox 13"/>
+              <a:t>Their feedback stays; their name is stripped out of it and does not come back.</a:t>
+            </a:r>
+          </a:p>
+        </p:txBody>
+      </p:sp>
+      <p:sp>
+        <p:nvSpPr>
+          <p:cNvPr id="7" name="TextBox 6"/>
           <p:cNvSpPr txBox="1"/>
           <p:nvPr/>
         </p:nvSpPr>
         <p:spPr>
           <a:xfrm>
-            <a:off x="822960" y="6035040"/>
-            <a:ext cx="10424160" cy="411480"/>
+            <a:off x="822960" y="5266944"/>
+            <a:ext cx="10424160" cy="868680"/>
           </a:xfrm>
           <a:prstGeom prst="rect">
             <a:avLst/>
@@ -8190,17 +8754,36 @@
                 <a:spcPct val="122000"/>
               </a:lnSpc>
               <a:spcAft>
+                <a:spcPts val="400"/>
+              </a:spcAft>
+            </a:pPr>
+            <a:r>
+              <a:rPr sz="1900" b="1">
+                <a:solidFill>
+                  <a:srgbClr val="FFFFFF"/>
+                </a:solidFill>
+                <a:latin typeface="Calibri"/>
+              </a:rPr>
+              <a:t>There is an export built for sharing</a:t>
+            </a:r>
+          </a:p>
+          <a:p>
+            <a:pPr algn="l">
+              <a:lnSpc>
+                <a:spcPct val="122000"/>
+              </a:lnSpc>
+              <a:spcAft>
                 <a:spcPts val="0"/>
               </a:spcAft>
             </a:pPr>
             <a:r>
-              <a:rPr sz="1500" b="0">
+              <a:rPr sz="1400" b="0">
                 <a:solidFill>
                   <a:srgbClr val="FFFFFF"/>
                 </a:solidFill>
                 <a:latin typeface="Calibri"/>
               </a:rPr>
-              <a:t>Step by step, with screenshots: TOP-Feedback Setup Guide (PDF).</a:t>
+              <a:t>No roster, no names, timestamps rounded to the month. Safe to keep off-site.</a:t>
             </a:r>
           </a:p>
         </p:txBody>
@@ -8846,6 +9429,772 @@
 </p:sld>
 </file>
 
+<file path=ppt/slides/slide20.xml><?xml version="1.0" encoding="utf-8"?>
+<p:sld xmlns:a="http://schemas.openxmlformats.org/drawingml/2006/main" xmlns:p="http://schemas.openxmlformats.org/presentationml/2006/main" xmlns:r="http://schemas.openxmlformats.org/officeDocument/2006/relationships">
+  <p:cSld>
+    <p:spTree>
+      <p:nvGrpSpPr>
+        <p:cNvPr id="1" name=""/>
+        <p:cNvGrpSpPr/>
+        <p:nvPr/>
+      </p:nvGrpSpPr>
+      <p:grpSpPr/>
+      <p:sp>
+        <p:nvSpPr>
+          <p:cNvPr id="2" name="Rectangle 1"/>
+          <p:cNvSpPr/>
+          <p:nvPr/>
+        </p:nvSpPr>
+        <p:spPr>
+          <a:xfrm>
+            <a:off x="0" y="0"/>
+            <a:ext cx="12191695" cy="6858000"/>
+          </a:xfrm>
+          <a:prstGeom prst="rect">
+            <a:avLst/>
+          </a:prstGeom>
+          <a:solidFill>
+            <a:srgbClr val="1C4F8B"/>
+          </a:solidFill>
+          <a:ln>
+            <a:noFill/>
+          </a:ln>
+          <a:effectLst/>
+        </p:spPr>
+        <p:style>
+          <a:lnRef idx="1">
+            <a:schemeClr val="accent1"/>
+          </a:lnRef>
+          <a:fillRef idx="3">
+            <a:schemeClr val="accent1"/>
+          </a:fillRef>
+          <a:effectRef idx="2">
+            <a:schemeClr val="accent1"/>
+          </a:effectRef>
+          <a:fontRef idx="minor">
+            <a:schemeClr val="lt1"/>
+          </a:fontRef>
+        </p:style>
+        <p:txBody>
+          <a:bodyPr rtlCol="0" anchor="ctr"/>
+          <a:lstStyle/>
+          <a:p/>
+        </p:txBody>
+      </p:sp>
+      <p:sp>
+        <p:nvSpPr>
+          <p:cNvPr id="3" name="TextBox 2"/>
+          <p:cNvSpPr txBox="1"/>
+          <p:nvPr/>
+        </p:nvSpPr>
+        <p:spPr>
+          <a:xfrm>
+            <a:off x="822960" y="1005840"/>
+            <a:ext cx="9144000" cy="868680"/>
+          </a:xfrm>
+          <a:prstGeom prst="rect">
+            <a:avLst/>
+          </a:prstGeom>
+          <a:noFill/>
+        </p:spPr>
+        <p:txBody>
+          <a:bodyPr wrap="square" anchor="t" lIns="0" rIns="0" tIns="0" bIns="0">
+            <a:noAutofit/>
+          </a:bodyPr>
+          <a:lstStyle/>
+          <a:p>
+            <a:pPr algn="l">
+              <a:lnSpc>
+                <a:spcPct val="122000"/>
+              </a:lnSpc>
+              <a:spcAft>
+                <a:spcPts val="0"/>
+              </a:spcAft>
+            </a:pPr>
+            <a:r>
+              <a:rPr sz="4200" b="1">
+                <a:solidFill>
+                  <a:srgbClr val="FFFFFF"/>
+                </a:solidFill>
+                <a:latin typeface="Calibri"/>
+              </a:rPr>
+              <a:t>Getting started</a:t>
+            </a:r>
+          </a:p>
+        </p:txBody>
+      </p:sp>
+      <p:sp>
+        <p:nvSpPr>
+          <p:cNvPr id="4" name="Oval 3"/>
+          <p:cNvSpPr/>
+          <p:nvPr/>
+        </p:nvSpPr>
+        <p:spPr>
+          <a:xfrm>
+            <a:off x="822960" y="2103120"/>
+            <a:ext cx="548640" cy="548640"/>
+          </a:xfrm>
+          <a:prstGeom prst="ellipse">
+            <a:avLst/>
+          </a:prstGeom>
+          <a:solidFill>
+            <a:srgbClr val="FFFFFF"/>
+          </a:solidFill>
+          <a:ln>
+            <a:noFill/>
+          </a:ln>
+          <a:effectLst/>
+        </p:spPr>
+        <p:style>
+          <a:lnRef idx="1">
+            <a:schemeClr val="accent1"/>
+          </a:lnRef>
+          <a:fillRef idx="3">
+            <a:schemeClr val="accent1"/>
+          </a:fillRef>
+          <a:effectRef idx="2">
+            <a:schemeClr val="accent1"/>
+          </a:effectRef>
+          <a:fontRef idx="minor">
+            <a:schemeClr val="lt1"/>
+          </a:fontRef>
+        </p:style>
+        <p:txBody>
+          <a:bodyPr rtlCol="0" anchor="ctr"/>
+          <a:lstStyle/>
+          <a:p/>
+        </p:txBody>
+      </p:sp>
+      <p:sp>
+        <p:nvSpPr>
+          <p:cNvPr id="5" name="TextBox 4"/>
+          <p:cNvSpPr txBox="1"/>
+          <p:nvPr/>
+        </p:nvSpPr>
+        <p:spPr>
+          <a:xfrm>
+            <a:off x="822960" y="2185416"/>
+            <a:ext cx="548640" cy="384048"/>
+          </a:xfrm>
+          <a:prstGeom prst="rect">
+            <a:avLst/>
+          </a:prstGeom>
+          <a:noFill/>
+        </p:spPr>
+        <p:txBody>
+          <a:bodyPr wrap="square" anchor="t" lIns="0" rIns="0" tIns="0" bIns="0">
+            <a:noAutofit/>
+          </a:bodyPr>
+          <a:lstStyle/>
+          <a:p>
+            <a:pPr algn="ctr">
+              <a:lnSpc>
+                <a:spcPct val="122000"/>
+              </a:lnSpc>
+              <a:spcAft>
+                <a:spcPts val="0"/>
+              </a:spcAft>
+            </a:pPr>
+            <a:r>
+              <a:rPr sz="1900" b="1">
+                <a:solidFill>
+                  <a:srgbClr val="1C4F8B"/>
+                </a:solidFill>
+                <a:latin typeface="Calibri"/>
+              </a:rPr>
+              <a:t>1</a:t>
+            </a:r>
+          </a:p>
+        </p:txBody>
+      </p:sp>
+      <p:sp>
+        <p:nvSpPr>
+          <p:cNvPr id="6" name="TextBox 5"/>
+          <p:cNvSpPr txBox="1"/>
+          <p:nvPr/>
+        </p:nvSpPr>
+        <p:spPr>
+          <a:xfrm>
+            <a:off x="1691640" y="2084832"/>
+            <a:ext cx="8778240" cy="960120"/>
+          </a:xfrm>
+          <a:prstGeom prst="rect">
+            <a:avLst/>
+          </a:prstGeom>
+          <a:noFill/>
+        </p:spPr>
+        <p:txBody>
+          <a:bodyPr wrap="square" anchor="t" lIns="0" rIns="0" tIns="0" bIns="0">
+            <a:noAutofit/>
+          </a:bodyPr>
+          <a:lstStyle/>
+          <a:p>
+            <a:pPr algn="l">
+              <a:lnSpc>
+                <a:spcPct val="122000"/>
+              </a:lnSpc>
+              <a:spcAft>
+                <a:spcPts val="400"/>
+              </a:spcAft>
+            </a:pPr>
+            <a:r>
+              <a:rPr sz="2100" b="1">
+                <a:solidFill>
+                  <a:srgbClr val="FFFFFF"/>
+                </a:solidFill>
+                <a:latin typeface="Calibri"/>
+              </a:rPr>
+              <a:t>Create the folder</a:t>
+            </a:r>
+          </a:p>
+          <a:p>
+            <a:pPr algn="l">
+              <a:lnSpc>
+                <a:spcPct val="122000"/>
+              </a:lnSpc>
+              <a:spcAft>
+                <a:spcPts val="0"/>
+              </a:spcAft>
+            </a:pPr>
+            <a:r>
+              <a:rPr sz="1500" b="0">
+                <a:solidFill>
+                  <a:srgbClr val="FFFFFF"/>
+                </a:solidFill>
+                <a:latin typeface="Calibri"/>
+              </a:rPr>
+              <a:t>A Google account the detachment owns, and a folder named TOP-Feedback.</a:t>
+            </a:r>
+          </a:p>
+        </p:txBody>
+      </p:sp>
+      <p:sp>
+        <p:nvSpPr>
+          <p:cNvPr id="7" name="Oval 6"/>
+          <p:cNvSpPr/>
+          <p:nvPr/>
+        </p:nvSpPr>
+        <p:spPr>
+          <a:xfrm>
+            <a:off x="822960" y="3090672"/>
+            <a:ext cx="548640" cy="548640"/>
+          </a:xfrm>
+          <a:prstGeom prst="ellipse">
+            <a:avLst/>
+          </a:prstGeom>
+          <a:solidFill>
+            <a:srgbClr val="FFFFFF"/>
+          </a:solidFill>
+          <a:ln>
+            <a:noFill/>
+          </a:ln>
+          <a:effectLst/>
+        </p:spPr>
+        <p:style>
+          <a:lnRef idx="1">
+            <a:schemeClr val="accent1"/>
+          </a:lnRef>
+          <a:fillRef idx="3">
+            <a:schemeClr val="accent1"/>
+          </a:fillRef>
+          <a:effectRef idx="2">
+            <a:schemeClr val="accent1"/>
+          </a:effectRef>
+          <a:fontRef idx="minor">
+            <a:schemeClr val="lt1"/>
+          </a:fontRef>
+        </p:style>
+        <p:txBody>
+          <a:bodyPr rtlCol="0" anchor="ctr"/>
+          <a:lstStyle/>
+          <a:p/>
+        </p:txBody>
+      </p:sp>
+      <p:sp>
+        <p:nvSpPr>
+          <p:cNvPr id="8" name="TextBox 7"/>
+          <p:cNvSpPr txBox="1"/>
+          <p:nvPr/>
+        </p:nvSpPr>
+        <p:spPr>
+          <a:xfrm>
+            <a:off x="822960" y="3172968"/>
+            <a:ext cx="548640" cy="384048"/>
+          </a:xfrm>
+          <a:prstGeom prst="rect">
+            <a:avLst/>
+          </a:prstGeom>
+          <a:noFill/>
+        </p:spPr>
+        <p:txBody>
+          <a:bodyPr wrap="square" anchor="t" lIns="0" rIns="0" tIns="0" bIns="0">
+            <a:noAutofit/>
+          </a:bodyPr>
+          <a:lstStyle/>
+          <a:p>
+            <a:pPr algn="ctr">
+              <a:lnSpc>
+                <a:spcPct val="122000"/>
+              </a:lnSpc>
+              <a:spcAft>
+                <a:spcPts val="0"/>
+              </a:spcAft>
+            </a:pPr>
+            <a:r>
+              <a:rPr sz="1900" b="1">
+                <a:solidFill>
+                  <a:srgbClr val="1C4F8B"/>
+                </a:solidFill>
+                <a:latin typeface="Calibri"/>
+              </a:rPr>
+              <a:t>2</a:t>
+            </a:r>
+          </a:p>
+        </p:txBody>
+      </p:sp>
+      <p:sp>
+        <p:nvSpPr>
+          <p:cNvPr id="9" name="TextBox 8"/>
+          <p:cNvSpPr txBox="1"/>
+          <p:nvPr/>
+        </p:nvSpPr>
+        <p:spPr>
+          <a:xfrm>
+            <a:off x="1691640" y="3072384"/>
+            <a:ext cx="8778240" cy="960120"/>
+          </a:xfrm>
+          <a:prstGeom prst="rect">
+            <a:avLst/>
+          </a:prstGeom>
+          <a:noFill/>
+        </p:spPr>
+        <p:txBody>
+          <a:bodyPr wrap="square" anchor="t" lIns="0" rIns="0" tIns="0" bIns="0">
+            <a:noAutofit/>
+          </a:bodyPr>
+          <a:lstStyle/>
+          <a:p>
+            <a:pPr algn="l">
+              <a:lnSpc>
+                <a:spcPct val="122000"/>
+              </a:lnSpc>
+              <a:spcAft>
+                <a:spcPts val="400"/>
+              </a:spcAft>
+            </a:pPr>
+            <a:r>
+              <a:rPr sz="2100" b="1">
+                <a:solidFill>
+                  <a:srgbClr val="FFFFFF"/>
+                </a:solidFill>
+                <a:latin typeface="Calibri"/>
+              </a:rPr>
+              <a:t>Register the app</a:t>
+            </a:r>
+          </a:p>
+          <a:p>
+            <a:pPr algn="l">
+              <a:lnSpc>
+                <a:spcPct val="122000"/>
+              </a:lnSpc>
+              <a:spcAft>
+                <a:spcPts val="0"/>
+              </a:spcAft>
+            </a:pPr>
+            <a:r>
+              <a:rPr sz="1500" b="0">
+                <a:solidFill>
+                  <a:srgbClr val="FFFFFF"/>
+                </a:solidFill>
+                <a:latin typeface="Calibri"/>
+              </a:rPr>
+              <a:t>One free Google Cloud project, so the app can reach that Drive. About ten minutes.</a:t>
+            </a:r>
+          </a:p>
+        </p:txBody>
+      </p:sp>
+      <p:sp>
+        <p:nvSpPr>
+          <p:cNvPr id="10" name="Oval 9"/>
+          <p:cNvSpPr/>
+          <p:nvPr/>
+        </p:nvSpPr>
+        <p:spPr>
+          <a:xfrm>
+            <a:off x="822960" y="4078224"/>
+            <a:ext cx="548640" cy="548640"/>
+          </a:xfrm>
+          <a:prstGeom prst="ellipse">
+            <a:avLst/>
+          </a:prstGeom>
+          <a:solidFill>
+            <a:srgbClr val="FFFFFF"/>
+          </a:solidFill>
+          <a:ln>
+            <a:noFill/>
+          </a:ln>
+          <a:effectLst/>
+        </p:spPr>
+        <p:style>
+          <a:lnRef idx="1">
+            <a:schemeClr val="accent1"/>
+          </a:lnRef>
+          <a:fillRef idx="3">
+            <a:schemeClr val="accent1"/>
+          </a:fillRef>
+          <a:effectRef idx="2">
+            <a:schemeClr val="accent1"/>
+          </a:effectRef>
+          <a:fontRef idx="minor">
+            <a:schemeClr val="lt1"/>
+          </a:fontRef>
+        </p:style>
+        <p:txBody>
+          <a:bodyPr rtlCol="0" anchor="ctr"/>
+          <a:lstStyle/>
+          <a:p/>
+        </p:txBody>
+      </p:sp>
+      <p:sp>
+        <p:nvSpPr>
+          <p:cNvPr id="11" name="TextBox 10"/>
+          <p:cNvSpPr txBox="1"/>
+          <p:nvPr/>
+        </p:nvSpPr>
+        <p:spPr>
+          <a:xfrm>
+            <a:off x="822960" y="4160520"/>
+            <a:ext cx="548640" cy="384048"/>
+          </a:xfrm>
+          <a:prstGeom prst="rect">
+            <a:avLst/>
+          </a:prstGeom>
+          <a:noFill/>
+        </p:spPr>
+        <p:txBody>
+          <a:bodyPr wrap="square" anchor="t" lIns="0" rIns="0" tIns="0" bIns="0">
+            <a:noAutofit/>
+          </a:bodyPr>
+          <a:lstStyle/>
+          <a:p>
+            <a:pPr algn="ctr">
+              <a:lnSpc>
+                <a:spcPct val="122000"/>
+              </a:lnSpc>
+              <a:spcAft>
+                <a:spcPts val="0"/>
+              </a:spcAft>
+            </a:pPr>
+            <a:r>
+              <a:rPr sz="1900" b="1">
+                <a:solidFill>
+                  <a:srgbClr val="1C4F8B"/>
+                </a:solidFill>
+                <a:latin typeface="Calibri"/>
+              </a:rPr>
+              <a:t>3</a:t>
+            </a:r>
+          </a:p>
+        </p:txBody>
+      </p:sp>
+      <p:sp>
+        <p:nvSpPr>
+          <p:cNvPr id="12" name="TextBox 11"/>
+          <p:cNvSpPr txBox="1"/>
+          <p:nvPr/>
+        </p:nvSpPr>
+        <p:spPr>
+          <a:xfrm>
+            <a:off x="1691640" y="4059936"/>
+            <a:ext cx="8778240" cy="960120"/>
+          </a:xfrm>
+          <a:prstGeom prst="rect">
+            <a:avLst/>
+          </a:prstGeom>
+          <a:noFill/>
+        </p:spPr>
+        <p:txBody>
+          <a:bodyPr wrap="square" anchor="t" lIns="0" rIns="0" tIns="0" bIns="0">
+            <a:noAutofit/>
+          </a:bodyPr>
+          <a:lstStyle/>
+          <a:p>
+            <a:pPr algn="l">
+              <a:lnSpc>
+                <a:spcPct val="122000"/>
+              </a:lnSpc>
+              <a:spcAft>
+                <a:spcPts val="400"/>
+              </a:spcAft>
+            </a:pPr>
+            <a:r>
+              <a:rPr sz="2100" b="1">
+                <a:solidFill>
+                  <a:srgbClr val="FFFFFF"/>
+                </a:solidFill>
+                <a:latin typeface="Calibri"/>
+              </a:rPr>
+              <a:t>Deploy the server</a:t>
+            </a:r>
+          </a:p>
+          <a:p>
+            <a:pPr algn="l">
+              <a:lnSpc>
+                <a:spcPct val="122000"/>
+              </a:lnSpc>
+              <a:spcAft>
+                <a:spcPts val="0"/>
+              </a:spcAft>
+            </a:pPr>
+            <a:r>
+              <a:rPr sz="1500" b="0">
+                <a:solidFill>
+                  <a:srgbClr val="FFFFFF"/>
+                </a:solidFill>
+                <a:latin typeface="Calibri"/>
+              </a:rPr>
+              <a:t>A short script in the same account. Fifteen minutes, and nobody else needs the folder.</a:t>
+            </a:r>
+          </a:p>
+        </p:txBody>
+      </p:sp>
+      <p:sp>
+        <p:nvSpPr>
+          <p:cNvPr id="13" name="Oval 12"/>
+          <p:cNvSpPr/>
+          <p:nvPr/>
+        </p:nvSpPr>
+        <p:spPr>
+          <a:xfrm>
+            <a:off x="822960" y="5065776"/>
+            <a:ext cx="548640" cy="548640"/>
+          </a:xfrm>
+          <a:prstGeom prst="ellipse">
+            <a:avLst/>
+          </a:prstGeom>
+          <a:solidFill>
+            <a:srgbClr val="FFFFFF"/>
+          </a:solidFill>
+          <a:ln>
+            <a:noFill/>
+          </a:ln>
+          <a:effectLst/>
+        </p:spPr>
+        <p:style>
+          <a:lnRef idx="1">
+            <a:schemeClr val="accent1"/>
+          </a:lnRef>
+          <a:fillRef idx="3">
+            <a:schemeClr val="accent1"/>
+          </a:fillRef>
+          <a:effectRef idx="2">
+            <a:schemeClr val="accent1"/>
+          </a:effectRef>
+          <a:fontRef idx="minor">
+            <a:schemeClr val="lt1"/>
+          </a:fontRef>
+        </p:style>
+        <p:txBody>
+          <a:bodyPr rtlCol="0" anchor="ctr"/>
+          <a:lstStyle/>
+          <a:p/>
+        </p:txBody>
+      </p:sp>
+      <p:sp>
+        <p:nvSpPr>
+          <p:cNvPr id="14" name="TextBox 13"/>
+          <p:cNvSpPr txBox="1"/>
+          <p:nvPr/>
+        </p:nvSpPr>
+        <p:spPr>
+          <a:xfrm>
+            <a:off x="822960" y="5148072"/>
+            <a:ext cx="548640" cy="384048"/>
+          </a:xfrm>
+          <a:prstGeom prst="rect">
+            <a:avLst/>
+          </a:prstGeom>
+          <a:noFill/>
+        </p:spPr>
+        <p:txBody>
+          <a:bodyPr wrap="square" anchor="t" lIns="0" rIns="0" tIns="0" bIns="0">
+            <a:noAutofit/>
+          </a:bodyPr>
+          <a:lstStyle/>
+          <a:p>
+            <a:pPr algn="ctr">
+              <a:lnSpc>
+                <a:spcPct val="122000"/>
+              </a:lnSpc>
+              <a:spcAft>
+                <a:spcPts val="0"/>
+              </a:spcAft>
+            </a:pPr>
+            <a:r>
+              <a:rPr sz="1900" b="1">
+                <a:solidFill>
+                  <a:srgbClr val="1C4F8B"/>
+                </a:solidFill>
+                <a:latin typeface="Calibri"/>
+              </a:rPr>
+              <a:t>4</a:t>
+            </a:r>
+          </a:p>
+        </p:txBody>
+      </p:sp>
+      <p:sp>
+        <p:nvSpPr>
+          <p:cNvPr id="15" name="TextBox 14"/>
+          <p:cNvSpPr txBox="1"/>
+          <p:nvPr/>
+        </p:nvSpPr>
+        <p:spPr>
+          <a:xfrm>
+            <a:off x="1691640" y="5047488"/>
+            <a:ext cx="8778240" cy="960120"/>
+          </a:xfrm>
+          <a:prstGeom prst="rect">
+            <a:avLst/>
+          </a:prstGeom>
+          <a:noFill/>
+        </p:spPr>
+        <p:txBody>
+          <a:bodyPr wrap="square" anchor="t" lIns="0" rIns="0" tIns="0" bIns="0">
+            <a:noAutofit/>
+          </a:bodyPr>
+          <a:lstStyle/>
+          <a:p>
+            <a:pPr algn="l">
+              <a:lnSpc>
+                <a:spcPct val="122000"/>
+              </a:lnSpc>
+              <a:spcAft>
+                <a:spcPts val="400"/>
+              </a:spcAft>
+            </a:pPr>
+            <a:r>
+              <a:rPr sz="2100" b="1">
+                <a:solidFill>
+                  <a:srgbClr val="FFFFFF"/>
+                </a:solidFill>
+                <a:latin typeface="Calibri"/>
+              </a:rPr>
+              <a:t>Send the link</a:t>
+            </a:r>
+          </a:p>
+          <a:p>
+            <a:pPr algn="l">
+              <a:lnSpc>
+                <a:spcPct val="122000"/>
+              </a:lnSpc>
+              <a:spcAft>
+                <a:spcPts val="0"/>
+              </a:spcAft>
+            </a:pPr>
+            <a:r>
+              <a:rPr sz="1500" b="0">
+                <a:solidFill>
+                  <a:srgbClr val="FFFFFF"/>
+                </a:solidFill>
+                <a:latin typeface="Calibri"/>
+              </a:rPr>
+              <a:t>Add people by email, then send one join link. Cadets configure nothing.</a:t>
+            </a:r>
+          </a:p>
+        </p:txBody>
+      </p:sp>
+      <p:sp>
+        <p:nvSpPr>
+          <p:cNvPr id="16" name="Rectangle 15"/>
+          <p:cNvSpPr/>
+          <p:nvPr/>
+        </p:nvSpPr>
+        <p:spPr>
+          <a:xfrm>
+            <a:off x="822960" y="5806440"/>
+            <a:ext cx="10424160" cy="19050"/>
+          </a:xfrm>
+          <a:prstGeom prst="rect">
+            <a:avLst/>
+          </a:prstGeom>
+          <a:solidFill>
+            <a:srgbClr val="FFFFFF"/>
+          </a:solidFill>
+          <a:ln>
+            <a:noFill/>
+          </a:ln>
+          <a:effectLst/>
+        </p:spPr>
+        <p:style>
+          <a:lnRef idx="1">
+            <a:schemeClr val="accent1"/>
+          </a:lnRef>
+          <a:fillRef idx="3">
+            <a:schemeClr val="accent1"/>
+          </a:fillRef>
+          <a:effectRef idx="2">
+            <a:schemeClr val="accent1"/>
+          </a:effectRef>
+          <a:fontRef idx="minor">
+            <a:schemeClr val="lt1"/>
+          </a:fontRef>
+        </p:style>
+        <p:txBody>
+          <a:bodyPr rtlCol="0" anchor="ctr"/>
+          <a:lstStyle/>
+          <a:p/>
+        </p:txBody>
+      </p:sp>
+      <p:sp>
+        <p:nvSpPr>
+          <p:cNvPr id="17" name="TextBox 16"/>
+          <p:cNvSpPr txBox="1"/>
+          <p:nvPr/>
+        </p:nvSpPr>
+        <p:spPr>
+          <a:xfrm>
+            <a:off x="822960" y="6035040"/>
+            <a:ext cx="10424160" cy="411480"/>
+          </a:xfrm>
+          <a:prstGeom prst="rect">
+            <a:avLst/>
+          </a:prstGeom>
+          <a:noFill/>
+        </p:spPr>
+        <p:txBody>
+          <a:bodyPr wrap="square" anchor="t" lIns="0" rIns="0" tIns="0" bIns="0">
+            <a:noAutofit/>
+          </a:bodyPr>
+          <a:lstStyle/>
+          <a:p>
+            <a:pPr algn="l">
+              <a:lnSpc>
+                <a:spcPct val="122000"/>
+              </a:lnSpc>
+              <a:spcAft>
+                <a:spcPts val="0"/>
+              </a:spcAft>
+            </a:pPr>
+            <a:r>
+              <a:rPr sz="1500" b="0">
+                <a:solidFill>
+                  <a:srgbClr val="FFFFFF"/>
+                </a:solidFill>
+                <a:latin typeface="Calibri"/>
+              </a:rPr>
+              <a:t>Step by step, with screenshots: TOP-Feedback Setup Guide (PDF).</a:t>
+            </a:r>
+          </a:p>
+        </p:txBody>
+      </p:sp>
+    </p:spTree>
+  </p:cSld>
+  <p:clrMapOvr>
+    <a:masterClrMapping/>
+  </p:clrMapOvr>
+</p:sld>
+</file>
+
 <file path=ppt/slides/slide3.xml><?xml version="1.0" encoding="utf-8"?>
 <p:sld xmlns:a="http://schemas.openxmlformats.org/drawingml/2006/main" xmlns:p="http://schemas.openxmlformats.org/presentationml/2006/main" xmlns:r="http://schemas.openxmlformats.org/officeDocument/2006/relationships">
   <p:cSld>
@@ -9798,7 +11147,7 @@
                 </a:solidFill>
                 <a:latin typeface="Calibri"/>
               </a:rPr>
-              <a:t>One app, three doors</a:t>
+              <a:t>Built around the chain of command</a:t>
             </a:r>
           </a:p>
         </p:txBody>
@@ -9811,7 +11160,7 @@
         </p:nvSpPr>
         <p:spPr>
           <a:xfrm>
-            <a:off x="1171067" y="2002155"/>
+            <a:off x="988187" y="2002155"/>
             <a:ext cx="5247386" cy="3813809"/>
           </a:xfrm>
           <a:prstGeom prst="rect">
@@ -9863,7 +11212,7 @@
         </p:blipFill>
         <p:spPr>
           <a:xfrm>
-            <a:off x="1180592" y="2011680"/>
+            <a:off x="997712" y="2011680"/>
             <a:ext cx="5228336" cy="3794759"/>
           </a:xfrm>
           <a:prstGeom prst="rect">
@@ -9879,8 +11228,8 @@
         </p:nvSpPr>
         <p:spPr>
           <a:xfrm>
-            <a:off x="7223760" y="2240280"/>
-            <a:ext cx="4206240" cy="3566160"/>
+            <a:off x="6858000" y="2011680"/>
+            <a:ext cx="4572000" cy="4023360"/>
           </a:xfrm>
           <a:prstGeom prst="rect">
             <a:avLst/>
@@ -9898,68 +11247,68 @@
                 <a:spcPct val="122000"/>
               </a:lnSpc>
               <a:spcAft>
-                <a:spcPts val="1300"/>
-              </a:spcAft>
-            </a:pPr>
-            <a:r>
-              <a:rPr sz="1600" b="1">
+                <a:spcPts val="900"/>
+              </a:spcAft>
+            </a:pPr>
+            <a:r>
+              <a:rPr sz="1500" b="1">
                 <a:solidFill>
                   <a:srgbClr val="14181F"/>
                 </a:solidFill>
                 <a:latin typeface="Calibri"/>
               </a:rPr>
-              <a:t>Student</a:t>
-            </a:r>
-          </a:p>
-          <a:p>
-            <a:pPr algn="l">
-              <a:lnSpc>
-                <a:spcPct val="122000"/>
-              </a:lnSpc>
-              <a:spcAft>
-                <a:spcPts val="800"/>
-              </a:spcAft>
-            </a:pPr>
-            <a:r>
-              <a:rPr sz="1300" b="0">
+              <a:t>Cadet</a:t>
+            </a:r>
+          </a:p>
+          <a:p>
+            <a:pPr algn="l">
+              <a:lnSpc>
+                <a:spcPct val="122000"/>
+              </a:lnSpc>
+              <a:spcAft>
+                <a:spcPts val="400"/>
+              </a:spcAft>
+            </a:pPr>
+            <a:r>
+              <a:rPr sz="1200" b="0">
                 <a:solidFill>
                   <a:srgbClr val="55606E"/>
                 </a:solidFill>
                 <a:latin typeface="Calibri"/>
               </a:rPr>
-              <a:t>   Signs in, sees only the feedback assigned to them, submits it once.</a:t>
-            </a:r>
-          </a:p>
-          <a:p>
-            <a:pPr algn="l">
-              <a:lnSpc>
-                <a:spcPct val="122000"/>
-              </a:lnSpc>
-              <a:spcAft>
-                <a:spcPts val="1300"/>
-              </a:spcAft>
-            </a:pPr>
-            <a:r>
-              <a:rPr sz="1600" b="1">
+              <a:t>   Sees only what is assigned to them. Submits once.</a:t>
+            </a:r>
+          </a:p>
+          <a:p>
+            <a:pPr algn="l">
+              <a:lnSpc>
+                <a:spcPct val="122000"/>
+              </a:lnSpc>
+              <a:spcAft>
+                <a:spcPts val="900"/>
+              </a:spcAft>
+            </a:pPr>
+            <a:r>
+              <a:rPr sz="1500" b="1">
                 <a:solidFill>
                   <a:srgbClr val="14181F"/>
                 </a:solidFill>
                 <a:latin typeface="Calibri"/>
               </a:rPr>
-              <a:t>Instructor Portal</a:t>
-            </a:r>
-          </a:p>
-          <a:p>
-            <a:pPr algn="l">
-              <a:lnSpc>
-                <a:spcPct val="122000"/>
-              </a:lnSpc>
-              <a:spcAft>
-                <a:spcPts val="800"/>
-              </a:spcAft>
-            </a:pPr>
-            <a:r>
-              <a:rPr sz="1300" b="0">
+              <a:t>Instructor</a:t>
+            </a:r>
+          </a:p>
+          <a:p>
+            <a:pPr algn="l">
+              <a:lnSpc>
+                <a:spcPct val="122000"/>
+              </a:lnSpc>
+              <a:spcAft>
+                <a:spcPts val="400"/>
+              </a:spcAft>
+            </a:pPr>
+            <a:r>
+              <a:rPr sz="1200" b="0">
                 <a:solidFill>
                   <a:srgbClr val="55606E"/>
                 </a:solidFill>
@@ -9974,36 +11323,112 @@
                 <a:spcPct val="122000"/>
               </a:lnSpc>
               <a:spcAft>
-                <a:spcPts val="1300"/>
-              </a:spcAft>
-            </a:pPr>
-            <a:r>
-              <a:rPr sz="1600" b="1">
+                <a:spcPts val="900"/>
+              </a:spcAft>
+            </a:pPr>
+            <a:r>
+              <a:rPr sz="1500" b="1">
                 <a:solidFill>
                   <a:srgbClr val="14181F"/>
                 </a:solidFill>
                 <a:latin typeface="Calibri"/>
               </a:rPr>
-              <a:t>Database Administration</a:t>
-            </a:r>
-          </a:p>
-          <a:p>
-            <a:pPr algn="l">
-              <a:lnSpc>
-                <a:spcPct val="122000"/>
-              </a:lnSpc>
-              <a:spcAft>
-                <a:spcPts val="800"/>
-              </a:spcAft>
-            </a:pPr>
-            <a:r>
-              <a:rPr sz="1300" b="0">
+              <a:t>Cadre</a:t>
+            </a:r>
+          </a:p>
+          <a:p>
+            <a:pPr algn="l">
+              <a:lnSpc>
+                <a:spcPct val="122000"/>
+              </a:lnSpc>
+              <a:spcAft>
+                <a:spcPts val="400"/>
+              </a:spcAft>
+            </a:pPr>
+            <a:r>
+              <a:rPr sz="1200" b="0">
                 <a:solidFill>
                   <a:srgbClr val="55606E"/>
                 </a:solidFill>
                 <a:latin typeface="Calibri"/>
               </a:rPr>
-              <a:t>   Keeps the roster of who may use the app, and as what.</a:t>
+              <a:t>   All of that, plus an area instructors cannot see.</a:t>
+            </a:r>
+          </a:p>
+          <a:p>
+            <a:pPr algn="l">
+              <a:lnSpc>
+                <a:spcPct val="122000"/>
+              </a:lnSpc>
+              <a:spcAft>
+                <a:spcPts val="900"/>
+              </a:spcAft>
+            </a:pPr>
+            <a:r>
+              <a:rPr sz="1500" b="1">
+                <a:solidFill>
+                  <a:srgbClr val="14181F"/>
+                </a:solidFill>
+                <a:latin typeface="Calibri"/>
+              </a:rPr>
+              <a:t>Commander</a:t>
+            </a:r>
+          </a:p>
+          <a:p>
+            <a:pPr algn="l">
+              <a:lnSpc>
+                <a:spcPct val="122000"/>
+              </a:lnSpc>
+              <a:spcAft>
+                <a:spcPts val="400"/>
+              </a:spcAft>
+            </a:pPr>
+            <a:r>
+              <a:rPr sz="1200" b="0">
+                <a:solidFill>
+                  <a:srgbClr val="55606E"/>
+                </a:solidFill>
+                <a:latin typeface="Calibri"/>
+              </a:rPr>
+              <a:t>   Sees every area, including one only they can read.</a:t>
+            </a:r>
+          </a:p>
+          <a:p>
+            <a:pPr algn="l">
+              <a:lnSpc>
+                <a:spcPct val="122000"/>
+              </a:lnSpc>
+              <a:spcAft>
+                <a:spcPts val="900"/>
+              </a:spcAft>
+            </a:pPr>
+            <a:r>
+              <a:rPr sz="1500" b="1">
+                <a:solidFill>
+                  <a:srgbClr val="14181F"/>
+                </a:solidFill>
+                <a:latin typeface="Calibri"/>
+              </a:rPr>
+              <a:t>Database admin</a:t>
+            </a:r>
+          </a:p>
+          <a:p>
+            <a:pPr algn="l">
+              <a:lnSpc>
+                <a:spcPct val="122000"/>
+              </a:lnSpc>
+              <a:spcAft>
+                <a:spcPts val="400"/>
+              </a:spcAft>
+            </a:pPr>
+            <a:r>
+              <a:rPr sz="1200" b="0">
+                <a:solidFill>
+                  <a:srgbClr val="55606E"/>
+                </a:solidFill>
+                <a:latin typeface="Calibri"/>
+              </a:rPr>
+              <a:t>   Keeps the roster. A separate job, often held alongside.</a:t>
             </a:r>
           </a:p>
         </p:txBody>
